--- a/PPTs/L3-Exercises ANS.pptx
+++ b/PPTs/L3-Exercises ANS.pptx
@@ -5,10 +5,10 @@
     <p:sldMasterId id="2147483648" r:id="rId1"/>
   </p:sldMasterIdLst>
   <p:notesMasterIdLst>
-    <p:notesMasterId r:id="rId26"/>
+    <p:notesMasterId r:id="rId27"/>
   </p:notesMasterIdLst>
   <p:handoutMasterIdLst>
-    <p:handoutMasterId r:id="rId27"/>
+    <p:handoutMasterId r:id="rId28"/>
   </p:handoutMasterIdLst>
   <p:sldIdLst>
     <p:sldId id="256" r:id="rId2"/>
@@ -16,7 +16,7 @@
     <p:sldId id="1399" r:id="rId4"/>
     <p:sldId id="1382" r:id="rId5"/>
     <p:sldId id="1394" r:id="rId6"/>
-    <p:sldId id="348" r:id="rId7"/>
+    <p:sldId id="1400" r:id="rId7"/>
     <p:sldId id="1396" r:id="rId8"/>
     <p:sldId id="1381" r:id="rId9"/>
     <p:sldId id="1390" r:id="rId10"/>
@@ -26,15 +26,16 @@
     <p:sldId id="1392" r:id="rId14"/>
     <p:sldId id="1389" r:id="rId15"/>
     <p:sldId id="1393" r:id="rId16"/>
-    <p:sldId id="257" r:id="rId17"/>
-    <p:sldId id="258" r:id="rId18"/>
-    <p:sldId id="259" r:id="rId19"/>
-    <p:sldId id="260" r:id="rId20"/>
-    <p:sldId id="1379" r:id="rId21"/>
-    <p:sldId id="1380" r:id="rId22"/>
-    <p:sldId id="262" r:id="rId23"/>
-    <p:sldId id="264" r:id="rId24"/>
-    <p:sldId id="421" r:id="rId25"/>
+    <p:sldId id="1401" r:id="rId17"/>
+    <p:sldId id="257" r:id="rId18"/>
+    <p:sldId id="258" r:id="rId19"/>
+    <p:sldId id="259" r:id="rId20"/>
+    <p:sldId id="260" r:id="rId21"/>
+    <p:sldId id="1379" r:id="rId22"/>
+    <p:sldId id="1380" r:id="rId23"/>
+    <p:sldId id="262" r:id="rId24"/>
+    <p:sldId id="264" r:id="rId25"/>
+    <p:sldId id="421" r:id="rId26"/>
   </p:sldIdLst>
   <p:sldSz cx="12192000" cy="6858000"/>
   <p:notesSz cx="9601200" cy="7315200"/>
@@ -421,6 +422,32 @@
   </p:cSld>
   <p:clrMap bg1="lt1" tx1="dk1" bg2="lt2" tx2="dk2" accent1="accent1" accent2="accent2" accent3="accent3" accent4="accent4" accent5="accent5" accent6="accent6" hlink="hlink" folHlink="folHlink"/>
 </p:handoutMaster>
+</file>
+
+<file path=ppt/ink/ink1.xml><?xml version="1.0" encoding="utf-8"?>
+<inkml:ink xmlns:inkml="http://www.w3.org/2003/InkML">
+  <inkml:definitions>
+    <inkml:context xml:id="ctx0">
+      <inkml:inkSource xml:id="inkSrc0">
+        <inkml:traceFormat>
+          <inkml:channel name="X" type="integer" min="-2.14748E9" max="2.14748E9" units="cm"/>
+          <inkml:channel name="Y" type="integer" min="-2.14748E9" max="2.14748E9" units="cm"/>
+        </inkml:traceFormat>
+        <inkml:channelProperties>
+          <inkml:channelProperty channel="X" name="resolution" value="1000" units="1/cm"/>
+          <inkml:channelProperty channel="Y" name="resolution" value="1000" units="1/cm"/>
+        </inkml:channelProperties>
+      </inkml:inkSource>
+      <inkml:timestamp xml:id="ts0" timeString="2026-09-23T21:15:49.894"/>
+    </inkml:context>
+    <inkml:brush xml:id="br0">
+      <inkml:brushProperty name="width" value="0.05" units="cm"/>
+      <inkml:brushProperty name="height" value="0.05" units="cm"/>
+      <inkml:brushProperty name="ignorePressure" value="1"/>
+    </inkml:brush>
+  </inkml:definitions>
+  <inkml:trace contextRef="#ctx0" brushRef="#br0">0 0,'0'0</inkml:trace>
+</inkml:ink>
 </file>
 
 <file path=ppt/notesMasters/notesMaster1.xml><?xml version="1.0" encoding="utf-8"?>
@@ -10686,7 +10713,7 @@
             <a:prstTxWarp prst="textNoShape">
               <a:avLst/>
             </a:prstTxWarp>
-            <a:normAutofit fontScale="70000" lnSpcReduction="20000"/>
+            <a:normAutofit fontScale="62500" lnSpcReduction="20000"/>
           </a:bodyPr>
           <a:lstStyle>
             <a:lvl1pPr marL="285750" indent="-285750" algn="l" rtl="0" eaLnBrk="0" fontAlgn="base" hangingPunct="0">
@@ -10883,7 +10910,29 @@
           <a:p>
             <a:r>
               <a:rPr lang="en-GB" kern="0" dirty="0"/>
-              <a:t>Progress (Deadlock-Free): Not satisfied. If both threads set their flags simultaneously, they will block each other indefinitely, resulting in deadlock.</a:t>
+              <a:t>Progress (Deadlock-Free): Not satisfied. If both threads set their flags simultaneously (T0 sets </a:t>
+            </a:r>
+            <a:r>
+              <a:rPr lang="en-GB" altLang="zh-CN" sz="3200" b="0" kern="0" dirty="0">
+                <a:latin typeface="Courier New" panose="02070309020205020404" pitchFamily="49" charset="0"/>
+                <a:cs typeface="Courier New" panose="02070309020205020404" pitchFamily="49" charset="0"/>
+              </a:rPr>
+              <a:t>flag[0] = true;</a:t>
+            </a:r>
+            <a:r>
+              <a:rPr lang="en-GB" kern="0" dirty="0"/>
+              <a:t>T1 sets </a:t>
+            </a:r>
+            <a:r>
+              <a:rPr lang="en-GB" altLang="zh-CN" sz="3200" b="0" kern="0" dirty="0">
+                <a:latin typeface="Courier New" panose="02070309020205020404" pitchFamily="49" charset="0"/>
+                <a:cs typeface="Courier New" panose="02070309020205020404" pitchFamily="49" charset="0"/>
+              </a:rPr>
+              <a:t>flag[1] = true;</a:t>
+            </a:r>
+            <a:r>
+              <a:rPr lang="en-GB" kern="0" dirty="0"/>
+              <a:t>), then both will spin-wait in while() loop, blocking each other indefinitely, resulting in deadlock.</a:t>
             </a:r>
           </a:p>
           <a:p>
@@ -12057,6 +12106,57 @@
           </a:p>
         </p:txBody>
       </p:sp>
+      <mc:AlternateContent xmlns:mc="http://schemas.openxmlformats.org/markup-compatibility/2006" xmlns:p14="http://schemas.microsoft.com/office/powerpoint/2010/main">
+        <mc:Choice Requires="p14">
+          <p:contentPart p14:bwMode="auto" r:id="rId3">
+            <p14:nvContentPartPr>
+              <p14:cNvPr id="3" name="Ink 2">
+                <a:extLst>
+                  <a:ext uri="{FF2B5EF4-FFF2-40B4-BE49-F238E27FC236}">
+                    <a16:creationId xmlns:a16="http://schemas.microsoft.com/office/drawing/2014/main" id="{F280DECE-D37D-4FAE-9196-E4D10B61870F}"/>
+                  </a:ext>
+                </a:extLst>
+              </p14:cNvPr>
+              <p14:cNvContentPartPr/>
+              <p14:nvPr/>
+            </p14:nvContentPartPr>
+            <p14:xfrm>
+              <a:off x="10414944" y="4745808"/>
+              <a:ext cx="360" cy="360"/>
+            </p14:xfrm>
+          </p:contentPart>
+        </mc:Choice>
+        <mc:Fallback xmlns="">
+          <p:pic>
+            <p:nvPicPr>
+              <p:cNvPr id="3" name="Ink 2">
+                <a:extLst>
+                  <a:ext uri="{FF2B5EF4-FFF2-40B4-BE49-F238E27FC236}">
+                    <a16:creationId xmlns:a16="http://schemas.microsoft.com/office/drawing/2014/main" id="{F280DECE-D37D-4FAE-9196-E4D10B61870F}"/>
+                  </a:ext>
+                </a:extLst>
+              </p:cNvPr>
+              <p:cNvPicPr/>
+              <p:nvPr/>
+            </p:nvPicPr>
+            <p:blipFill>
+              <a:blip r:embed="rId4"/>
+              <a:stretch>
+                <a:fillRect/>
+              </a:stretch>
+            </p:blipFill>
+            <p:spPr>
+              <a:xfrm>
+                <a:off x="10405944" y="4736808"/>
+                <a:ext cx="18000" cy="18000"/>
+              </a:xfrm>
+              <a:prstGeom prst="rect">
+                <a:avLst/>
+              </a:prstGeom>
+            </p:spPr>
+          </p:pic>
+        </mc:Fallback>
+      </mc:AlternateContent>
     </p:spTree>
     <p:extLst>
       <p:ext uri="{BB962C8B-B14F-4D97-AF65-F5344CB8AC3E}">
@@ -12146,9 +12246,79 @@
         </p:spPr>
         <p:txBody>
           <a:bodyPr>
-            <a:normAutofit fontScale="85000" lnSpcReduction="10000"/>
+            <a:normAutofit fontScale="55000" lnSpcReduction="20000"/>
           </a:bodyPr>
           <a:lstStyle/>
+          <a:p>
+            <a:r>
+              <a:rPr lang="en-GB" dirty="0"/>
+              <a:t>Each thread is </a:t>
+            </a:r>
+            <a:r>
+              <a:rPr lang="en-GB" dirty="0">
+                <a:solidFill>
+                  <a:srgbClr val="FF0000"/>
+                </a:solidFill>
+              </a:rPr>
+              <a:t>courteous</a:t>
+            </a:r>
+            <a:r>
+              <a:rPr lang="en-GB" dirty="0"/>
+              <a:t>, and sets </a:t>
+            </a:r>
+            <a:r>
+              <a:rPr lang="en-GB" dirty="0">
+                <a:solidFill>
+                  <a:srgbClr val="FF0000"/>
+                </a:solidFill>
+              </a:rPr>
+              <a:t>turn = (index of the other thread)</a:t>
+            </a:r>
+            <a:r>
+              <a:rPr lang="en-GB" dirty="0"/>
+              <a:t>, and spin-waits if the other thread is ready to enter CS or in CS, and turn == (index of the other thread).</a:t>
+            </a:r>
+          </a:p>
+          <a:p>
+            <a:endParaRPr lang="en-GB" dirty="0"/>
+          </a:p>
+          <a:p>
+            <a:r>
+              <a:rPr lang="en-GB" dirty="0" err="1"/>
+              <a:t>TestAndSet</a:t>
+            </a:r>
+            <a:r>
+              <a:rPr lang="en-GB" dirty="0"/>
+              <a:t> Instruction: Not required. T0 reads flag[1] and updates flag[0]; T1 reads flag[0] and updates flag[1]; </a:t>
+            </a:r>
+            <a:r>
+              <a:rPr lang="en-GB" dirty="0">
+                <a:solidFill>
+                  <a:srgbClr val="FF0000"/>
+                </a:solidFill>
+              </a:rPr>
+              <a:t>They do not update the same flag variable</a:t>
+            </a:r>
+            <a:r>
+              <a:rPr lang="en-GB" dirty="0"/>
+              <a:t>, so no mutual exclusion is needed for flag variables. Both threads read and write the turn variable, but it is </a:t>
+            </a:r>
+            <a:r>
+              <a:rPr lang="en-GB" dirty="0">
+                <a:solidFill>
+                  <a:srgbClr val="FF0000"/>
+                </a:solidFill>
+              </a:rPr>
+              <a:t>write followed by read</a:t>
+            </a:r>
+            <a:r>
+              <a:rPr lang="en-GB" dirty="0"/>
+              <a:t>, so no race condition, unlike previous slide with race due to read followed by write to flag variable.</a:t>
+            </a:r>
+          </a:p>
+          <a:p>
+            <a:endParaRPr lang="en-GB" dirty="0"/>
+          </a:p>
           <a:p>
             <a:r>
               <a:rPr lang="en-GB" dirty="0"/>
@@ -14869,7 +15039,31 @@
           <a:p>
             <a:r>
               <a:rPr lang="en-GB" dirty="0"/>
-              <a:t>This variation is similar to Peterson's Solution but with an incorrect implementation of the turn variable:</a:t>
+              <a:t>This variation is similar to Peterson's Solution but with an incorrect implementation of the turn variable. Each thread is </a:t>
+            </a:r>
+            <a:r>
+              <a:rPr lang="en-GB" dirty="0">
+                <a:solidFill>
+                  <a:srgbClr val="FF0000"/>
+                </a:solidFill>
+              </a:rPr>
+              <a:t>selfish</a:t>
+            </a:r>
+            <a:r>
+              <a:rPr lang="en-GB" dirty="0"/>
+              <a:t>, and sets </a:t>
+            </a:r>
+            <a:r>
+              <a:rPr lang="en-GB" dirty="0">
+                <a:solidFill>
+                  <a:srgbClr val="FF0000"/>
+                </a:solidFill>
+              </a:rPr>
+              <a:t>turn = (index of self thread), </a:t>
+            </a:r>
+            <a:r>
+              <a:rPr lang="en-GB" dirty="0"/>
+              <a:t>and spin-waits if the other thread is ready to enter CS or in CS, and turn == (index of the other thread).</a:t>
             </a:r>
           </a:p>
           <a:p>
@@ -16423,6 +16617,157 @@
       </p:grpSpPr>
       <p:sp>
         <p:nvSpPr>
+          <p:cNvPr id="2" name="Title 1">
+            <a:extLst>
+              <a:ext uri="{FF2B5EF4-FFF2-40B4-BE49-F238E27FC236}">
+                <a16:creationId xmlns:a16="http://schemas.microsoft.com/office/drawing/2014/main" id="{50107551-AA94-1C8A-669D-DC4DE44EEEA7}"/>
+              </a:ext>
+            </a:extLst>
+          </p:cNvPr>
+          <p:cNvSpPr>
+            <a:spLocks noGrp="1"/>
+          </p:cNvSpPr>
+          <p:nvPr>
+            <p:ph type="title"/>
+          </p:nvPr>
+        </p:nvSpPr>
+        <p:spPr/>
+        <p:txBody>
+          <a:bodyPr/>
+          <a:lstStyle/>
+          <a:p>
+            <a:r>
+              <a:rPr lang="en-US" altLang="zh-CN" dirty="0"/>
+              <a:t>Why Peterson’s Algorithm Is Not Used in Practice</a:t>
+            </a:r>
+            <a:endParaRPr lang="zh-CN" altLang="en-US" dirty="0"/>
+          </a:p>
+        </p:txBody>
+      </p:sp>
+      <p:sp>
+        <p:nvSpPr>
+          <p:cNvPr id="3" name="Content Placeholder 2">
+            <a:extLst>
+              <a:ext uri="{FF2B5EF4-FFF2-40B4-BE49-F238E27FC236}">
+                <a16:creationId xmlns:a16="http://schemas.microsoft.com/office/drawing/2014/main" id="{128557BA-09BE-CB4A-E18F-0E723F1B78B2}"/>
+              </a:ext>
+            </a:extLst>
+          </p:cNvPr>
+          <p:cNvSpPr>
+            <a:spLocks noGrp="1"/>
+          </p:cNvSpPr>
+          <p:nvPr>
+            <p:ph idx="1"/>
+          </p:nvPr>
+        </p:nvSpPr>
+        <p:spPr/>
+        <p:txBody>
+          <a:bodyPr>
+            <a:normAutofit fontScale="77500" lnSpcReduction="20000"/>
+          </a:bodyPr>
+          <a:lstStyle/>
+          <a:p>
+            <a:r>
+              <a:rPr lang="zh-CN" altLang="zh-CN" b="1" dirty="0"/>
+              <a:t>Peterson’s algorithm is a proof-of-concept, not a production lock.</a:t>
+            </a:r>
+            <a:endParaRPr lang="zh-CN" altLang="zh-CN" dirty="0"/>
+          </a:p>
+          <a:p>
+            <a:pPr lvl="0"/>
+            <a:r>
+              <a:rPr lang="zh-CN" altLang="zh-CN" b="1" dirty="0"/>
+              <a:t>Only supports two threads.</a:t>
+            </a:r>
+            <a:r>
+              <a:rPr lang="zh-CN" altLang="zh-CN" dirty="0"/>
+              <a:t> Extending it to many threads is complicated and inefficient; real programs may have dozens or thousands of threads.</a:t>
+            </a:r>
+          </a:p>
+          <a:p>
+            <a:pPr lvl="0"/>
+            <a:r>
+              <a:rPr lang="zh-CN" altLang="zh-CN" b="1" dirty="0"/>
+              <a:t>Busy waiting wastes CPU.</a:t>
+            </a:r>
+            <a:r>
+              <a:rPr lang="zh-CN" altLang="zh-CN" dirty="0"/>
+              <a:t> A waiting thread repeatedly executes a while loop, consuming processor cycles instead of sleeping and allowing useful work to run.</a:t>
+            </a:r>
+          </a:p>
+          <a:p>
+            <a:pPr lvl="0"/>
+            <a:r>
+              <a:rPr lang="zh-CN" altLang="zh-CN" b="1" dirty="0"/>
+              <a:t>Assumes a simple memory model.</a:t>
+            </a:r>
+            <a:r>
+              <a:rPr lang="zh-CN" altLang="zh-CN" dirty="0"/>
+              <a:t> Its correctness assumes that reads and writes occur in the order written by the program. Modern CPUs and optimizing compilers may reorder or delay memory operations unless explicit memory barriers/atomic operations are used.</a:t>
+            </a:r>
+          </a:p>
+          <a:p>
+            <a:pPr lvl="0"/>
+            <a:r>
+              <a:rPr lang="zh-CN" altLang="zh-CN" b="1" dirty="0"/>
+              <a:t>Poor scalability and cache contention.</a:t>
+            </a:r>
+            <a:r>
+              <a:rPr lang="zh-CN" altLang="zh-CN" dirty="0"/>
+              <a:t> Threads continuously read/write shared flag[] and turn variables, causing cache-coherence traffic as core count rises.</a:t>
+            </a:r>
+          </a:p>
+          <a:p>
+            <a:pPr lvl="0"/>
+            <a:r>
+              <a:rPr lang="zh-CN" altLang="zh-CN" b="1" dirty="0"/>
+              <a:t>Better OS/hardware-supported alternatives exist.</a:t>
+            </a:r>
+            <a:r>
+              <a:rPr lang="zh-CN" altLang="zh-CN" dirty="0"/>
+              <a:t> Production code uses atomic instructions plus mutexes, semaphores, condition variables, spinlock</a:t>
+            </a:r>
+            <a:r>
+              <a:rPr lang="zh-CN" altLang="zh-CN"/>
+              <a:t>s.</a:t>
+            </a:r>
+            <a:endParaRPr lang="zh-CN" altLang="zh-CN" dirty="0"/>
+          </a:p>
+        </p:txBody>
+      </p:sp>
+    </p:spTree>
+    <p:extLst>
+      <p:ext uri="{BB962C8B-B14F-4D97-AF65-F5344CB8AC3E}">
+        <p14:creationId xmlns:p14="http://schemas.microsoft.com/office/powerpoint/2010/main" val="2297062265"/>
+      </p:ext>
+    </p:extLst>
+  </p:cSld>
+  <p:clrMapOvr>
+    <a:masterClrMapping/>
+  </p:clrMapOvr>
+  <p:transition/>
+</p:sld>
+</file>
+
+<file path=ppt/slides/slide17.xml><?xml version="1.0" encoding="utf-8"?>
+<p:sld xmlns:a="http://schemas.openxmlformats.org/drawingml/2006/main" xmlns:r="http://schemas.openxmlformats.org/officeDocument/2006/relationships" xmlns:p="http://schemas.openxmlformats.org/presentationml/2006/main">
+  <p:cSld>
+    <p:spTree>
+      <p:nvGrpSpPr>
+        <p:cNvPr id="1" name=""/>
+        <p:cNvGrpSpPr/>
+        <p:nvPr/>
+      </p:nvGrpSpPr>
+      <p:grpSpPr>
+        <a:xfrm>
+          <a:off x="0" y="0"/>
+          <a:ext cx="0" cy="0"/>
+          <a:chOff x="0" y="0"/>
+          <a:chExt cx="0" cy="0"/>
+        </a:xfrm>
+      </p:grpSpPr>
+      <p:sp>
+        <p:nvSpPr>
           <p:cNvPr id="2" name="object 2"/>
           <p:cNvSpPr txBox="1">
             <a:spLocks noGrp="1"/>
@@ -19288,7 +19633,7 @@
                 <a:cs typeface="Arial"/>
               </a:rPr>
               <a:pPr algn="ctr"/>
-              <a:t>16</a:t>
+              <a:t>17</a:t>
             </a:fld>
             <a:endParaRPr lang="nb-NO" sz="1400" b="0" i="0" dirty="0">
               <a:solidFill>
@@ -19309,7 +19654,7 @@
 </p:sld>
 </file>
 
-<file path=ppt/slides/slide17.xml><?xml version="1.0" encoding="utf-8"?>
+<file path=ppt/slides/slide18.xml><?xml version="1.0" encoding="utf-8"?>
 <p:sld xmlns:a="http://schemas.openxmlformats.org/drawingml/2006/main" xmlns:r="http://schemas.openxmlformats.org/officeDocument/2006/relationships" xmlns:p="http://schemas.openxmlformats.org/presentationml/2006/main">
   <p:cSld>
     <p:spTree>
@@ -22183,7 +22528,7 @@
                 <a:cs typeface="Arial"/>
               </a:rPr>
               <a:pPr algn="ctr"/>
-              <a:t>17</a:t>
+              <a:t>18</a:t>
             </a:fld>
             <a:endParaRPr lang="nb-NO" sz="1400" b="0" i="0" dirty="0">
               <a:solidFill>
@@ -22204,7 +22549,7 @@
 </p:sld>
 </file>
 
-<file path=ppt/slides/slide18.xml><?xml version="1.0" encoding="utf-8"?>
+<file path=ppt/slides/slide19.xml><?xml version="1.0" encoding="utf-8"?>
 <p:sld xmlns:a="http://schemas.openxmlformats.org/drawingml/2006/main" xmlns:r="http://schemas.openxmlformats.org/officeDocument/2006/relationships" xmlns:p="http://schemas.openxmlformats.org/presentationml/2006/main">
   <p:cSld>
     <p:spTree>
@@ -22230,7 +22575,7 @@
         <p:spPr>
           <a:xfrm>
             <a:off x="1409406" y="760912"/>
-            <a:ext cx="9715794" cy="2288255"/>
+            <a:ext cx="9715794" cy="1967655"/>
           </a:xfrm>
           <a:prstGeom prst="rect">
             <a:avLst/>
@@ -22702,11 +23047,18 @@
               </a:spcBef>
             </a:pPr>
             <a:r>
+              <a:rPr lang="en-GB" sz="2400" b="0" spc="-50">
+                <a:latin typeface="Gill Sans" panose="020B0502020104020203"/>
+                <a:cs typeface="Arial MT"/>
+              </a:rPr>
+              <a:t>(We </a:t>
+            </a:r>
+            <a:r>
               <a:rPr lang="en-GB" sz="2400" b="0" spc="-50" dirty="0">
                 <a:latin typeface="Gill Sans" panose="020B0502020104020203"/>
                 <a:cs typeface="Arial MT"/>
               </a:rPr>
-              <a:t>(Line “int x” can be outside or inside the critical section with no difference. We use a slightly different notation of </a:t>
+              <a:t>use a slightly different notation of </a:t>
             </a:r>
             <a:r>
               <a:rPr lang="en-GB" sz="2400" b="0" spc="-50" dirty="0" err="1">
@@ -24021,7 +24373,7 @@
                 <a:cs typeface="Arial"/>
               </a:rPr>
               <a:pPr algn="ctr"/>
-              <a:t>18</a:t>
+              <a:t>19</a:t>
             </a:fld>
             <a:endParaRPr lang="nb-NO" sz="1400" b="0" i="0" dirty="0">
               <a:solidFill>
@@ -24868,7 +25220,1027 @@
 </p:sld>
 </file>
 
-<file path=ppt/slides/slide19.xml><?xml version="1.0" encoding="utf-8"?>
+<file path=ppt/slides/slide2.xml><?xml version="1.0" encoding="utf-8"?>
+<p:sld xmlns:a="http://schemas.openxmlformats.org/drawingml/2006/main" xmlns:r="http://schemas.openxmlformats.org/officeDocument/2006/relationships" xmlns:p="http://schemas.openxmlformats.org/presentationml/2006/main">
+  <p:cSld>
+    <p:spTree>
+      <p:nvGrpSpPr>
+        <p:cNvPr id="1" name=""/>
+        <p:cNvGrpSpPr/>
+        <p:nvPr/>
+      </p:nvGrpSpPr>
+      <p:grpSpPr>
+        <a:xfrm>
+          <a:off x="0" y="0"/>
+          <a:ext cx="0" cy="0"/>
+          <a:chOff x="0" y="0"/>
+          <a:chExt cx="0" cy="0"/>
+        </a:xfrm>
+      </p:grpSpPr>
+      <p:sp>
+        <p:nvSpPr>
+          <p:cNvPr id="2" name="Title 1">
+            <a:extLst>
+              <a:ext uri="{FF2B5EF4-FFF2-40B4-BE49-F238E27FC236}">
+                <a16:creationId xmlns:a16="http://schemas.microsoft.com/office/drawing/2014/main" id="{8F70288D-85B6-6CC3-1FB2-3B04FD5CDA2E}"/>
+              </a:ext>
+            </a:extLst>
+          </p:cNvPr>
+          <p:cNvSpPr>
+            <a:spLocks noGrp="1"/>
+          </p:cNvSpPr>
+          <p:nvPr>
+            <p:ph type="title"/>
+          </p:nvPr>
+        </p:nvSpPr>
+        <p:spPr/>
+        <p:txBody>
+          <a:bodyPr/>
+          <a:lstStyle/>
+          <a:p>
+            <a:r>
+              <a:rPr lang="en-GB" dirty="0"/>
+              <a:t>Concurrency I</a:t>
+            </a:r>
+            <a:endParaRPr lang="en-SE" dirty="0"/>
+          </a:p>
+        </p:txBody>
+      </p:sp>
+      <p:sp>
+        <p:nvSpPr>
+          <p:cNvPr id="3" name="Content Placeholder 2">
+            <a:extLst>
+              <a:ext uri="{FF2B5EF4-FFF2-40B4-BE49-F238E27FC236}">
+                <a16:creationId xmlns:a16="http://schemas.microsoft.com/office/drawing/2014/main" id="{F457968C-088E-2EEC-6B87-D73D14EA4986}"/>
+              </a:ext>
+            </a:extLst>
+          </p:cNvPr>
+          <p:cNvSpPr>
+            <a:spLocks noGrp="1"/>
+          </p:cNvSpPr>
+          <p:nvPr>
+            <p:ph idx="1"/>
+          </p:nvPr>
+        </p:nvSpPr>
+        <p:spPr>
+          <a:xfrm>
+            <a:off x="812800" y="2695986"/>
+            <a:ext cx="10566400" cy="3323814"/>
+          </a:xfrm>
+        </p:spPr>
+        <p:txBody>
+          <a:bodyPr>
+            <a:normAutofit/>
+          </a:bodyPr>
+          <a:lstStyle/>
+          <a:p>
+            <a:r>
+              <a:rPr lang="en-GB" dirty="0"/>
+              <a:t>Consider two concurrent threads T0, T1, which access a shared variable x that has been initialized to 0. There is no mutex protection. </a:t>
+            </a:r>
+          </a:p>
+          <a:p>
+            <a:r>
+              <a:rPr lang="en-GB" dirty="0"/>
+              <a:t>Q: What are the minimum, maximum, and all possible values of x after the two threads have completed execution?</a:t>
+            </a:r>
+          </a:p>
+        </p:txBody>
+      </p:sp>
+      <p:sp>
+        <p:nvSpPr>
+          <p:cNvPr id="4" name="Plassholder for innhold 2">
+            <a:extLst>
+              <a:ext uri="{FF2B5EF4-FFF2-40B4-BE49-F238E27FC236}">
+                <a16:creationId xmlns:a16="http://schemas.microsoft.com/office/drawing/2014/main" id="{758290D7-B791-5228-8CF4-A4FA620CB43A}"/>
+              </a:ext>
+            </a:extLst>
+          </p:cNvPr>
+          <p:cNvSpPr txBox="1">
+            <a:spLocks/>
+          </p:cNvSpPr>
+          <p:nvPr/>
+        </p:nvSpPr>
+        <p:spPr bwMode="auto">
+          <a:xfrm>
+            <a:off x="2514600" y="1419860"/>
+            <a:ext cx="3699076" cy="1276127"/>
+          </a:xfrm>
+          <a:prstGeom prst="rect">
+            <a:avLst/>
+          </a:prstGeom>
+          <a:noFill/>
+          <a:ln>
+            <a:solidFill>
+              <a:schemeClr val="accent1">
+                <a:lumMod val="50000"/>
+              </a:schemeClr>
+            </a:solidFill>
+          </a:ln>
+          <a:effectLst/>
+          <a:extLst>
+            <a:ext uri="{FAA26D3D-D897-4be2-8F04-BA451C77F1D7}">
+              <ma14:placeholderFlag xmlns:ma14="http://schemas.microsoft.com/office/mac/drawingml/2011/main" xmlns="" val="1"/>
+            </a:ext>
+            <a:ext uri="{909E8E84-426E-40dd-AFC4-6F175D3DCCD1}">
+              <a14:hiddenFill xmlns:a14="http://schemas.microsoft.com/office/drawing/2010/main" xmlns="">
+                <a:solidFill>
+                  <a:schemeClr val="bg1"/>
+                </a:solidFill>
+              </a14:hiddenFill>
+            </a:ext>
+            <a:ext uri="{91240B29-F687-4f45-9708-019B960494DF}">
+              <a14:hiddenLine xmlns:a14="http://schemas.microsoft.com/office/drawing/2010/main" xmlns="" w="12700">
+                <a:pattFill prst="narHorz">
+                  <a:fgClr>
+                    <a:schemeClr val="tx1"/>
+                  </a:fgClr>
+                  <a:bgClr>
+                    <a:schemeClr val="bg1"/>
+                  </a:bgClr>
+                </a:pattFill>
+                <a:miter lim="800000"/>
+                <a:headEnd/>
+                <a:tailEnd/>
+              </a14:hiddenLine>
+            </a:ext>
+            <a:ext uri="{AF507438-7753-43e0-B8FC-AC1667EBCBE1}">
+              <a14:hiddenEffects xmlns:a14="http://schemas.microsoft.com/office/drawing/2010/main" xmlns="">
+                <a:effectLst>
+                  <a:outerShdw blurRad="63500" dist="38099" dir="2700000" algn="ctr" rotWithShape="0">
+                    <a:schemeClr val="bg2">
+                      <a:alpha val="74998"/>
+                    </a:schemeClr>
+                  </a:outerShdw>
+                </a:effectLst>
+              </a14:hiddenEffects>
+            </a:ext>
+          </a:extLst>
+        </p:spPr>
+        <p:txBody>
+          <a:bodyPr vert="horz" wrap="square" lIns="90478" tIns="44445" rIns="90478" bIns="44445" numCol="1" anchor="t" anchorCtr="0" compatLnSpc="1">
+            <a:prstTxWarp prst="textNoShape">
+              <a:avLst/>
+            </a:prstTxWarp>
+            <a:noAutofit/>
+          </a:bodyPr>
+          <a:lstStyle>
+            <a:lvl1pPr marL="285750" indent="-285750" algn="l" rtl="0" eaLnBrk="0" fontAlgn="base" hangingPunct="0">
+              <a:lnSpc>
+                <a:spcPct val="90000"/>
+              </a:lnSpc>
+              <a:spcBef>
+                <a:spcPct val="30000"/>
+              </a:spcBef>
+              <a:spcAft>
+                <a:spcPct val="0"/>
+              </a:spcAft>
+              <a:buSzPct val="100000"/>
+              <a:buChar char="•"/>
+              <a:defRPr sz="2400">
+                <a:solidFill>
+                  <a:schemeClr val="tx1"/>
+                </a:solidFill>
+                <a:latin typeface="Gill Sans" charset="0"/>
+                <a:ea typeface="ＭＳ Ｐゴシック" charset="0"/>
+                <a:cs typeface="Gill Sans" charset="0"/>
+              </a:defRPr>
+            </a:lvl1pPr>
+            <a:lvl2pPr marL="685800" indent="-228600" algn="l" rtl="0" eaLnBrk="0" fontAlgn="base" hangingPunct="0">
+              <a:lnSpc>
+                <a:spcPct val="90000"/>
+              </a:lnSpc>
+              <a:spcBef>
+                <a:spcPct val="30000"/>
+              </a:spcBef>
+              <a:spcAft>
+                <a:spcPct val="0"/>
+              </a:spcAft>
+              <a:buSzPct val="100000"/>
+              <a:buChar char="–"/>
+              <a:defRPr sz="2200">
+                <a:solidFill>
+                  <a:schemeClr val="tx1"/>
+                </a:solidFill>
+                <a:latin typeface="Gill Sans" charset="0"/>
+                <a:ea typeface="Gill Sans" charset="0"/>
+                <a:cs typeface="Gill Sans" charset="0"/>
+              </a:defRPr>
+            </a:lvl2pPr>
+            <a:lvl3pPr marL="1143000" indent="-228600" algn="l" rtl="0" eaLnBrk="0" fontAlgn="base" hangingPunct="0">
+              <a:lnSpc>
+                <a:spcPct val="90000"/>
+              </a:lnSpc>
+              <a:spcBef>
+                <a:spcPct val="30000"/>
+              </a:spcBef>
+              <a:spcAft>
+                <a:spcPct val="0"/>
+              </a:spcAft>
+              <a:buSzPct val="100000"/>
+              <a:buChar char="»"/>
+              <a:defRPr sz="2000">
+                <a:solidFill>
+                  <a:schemeClr val="tx1"/>
+                </a:solidFill>
+                <a:latin typeface="Gill Sans" charset="0"/>
+                <a:ea typeface="Gill Sans" charset="0"/>
+                <a:cs typeface="Gill Sans" charset="0"/>
+              </a:defRPr>
+            </a:lvl3pPr>
+            <a:lvl4pPr marL="1543050" indent="-171450" algn="l" rtl="0" eaLnBrk="0" fontAlgn="base" hangingPunct="0">
+              <a:lnSpc>
+                <a:spcPct val="90000"/>
+              </a:lnSpc>
+              <a:spcBef>
+                <a:spcPct val="30000"/>
+              </a:spcBef>
+              <a:spcAft>
+                <a:spcPct val="0"/>
+              </a:spcAft>
+              <a:buSzPct val="100000"/>
+              <a:buChar char="•"/>
+              <a:defRPr sz="2000">
+                <a:solidFill>
+                  <a:schemeClr val="tx1"/>
+                </a:solidFill>
+                <a:latin typeface="Gill Sans" charset="0"/>
+                <a:ea typeface="Gill Sans" charset="0"/>
+                <a:cs typeface="Gill Sans" charset="0"/>
+              </a:defRPr>
+            </a:lvl4pPr>
+            <a:lvl5pPr marL="2000250" indent="-171450" algn="l" rtl="0" eaLnBrk="0" fontAlgn="base" hangingPunct="0">
+              <a:lnSpc>
+                <a:spcPct val="90000"/>
+              </a:lnSpc>
+              <a:spcBef>
+                <a:spcPct val="30000"/>
+              </a:spcBef>
+              <a:spcAft>
+                <a:spcPct val="0"/>
+              </a:spcAft>
+              <a:buSzPct val="100000"/>
+              <a:buChar char="–"/>
+              <a:defRPr sz="2000">
+                <a:solidFill>
+                  <a:schemeClr val="tx1"/>
+                </a:solidFill>
+                <a:latin typeface="Gill Sans" charset="0"/>
+                <a:ea typeface="Gill Sans" charset="0"/>
+                <a:cs typeface="Gill Sans" charset="0"/>
+              </a:defRPr>
+            </a:lvl5pPr>
+            <a:lvl6pPr marL="2457450" indent="-171450" algn="l" rtl="0" eaLnBrk="0" fontAlgn="base" hangingPunct="0">
+              <a:lnSpc>
+                <a:spcPct val="90000"/>
+              </a:lnSpc>
+              <a:spcBef>
+                <a:spcPct val="30000"/>
+              </a:spcBef>
+              <a:spcAft>
+                <a:spcPct val="0"/>
+              </a:spcAft>
+              <a:buSzPct val="100000"/>
+              <a:buChar char="–"/>
+              <a:defRPr sz="2000" b="1">
+                <a:solidFill>
+                  <a:schemeClr val="tx1"/>
+                </a:solidFill>
+                <a:latin typeface="+mn-lt"/>
+              </a:defRPr>
+            </a:lvl6pPr>
+            <a:lvl7pPr marL="2914650" indent="-171450" algn="l" rtl="0" eaLnBrk="0" fontAlgn="base" hangingPunct="0">
+              <a:lnSpc>
+                <a:spcPct val="90000"/>
+              </a:lnSpc>
+              <a:spcBef>
+                <a:spcPct val="30000"/>
+              </a:spcBef>
+              <a:spcAft>
+                <a:spcPct val="0"/>
+              </a:spcAft>
+              <a:buSzPct val="100000"/>
+              <a:buChar char="–"/>
+              <a:defRPr sz="2000" b="1">
+                <a:solidFill>
+                  <a:schemeClr val="tx1"/>
+                </a:solidFill>
+                <a:latin typeface="+mn-lt"/>
+              </a:defRPr>
+            </a:lvl7pPr>
+            <a:lvl8pPr marL="3371850" indent="-171450" algn="l" rtl="0" eaLnBrk="0" fontAlgn="base" hangingPunct="0">
+              <a:lnSpc>
+                <a:spcPct val="90000"/>
+              </a:lnSpc>
+              <a:spcBef>
+                <a:spcPct val="30000"/>
+              </a:spcBef>
+              <a:spcAft>
+                <a:spcPct val="0"/>
+              </a:spcAft>
+              <a:buSzPct val="100000"/>
+              <a:buChar char="–"/>
+              <a:defRPr sz="2000" b="1">
+                <a:solidFill>
+                  <a:schemeClr val="tx1"/>
+                </a:solidFill>
+                <a:latin typeface="+mn-lt"/>
+              </a:defRPr>
+            </a:lvl8pPr>
+            <a:lvl9pPr marL="3829050" indent="-171450" algn="l" rtl="0" eaLnBrk="0" fontAlgn="base" hangingPunct="0">
+              <a:lnSpc>
+                <a:spcPct val="90000"/>
+              </a:lnSpc>
+              <a:spcBef>
+                <a:spcPct val="30000"/>
+              </a:spcBef>
+              <a:spcAft>
+                <a:spcPct val="0"/>
+              </a:spcAft>
+              <a:buSzPct val="100000"/>
+              <a:buChar char="–"/>
+              <a:defRPr sz="2000" b="1">
+                <a:solidFill>
+                  <a:schemeClr val="tx1"/>
+                </a:solidFill>
+                <a:latin typeface="+mn-lt"/>
+              </a:defRPr>
+            </a:lvl9pPr>
+          </a:lstStyle>
+          <a:p>
+            <a:pPr marL="0" indent="0">
+              <a:buFontTx/>
+              <a:buNone/>
+            </a:pPr>
+            <a:r>
+              <a:rPr lang="en-GB" altLang="zh-CN" sz="1700" b="0" kern="0" dirty="0">
+                <a:latin typeface="Courier New" panose="02070309020205020404" pitchFamily="49" charset="0"/>
+                <a:cs typeface="Courier New" panose="02070309020205020404" pitchFamily="49" charset="0"/>
+              </a:rPr>
+              <a:t>//Thread T0</a:t>
+            </a:r>
+          </a:p>
+          <a:p>
+            <a:pPr marL="0" indent="0">
+              <a:buFontTx/>
+              <a:buNone/>
+            </a:pPr>
+            <a:r>
+              <a:rPr lang="en-GB" altLang="zh-CN" sz="1700" b="0" kern="0" dirty="0">
+                <a:latin typeface="Courier New" panose="02070309020205020404" pitchFamily="49" charset="0"/>
+                <a:cs typeface="Courier New" panose="02070309020205020404" pitchFamily="49" charset="0"/>
+              </a:rPr>
+              <a:t>for (int i=0; i&lt;5; i++) {  </a:t>
+            </a:r>
+          </a:p>
+          <a:p>
+            <a:pPr marL="0" indent="0">
+              <a:buFontTx/>
+              <a:buNone/>
+            </a:pPr>
+            <a:r>
+              <a:rPr lang="en-GB" altLang="zh-CN" sz="1700" b="0" kern="0" dirty="0">
+                <a:latin typeface="Courier New" panose="02070309020205020404" pitchFamily="49" charset="0"/>
+                <a:cs typeface="Courier New" panose="02070309020205020404" pitchFamily="49" charset="0"/>
+              </a:rPr>
+              <a:t>   x = x + 1;</a:t>
+            </a:r>
+          </a:p>
+          <a:p>
+            <a:pPr marL="0" indent="0">
+              <a:buFontTx/>
+              <a:buNone/>
+            </a:pPr>
+            <a:r>
+              <a:rPr lang="en-GB" altLang="zh-CN" sz="1700" b="0" kern="0" dirty="0">
+                <a:latin typeface="Courier New" panose="02070309020205020404" pitchFamily="49" charset="0"/>
+                <a:cs typeface="Courier New" panose="02070309020205020404" pitchFamily="49" charset="0"/>
+              </a:rPr>
+              <a:t>}</a:t>
+            </a:r>
+          </a:p>
+        </p:txBody>
+      </p:sp>
+      <p:sp>
+        <p:nvSpPr>
+          <p:cNvPr id="5" name="Plassholder for innhold 2">
+            <a:extLst>
+              <a:ext uri="{FF2B5EF4-FFF2-40B4-BE49-F238E27FC236}">
+                <a16:creationId xmlns:a16="http://schemas.microsoft.com/office/drawing/2014/main" id="{9D5B75F7-DF91-87EF-42D7-37808B097603}"/>
+              </a:ext>
+            </a:extLst>
+          </p:cNvPr>
+          <p:cNvSpPr txBox="1">
+            <a:spLocks/>
+          </p:cNvSpPr>
+          <p:nvPr/>
+        </p:nvSpPr>
+        <p:spPr bwMode="auto">
+          <a:xfrm>
+            <a:off x="6324600" y="1419859"/>
+            <a:ext cx="3699076" cy="1276127"/>
+          </a:xfrm>
+          <a:prstGeom prst="rect">
+            <a:avLst/>
+          </a:prstGeom>
+          <a:noFill/>
+          <a:ln>
+            <a:solidFill>
+              <a:schemeClr val="accent1">
+                <a:lumMod val="50000"/>
+              </a:schemeClr>
+            </a:solidFill>
+          </a:ln>
+          <a:effectLst/>
+          <a:extLst>
+            <a:ext uri="{FAA26D3D-D897-4be2-8F04-BA451C77F1D7}">
+              <ma14:placeholderFlag xmlns:ma14="http://schemas.microsoft.com/office/mac/drawingml/2011/main" xmlns="" val="1"/>
+            </a:ext>
+            <a:ext uri="{909E8E84-426E-40dd-AFC4-6F175D3DCCD1}">
+              <a14:hiddenFill xmlns:a14="http://schemas.microsoft.com/office/drawing/2010/main" xmlns="">
+                <a:solidFill>
+                  <a:schemeClr val="bg1"/>
+                </a:solidFill>
+              </a14:hiddenFill>
+            </a:ext>
+            <a:ext uri="{91240B29-F687-4f45-9708-019B960494DF}">
+              <a14:hiddenLine xmlns:a14="http://schemas.microsoft.com/office/drawing/2010/main" xmlns="" w="12700">
+                <a:pattFill prst="narHorz">
+                  <a:fgClr>
+                    <a:schemeClr val="tx1"/>
+                  </a:fgClr>
+                  <a:bgClr>
+                    <a:schemeClr val="bg1"/>
+                  </a:bgClr>
+                </a:pattFill>
+                <a:miter lim="800000"/>
+                <a:headEnd/>
+                <a:tailEnd/>
+              </a14:hiddenLine>
+            </a:ext>
+            <a:ext uri="{AF507438-7753-43e0-B8FC-AC1667EBCBE1}">
+              <a14:hiddenEffects xmlns:a14="http://schemas.microsoft.com/office/drawing/2010/main" xmlns="">
+                <a:effectLst>
+                  <a:outerShdw blurRad="63500" dist="38099" dir="2700000" algn="ctr" rotWithShape="0">
+                    <a:schemeClr val="bg2">
+                      <a:alpha val="74998"/>
+                    </a:schemeClr>
+                  </a:outerShdw>
+                </a:effectLst>
+              </a14:hiddenEffects>
+            </a:ext>
+          </a:extLst>
+        </p:spPr>
+        <p:txBody>
+          <a:bodyPr vert="horz" wrap="square" lIns="90478" tIns="44445" rIns="90478" bIns="44445" numCol="1" anchor="t" anchorCtr="0" compatLnSpc="1">
+            <a:prstTxWarp prst="textNoShape">
+              <a:avLst/>
+            </a:prstTxWarp>
+            <a:noAutofit/>
+          </a:bodyPr>
+          <a:lstStyle>
+            <a:lvl1pPr marL="285750" indent="-285750" algn="l" rtl="0" eaLnBrk="0" fontAlgn="base" hangingPunct="0">
+              <a:lnSpc>
+                <a:spcPct val="90000"/>
+              </a:lnSpc>
+              <a:spcBef>
+                <a:spcPct val="30000"/>
+              </a:spcBef>
+              <a:spcAft>
+                <a:spcPct val="0"/>
+              </a:spcAft>
+              <a:buSzPct val="100000"/>
+              <a:buChar char="•"/>
+              <a:defRPr sz="2400">
+                <a:solidFill>
+                  <a:schemeClr val="tx1"/>
+                </a:solidFill>
+                <a:latin typeface="Gill Sans" charset="0"/>
+                <a:ea typeface="ＭＳ Ｐゴシック" charset="0"/>
+                <a:cs typeface="Gill Sans" charset="0"/>
+              </a:defRPr>
+            </a:lvl1pPr>
+            <a:lvl2pPr marL="685800" indent="-228600" algn="l" rtl="0" eaLnBrk="0" fontAlgn="base" hangingPunct="0">
+              <a:lnSpc>
+                <a:spcPct val="90000"/>
+              </a:lnSpc>
+              <a:spcBef>
+                <a:spcPct val="30000"/>
+              </a:spcBef>
+              <a:spcAft>
+                <a:spcPct val="0"/>
+              </a:spcAft>
+              <a:buSzPct val="100000"/>
+              <a:buChar char="–"/>
+              <a:defRPr sz="2200">
+                <a:solidFill>
+                  <a:schemeClr val="tx1"/>
+                </a:solidFill>
+                <a:latin typeface="Gill Sans" charset="0"/>
+                <a:ea typeface="Gill Sans" charset="0"/>
+                <a:cs typeface="Gill Sans" charset="0"/>
+              </a:defRPr>
+            </a:lvl2pPr>
+            <a:lvl3pPr marL="1143000" indent="-228600" algn="l" rtl="0" eaLnBrk="0" fontAlgn="base" hangingPunct="0">
+              <a:lnSpc>
+                <a:spcPct val="90000"/>
+              </a:lnSpc>
+              <a:spcBef>
+                <a:spcPct val="30000"/>
+              </a:spcBef>
+              <a:spcAft>
+                <a:spcPct val="0"/>
+              </a:spcAft>
+              <a:buSzPct val="100000"/>
+              <a:buChar char="»"/>
+              <a:defRPr sz="2000">
+                <a:solidFill>
+                  <a:schemeClr val="tx1"/>
+                </a:solidFill>
+                <a:latin typeface="Gill Sans" charset="0"/>
+                <a:ea typeface="Gill Sans" charset="0"/>
+                <a:cs typeface="Gill Sans" charset="0"/>
+              </a:defRPr>
+            </a:lvl3pPr>
+            <a:lvl4pPr marL="1543050" indent="-171450" algn="l" rtl="0" eaLnBrk="0" fontAlgn="base" hangingPunct="0">
+              <a:lnSpc>
+                <a:spcPct val="90000"/>
+              </a:lnSpc>
+              <a:spcBef>
+                <a:spcPct val="30000"/>
+              </a:spcBef>
+              <a:spcAft>
+                <a:spcPct val="0"/>
+              </a:spcAft>
+              <a:buSzPct val="100000"/>
+              <a:buChar char="•"/>
+              <a:defRPr sz="2000">
+                <a:solidFill>
+                  <a:schemeClr val="tx1"/>
+                </a:solidFill>
+                <a:latin typeface="Gill Sans" charset="0"/>
+                <a:ea typeface="Gill Sans" charset="0"/>
+                <a:cs typeface="Gill Sans" charset="0"/>
+              </a:defRPr>
+            </a:lvl4pPr>
+            <a:lvl5pPr marL="2000250" indent="-171450" algn="l" rtl="0" eaLnBrk="0" fontAlgn="base" hangingPunct="0">
+              <a:lnSpc>
+                <a:spcPct val="90000"/>
+              </a:lnSpc>
+              <a:spcBef>
+                <a:spcPct val="30000"/>
+              </a:spcBef>
+              <a:spcAft>
+                <a:spcPct val="0"/>
+              </a:spcAft>
+              <a:buSzPct val="100000"/>
+              <a:buChar char="–"/>
+              <a:defRPr sz="2000">
+                <a:solidFill>
+                  <a:schemeClr val="tx1"/>
+                </a:solidFill>
+                <a:latin typeface="Gill Sans" charset="0"/>
+                <a:ea typeface="Gill Sans" charset="0"/>
+                <a:cs typeface="Gill Sans" charset="0"/>
+              </a:defRPr>
+            </a:lvl5pPr>
+            <a:lvl6pPr marL="2457450" indent="-171450" algn="l" rtl="0" eaLnBrk="0" fontAlgn="base" hangingPunct="0">
+              <a:lnSpc>
+                <a:spcPct val="90000"/>
+              </a:lnSpc>
+              <a:spcBef>
+                <a:spcPct val="30000"/>
+              </a:spcBef>
+              <a:spcAft>
+                <a:spcPct val="0"/>
+              </a:spcAft>
+              <a:buSzPct val="100000"/>
+              <a:buChar char="–"/>
+              <a:defRPr sz="2000" b="1">
+                <a:solidFill>
+                  <a:schemeClr val="tx1"/>
+                </a:solidFill>
+                <a:latin typeface="+mn-lt"/>
+              </a:defRPr>
+            </a:lvl6pPr>
+            <a:lvl7pPr marL="2914650" indent="-171450" algn="l" rtl="0" eaLnBrk="0" fontAlgn="base" hangingPunct="0">
+              <a:lnSpc>
+                <a:spcPct val="90000"/>
+              </a:lnSpc>
+              <a:spcBef>
+                <a:spcPct val="30000"/>
+              </a:spcBef>
+              <a:spcAft>
+                <a:spcPct val="0"/>
+              </a:spcAft>
+              <a:buSzPct val="100000"/>
+              <a:buChar char="–"/>
+              <a:defRPr sz="2000" b="1">
+                <a:solidFill>
+                  <a:schemeClr val="tx1"/>
+                </a:solidFill>
+                <a:latin typeface="+mn-lt"/>
+              </a:defRPr>
+            </a:lvl7pPr>
+            <a:lvl8pPr marL="3371850" indent="-171450" algn="l" rtl="0" eaLnBrk="0" fontAlgn="base" hangingPunct="0">
+              <a:lnSpc>
+                <a:spcPct val="90000"/>
+              </a:lnSpc>
+              <a:spcBef>
+                <a:spcPct val="30000"/>
+              </a:spcBef>
+              <a:spcAft>
+                <a:spcPct val="0"/>
+              </a:spcAft>
+              <a:buSzPct val="100000"/>
+              <a:buChar char="–"/>
+              <a:defRPr sz="2000" b="1">
+                <a:solidFill>
+                  <a:schemeClr val="tx1"/>
+                </a:solidFill>
+                <a:latin typeface="+mn-lt"/>
+              </a:defRPr>
+            </a:lvl8pPr>
+            <a:lvl9pPr marL="3829050" indent="-171450" algn="l" rtl="0" eaLnBrk="0" fontAlgn="base" hangingPunct="0">
+              <a:lnSpc>
+                <a:spcPct val="90000"/>
+              </a:lnSpc>
+              <a:spcBef>
+                <a:spcPct val="30000"/>
+              </a:spcBef>
+              <a:spcAft>
+                <a:spcPct val="0"/>
+              </a:spcAft>
+              <a:buSzPct val="100000"/>
+              <a:buChar char="–"/>
+              <a:defRPr sz="2000" b="1">
+                <a:solidFill>
+                  <a:schemeClr val="tx1"/>
+                </a:solidFill>
+                <a:latin typeface="+mn-lt"/>
+              </a:defRPr>
+            </a:lvl9pPr>
+          </a:lstStyle>
+          <a:p>
+            <a:pPr marL="0" indent="0">
+              <a:buFontTx/>
+              <a:buNone/>
+            </a:pPr>
+            <a:r>
+              <a:rPr lang="en-GB" altLang="zh-CN" sz="1700" b="0" kern="0" dirty="0">
+                <a:latin typeface="Courier New" panose="02070309020205020404" pitchFamily="49" charset="0"/>
+                <a:cs typeface="Courier New" panose="02070309020205020404" pitchFamily="49" charset="0"/>
+              </a:rPr>
+              <a:t>//Thread T1</a:t>
+            </a:r>
+          </a:p>
+          <a:p>
+            <a:pPr marL="0" indent="0">
+              <a:buFontTx/>
+              <a:buNone/>
+            </a:pPr>
+            <a:r>
+              <a:rPr lang="en-GB" altLang="zh-CN" sz="1700" b="0" kern="0" dirty="0">
+                <a:latin typeface="Courier New" panose="02070309020205020404" pitchFamily="49" charset="0"/>
+                <a:cs typeface="Courier New" panose="02070309020205020404" pitchFamily="49" charset="0"/>
+              </a:rPr>
+              <a:t>for (int j=0; j&lt;5; </a:t>
+            </a:r>
+            <a:r>
+              <a:rPr lang="en-GB" altLang="zh-CN" sz="1700" b="0" kern="0" dirty="0" err="1">
+                <a:latin typeface="Courier New" panose="02070309020205020404" pitchFamily="49" charset="0"/>
+                <a:cs typeface="Courier New" panose="02070309020205020404" pitchFamily="49" charset="0"/>
+              </a:rPr>
+              <a:t>j++</a:t>
+            </a:r>
+            <a:r>
+              <a:rPr lang="en-GB" altLang="zh-CN" sz="1700" b="0" kern="0" dirty="0">
+                <a:latin typeface="Courier New" panose="02070309020205020404" pitchFamily="49" charset="0"/>
+                <a:cs typeface="Courier New" panose="02070309020205020404" pitchFamily="49" charset="0"/>
+              </a:rPr>
+              <a:t>) {  </a:t>
+            </a:r>
+          </a:p>
+          <a:p>
+            <a:pPr marL="0" indent="0">
+              <a:buFontTx/>
+              <a:buNone/>
+            </a:pPr>
+            <a:r>
+              <a:rPr lang="en-GB" altLang="zh-CN" sz="1700" b="0" kern="0" dirty="0">
+                <a:latin typeface="Courier New" panose="02070309020205020404" pitchFamily="49" charset="0"/>
+                <a:cs typeface="Courier New" panose="02070309020205020404" pitchFamily="49" charset="0"/>
+              </a:rPr>
+              <a:t>   x = x + 2;</a:t>
+            </a:r>
+          </a:p>
+          <a:p>
+            <a:pPr marL="0" indent="0">
+              <a:buFontTx/>
+              <a:buNone/>
+            </a:pPr>
+            <a:r>
+              <a:rPr lang="en-GB" altLang="zh-CN" sz="1700" b="0" kern="0" dirty="0">
+                <a:latin typeface="Courier New" panose="02070309020205020404" pitchFamily="49" charset="0"/>
+                <a:cs typeface="Courier New" panose="02070309020205020404" pitchFamily="49" charset="0"/>
+              </a:rPr>
+              <a:t>}</a:t>
+            </a:r>
+          </a:p>
+        </p:txBody>
+      </p:sp>
+      <p:sp>
+        <p:nvSpPr>
+          <p:cNvPr id="6" name="Plassholder for innhold 2">
+            <a:extLst>
+              <a:ext uri="{FF2B5EF4-FFF2-40B4-BE49-F238E27FC236}">
+                <a16:creationId xmlns:a16="http://schemas.microsoft.com/office/drawing/2014/main" id="{2D37079E-C01B-98FE-3AB3-789AD906045B}"/>
+              </a:ext>
+            </a:extLst>
+          </p:cNvPr>
+          <p:cNvSpPr txBox="1">
+            <a:spLocks/>
+          </p:cNvSpPr>
+          <p:nvPr/>
+        </p:nvSpPr>
+        <p:spPr bwMode="auto">
+          <a:xfrm>
+            <a:off x="5213551" y="836112"/>
+            <a:ext cx="2000250" cy="446762"/>
+          </a:xfrm>
+          <a:prstGeom prst="rect">
+            <a:avLst/>
+          </a:prstGeom>
+          <a:noFill/>
+          <a:ln>
+            <a:solidFill>
+              <a:schemeClr val="tx1"/>
+            </a:solidFill>
+          </a:ln>
+          <a:effectLst/>
+          <a:extLst>
+            <a:ext uri="{FAA26D3D-D897-4be2-8F04-BA451C77F1D7}">
+              <ma14:placeholderFlag xmlns:ma14="http://schemas.microsoft.com/office/mac/drawingml/2011/main" xmlns="" val="1"/>
+            </a:ext>
+            <a:ext uri="{909E8E84-426E-40dd-AFC4-6F175D3DCCD1}">
+              <a14:hiddenFill xmlns:a14="http://schemas.microsoft.com/office/drawing/2010/main" xmlns="">
+                <a:solidFill>
+                  <a:schemeClr val="bg1"/>
+                </a:solidFill>
+              </a14:hiddenFill>
+            </a:ext>
+            <a:ext uri="{91240B29-F687-4f45-9708-019B960494DF}">
+              <a14:hiddenLine xmlns:a14="http://schemas.microsoft.com/office/drawing/2010/main" xmlns="" w="12700">
+                <a:pattFill prst="narHorz">
+                  <a:fgClr>
+                    <a:schemeClr val="tx1"/>
+                  </a:fgClr>
+                  <a:bgClr>
+                    <a:schemeClr val="bg1"/>
+                  </a:bgClr>
+                </a:pattFill>
+                <a:miter lim="800000"/>
+                <a:headEnd/>
+                <a:tailEnd/>
+              </a14:hiddenLine>
+            </a:ext>
+            <a:ext uri="{AF507438-7753-43e0-B8FC-AC1667EBCBE1}">
+              <a14:hiddenEffects xmlns:a14="http://schemas.microsoft.com/office/drawing/2010/main" xmlns="">
+                <a:effectLst>
+                  <a:outerShdw blurRad="63500" dist="38099" dir="2700000" algn="ctr" rotWithShape="0">
+                    <a:schemeClr val="bg2">
+                      <a:alpha val="74998"/>
+                    </a:schemeClr>
+                  </a:outerShdw>
+                </a:effectLst>
+              </a14:hiddenEffects>
+            </a:ext>
+          </a:extLst>
+        </p:spPr>
+        <p:txBody>
+          <a:bodyPr vert="horz" wrap="square" lIns="90478" tIns="44445" rIns="90478" bIns="44445" numCol="1" anchor="t" anchorCtr="0" compatLnSpc="1">
+            <a:prstTxWarp prst="textNoShape">
+              <a:avLst/>
+            </a:prstTxWarp>
+            <a:normAutofit/>
+          </a:bodyPr>
+          <a:lstStyle>
+            <a:lvl1pPr marL="285750" indent="-285750" algn="l" rtl="0" eaLnBrk="0" fontAlgn="base" hangingPunct="0">
+              <a:lnSpc>
+                <a:spcPct val="90000"/>
+              </a:lnSpc>
+              <a:spcBef>
+                <a:spcPct val="30000"/>
+              </a:spcBef>
+              <a:spcAft>
+                <a:spcPct val="0"/>
+              </a:spcAft>
+              <a:buSzPct val="100000"/>
+              <a:buChar char="•"/>
+              <a:defRPr sz="2400">
+                <a:solidFill>
+                  <a:schemeClr val="tx1"/>
+                </a:solidFill>
+                <a:latin typeface="Gill Sans" charset="0"/>
+                <a:ea typeface="ＭＳ Ｐゴシック" charset="0"/>
+                <a:cs typeface="Gill Sans" charset="0"/>
+              </a:defRPr>
+            </a:lvl1pPr>
+            <a:lvl2pPr marL="685800" indent="-228600" algn="l" rtl="0" eaLnBrk="0" fontAlgn="base" hangingPunct="0">
+              <a:lnSpc>
+                <a:spcPct val="90000"/>
+              </a:lnSpc>
+              <a:spcBef>
+                <a:spcPct val="30000"/>
+              </a:spcBef>
+              <a:spcAft>
+                <a:spcPct val="0"/>
+              </a:spcAft>
+              <a:buSzPct val="100000"/>
+              <a:buChar char="–"/>
+              <a:defRPr sz="2200">
+                <a:solidFill>
+                  <a:schemeClr val="tx1"/>
+                </a:solidFill>
+                <a:latin typeface="Gill Sans" charset="0"/>
+                <a:ea typeface="Gill Sans" charset="0"/>
+                <a:cs typeface="Gill Sans" charset="0"/>
+              </a:defRPr>
+            </a:lvl2pPr>
+            <a:lvl3pPr marL="1143000" indent="-228600" algn="l" rtl="0" eaLnBrk="0" fontAlgn="base" hangingPunct="0">
+              <a:lnSpc>
+                <a:spcPct val="90000"/>
+              </a:lnSpc>
+              <a:spcBef>
+                <a:spcPct val="30000"/>
+              </a:spcBef>
+              <a:spcAft>
+                <a:spcPct val="0"/>
+              </a:spcAft>
+              <a:buSzPct val="100000"/>
+              <a:buChar char="»"/>
+              <a:defRPr sz="2000">
+                <a:solidFill>
+                  <a:schemeClr val="tx1"/>
+                </a:solidFill>
+                <a:latin typeface="Gill Sans" charset="0"/>
+                <a:ea typeface="Gill Sans" charset="0"/>
+                <a:cs typeface="Gill Sans" charset="0"/>
+              </a:defRPr>
+            </a:lvl3pPr>
+            <a:lvl4pPr marL="1543050" indent="-171450" algn="l" rtl="0" eaLnBrk="0" fontAlgn="base" hangingPunct="0">
+              <a:lnSpc>
+                <a:spcPct val="90000"/>
+              </a:lnSpc>
+              <a:spcBef>
+                <a:spcPct val="30000"/>
+              </a:spcBef>
+              <a:spcAft>
+                <a:spcPct val="0"/>
+              </a:spcAft>
+              <a:buSzPct val="100000"/>
+              <a:buChar char="•"/>
+              <a:defRPr sz="2000">
+                <a:solidFill>
+                  <a:schemeClr val="tx1"/>
+                </a:solidFill>
+                <a:latin typeface="Gill Sans" charset="0"/>
+                <a:ea typeface="Gill Sans" charset="0"/>
+                <a:cs typeface="Gill Sans" charset="0"/>
+              </a:defRPr>
+            </a:lvl4pPr>
+            <a:lvl5pPr marL="2000250" indent="-171450" algn="l" rtl="0" eaLnBrk="0" fontAlgn="base" hangingPunct="0">
+              <a:lnSpc>
+                <a:spcPct val="90000"/>
+              </a:lnSpc>
+              <a:spcBef>
+                <a:spcPct val="30000"/>
+              </a:spcBef>
+              <a:spcAft>
+                <a:spcPct val="0"/>
+              </a:spcAft>
+              <a:buSzPct val="100000"/>
+              <a:buChar char="–"/>
+              <a:defRPr sz="2000">
+                <a:solidFill>
+                  <a:schemeClr val="tx1"/>
+                </a:solidFill>
+                <a:latin typeface="Gill Sans" charset="0"/>
+                <a:ea typeface="Gill Sans" charset="0"/>
+                <a:cs typeface="Gill Sans" charset="0"/>
+              </a:defRPr>
+            </a:lvl5pPr>
+            <a:lvl6pPr marL="2457450" indent="-171450" algn="l" rtl="0" eaLnBrk="0" fontAlgn="base" hangingPunct="0">
+              <a:lnSpc>
+                <a:spcPct val="90000"/>
+              </a:lnSpc>
+              <a:spcBef>
+                <a:spcPct val="30000"/>
+              </a:spcBef>
+              <a:spcAft>
+                <a:spcPct val="0"/>
+              </a:spcAft>
+              <a:buSzPct val="100000"/>
+              <a:buChar char="–"/>
+              <a:defRPr sz="2000" b="1">
+                <a:solidFill>
+                  <a:schemeClr val="tx1"/>
+                </a:solidFill>
+                <a:latin typeface="+mn-lt"/>
+              </a:defRPr>
+            </a:lvl6pPr>
+            <a:lvl7pPr marL="2914650" indent="-171450" algn="l" rtl="0" eaLnBrk="0" fontAlgn="base" hangingPunct="0">
+              <a:lnSpc>
+                <a:spcPct val="90000"/>
+              </a:lnSpc>
+              <a:spcBef>
+                <a:spcPct val="30000"/>
+              </a:spcBef>
+              <a:spcAft>
+                <a:spcPct val="0"/>
+              </a:spcAft>
+              <a:buSzPct val="100000"/>
+              <a:buChar char="–"/>
+              <a:defRPr sz="2000" b="1">
+                <a:solidFill>
+                  <a:schemeClr val="tx1"/>
+                </a:solidFill>
+                <a:latin typeface="+mn-lt"/>
+              </a:defRPr>
+            </a:lvl7pPr>
+            <a:lvl8pPr marL="3371850" indent="-171450" algn="l" rtl="0" eaLnBrk="0" fontAlgn="base" hangingPunct="0">
+              <a:lnSpc>
+                <a:spcPct val="90000"/>
+              </a:lnSpc>
+              <a:spcBef>
+                <a:spcPct val="30000"/>
+              </a:spcBef>
+              <a:spcAft>
+                <a:spcPct val="0"/>
+              </a:spcAft>
+              <a:buSzPct val="100000"/>
+              <a:buChar char="–"/>
+              <a:defRPr sz="2000" b="1">
+                <a:solidFill>
+                  <a:schemeClr val="tx1"/>
+                </a:solidFill>
+                <a:latin typeface="+mn-lt"/>
+              </a:defRPr>
+            </a:lvl8pPr>
+            <a:lvl9pPr marL="3829050" indent="-171450" algn="l" rtl="0" eaLnBrk="0" fontAlgn="base" hangingPunct="0">
+              <a:lnSpc>
+                <a:spcPct val="90000"/>
+              </a:lnSpc>
+              <a:spcBef>
+                <a:spcPct val="30000"/>
+              </a:spcBef>
+              <a:spcAft>
+                <a:spcPct val="0"/>
+              </a:spcAft>
+              <a:buSzPct val="100000"/>
+              <a:buChar char="–"/>
+              <a:defRPr sz="2000" b="1">
+                <a:solidFill>
+                  <a:schemeClr val="tx1"/>
+                </a:solidFill>
+                <a:latin typeface="+mn-lt"/>
+              </a:defRPr>
+            </a:lvl9pPr>
+          </a:lstStyle>
+          <a:p>
+            <a:pPr marL="0" indent="0">
+              <a:buFontTx/>
+              <a:buNone/>
+            </a:pPr>
+            <a:r>
+              <a:rPr lang="en-GB" altLang="zh-CN" sz="1700" b="0" kern="0" dirty="0">
+                <a:latin typeface="Courier New" panose="02070309020205020404" pitchFamily="49" charset="0"/>
+                <a:cs typeface="Courier New" panose="02070309020205020404" pitchFamily="49" charset="0"/>
+              </a:rPr>
+              <a:t>int x = 0;</a:t>
+            </a:r>
+            <a:endParaRPr lang="en-US" altLang="zh-CN" sz="1700" b="0" kern="0" dirty="0">
+              <a:latin typeface="Courier New" panose="02070309020205020404" pitchFamily="49" charset="0"/>
+              <a:cs typeface="Courier New" panose="02070309020205020404" pitchFamily="49" charset="0"/>
+            </a:endParaRPr>
+          </a:p>
+        </p:txBody>
+      </p:sp>
+    </p:spTree>
+    <p:extLst>
+      <p:ext uri="{BB962C8B-B14F-4D97-AF65-F5344CB8AC3E}">
+        <p14:creationId xmlns:p14="http://schemas.microsoft.com/office/powerpoint/2010/main" val="2751476572"/>
+      </p:ext>
+    </p:extLst>
+  </p:cSld>
+  <p:clrMapOvr>
+    <a:masterClrMapping/>
+  </p:clrMapOvr>
+  <p:transition/>
+</p:sld>
+</file>
+
+<file path=ppt/slides/slide20.xml><?xml version="1.0" encoding="utf-8"?>
 <p:sld xmlns:a="http://schemas.openxmlformats.org/drawingml/2006/main" xmlns:r="http://schemas.openxmlformats.org/officeDocument/2006/relationships" xmlns:p="http://schemas.openxmlformats.org/presentationml/2006/main">
   <p:cSld>
     <p:spTree>
@@ -28490,7 +29862,7 @@
                 <a:cs typeface="Arial"/>
               </a:rPr>
               <a:pPr algn="ctr"/>
-              <a:t>19</a:t>
+              <a:t>20</a:t>
             </a:fld>
             <a:endParaRPr lang="nb-NO" sz="1400" b="0" i="0" dirty="0">
               <a:solidFill>
@@ -28588,1027 +29960,7 @@
 </p:sld>
 </file>
 
-<file path=ppt/slides/slide2.xml><?xml version="1.0" encoding="utf-8"?>
-<p:sld xmlns:a="http://schemas.openxmlformats.org/drawingml/2006/main" xmlns:r="http://schemas.openxmlformats.org/officeDocument/2006/relationships" xmlns:p="http://schemas.openxmlformats.org/presentationml/2006/main">
-  <p:cSld>
-    <p:spTree>
-      <p:nvGrpSpPr>
-        <p:cNvPr id="1" name=""/>
-        <p:cNvGrpSpPr/>
-        <p:nvPr/>
-      </p:nvGrpSpPr>
-      <p:grpSpPr>
-        <a:xfrm>
-          <a:off x="0" y="0"/>
-          <a:ext cx="0" cy="0"/>
-          <a:chOff x="0" y="0"/>
-          <a:chExt cx="0" cy="0"/>
-        </a:xfrm>
-      </p:grpSpPr>
-      <p:sp>
-        <p:nvSpPr>
-          <p:cNvPr id="2" name="Title 1">
-            <a:extLst>
-              <a:ext uri="{FF2B5EF4-FFF2-40B4-BE49-F238E27FC236}">
-                <a16:creationId xmlns:a16="http://schemas.microsoft.com/office/drawing/2014/main" id="{8F70288D-85B6-6CC3-1FB2-3B04FD5CDA2E}"/>
-              </a:ext>
-            </a:extLst>
-          </p:cNvPr>
-          <p:cNvSpPr>
-            <a:spLocks noGrp="1"/>
-          </p:cNvSpPr>
-          <p:nvPr>
-            <p:ph type="title"/>
-          </p:nvPr>
-        </p:nvSpPr>
-        <p:spPr/>
-        <p:txBody>
-          <a:bodyPr/>
-          <a:lstStyle/>
-          <a:p>
-            <a:r>
-              <a:rPr lang="en-GB" dirty="0"/>
-              <a:t>Concurrency I</a:t>
-            </a:r>
-            <a:endParaRPr lang="en-SE" dirty="0"/>
-          </a:p>
-        </p:txBody>
-      </p:sp>
-      <p:sp>
-        <p:nvSpPr>
-          <p:cNvPr id="3" name="Content Placeholder 2">
-            <a:extLst>
-              <a:ext uri="{FF2B5EF4-FFF2-40B4-BE49-F238E27FC236}">
-                <a16:creationId xmlns:a16="http://schemas.microsoft.com/office/drawing/2014/main" id="{F457968C-088E-2EEC-6B87-D73D14EA4986}"/>
-              </a:ext>
-            </a:extLst>
-          </p:cNvPr>
-          <p:cNvSpPr>
-            <a:spLocks noGrp="1"/>
-          </p:cNvSpPr>
-          <p:nvPr>
-            <p:ph idx="1"/>
-          </p:nvPr>
-        </p:nvSpPr>
-        <p:spPr>
-          <a:xfrm>
-            <a:off x="812800" y="2695986"/>
-            <a:ext cx="10566400" cy="3323814"/>
-          </a:xfrm>
-        </p:spPr>
-        <p:txBody>
-          <a:bodyPr>
-            <a:normAutofit/>
-          </a:bodyPr>
-          <a:lstStyle/>
-          <a:p>
-            <a:r>
-              <a:rPr lang="en-GB" dirty="0"/>
-              <a:t>Consider two concurrent threads T0, T1, which access a shared variable x that has been initialized to 0. There is no mutex protection. </a:t>
-            </a:r>
-          </a:p>
-          <a:p>
-            <a:r>
-              <a:rPr lang="en-GB" dirty="0"/>
-              <a:t>Q: What are the minimum, maximum, and all possible values of x after the two threads have completed execution?</a:t>
-            </a:r>
-          </a:p>
-        </p:txBody>
-      </p:sp>
-      <p:sp>
-        <p:nvSpPr>
-          <p:cNvPr id="4" name="Plassholder for innhold 2">
-            <a:extLst>
-              <a:ext uri="{FF2B5EF4-FFF2-40B4-BE49-F238E27FC236}">
-                <a16:creationId xmlns:a16="http://schemas.microsoft.com/office/drawing/2014/main" id="{758290D7-B791-5228-8CF4-A4FA620CB43A}"/>
-              </a:ext>
-            </a:extLst>
-          </p:cNvPr>
-          <p:cNvSpPr txBox="1">
-            <a:spLocks/>
-          </p:cNvSpPr>
-          <p:nvPr/>
-        </p:nvSpPr>
-        <p:spPr bwMode="auto">
-          <a:xfrm>
-            <a:off x="2514600" y="1419860"/>
-            <a:ext cx="3699076" cy="1276127"/>
-          </a:xfrm>
-          <a:prstGeom prst="rect">
-            <a:avLst/>
-          </a:prstGeom>
-          <a:noFill/>
-          <a:ln>
-            <a:solidFill>
-              <a:schemeClr val="accent1">
-                <a:lumMod val="50000"/>
-              </a:schemeClr>
-            </a:solidFill>
-          </a:ln>
-          <a:effectLst/>
-          <a:extLst>
-            <a:ext uri="{FAA26D3D-D897-4be2-8F04-BA451C77F1D7}">
-              <ma14:placeholderFlag xmlns:ma14="http://schemas.microsoft.com/office/mac/drawingml/2011/main" xmlns="" val="1"/>
-            </a:ext>
-            <a:ext uri="{909E8E84-426E-40dd-AFC4-6F175D3DCCD1}">
-              <a14:hiddenFill xmlns:a14="http://schemas.microsoft.com/office/drawing/2010/main" xmlns="">
-                <a:solidFill>
-                  <a:schemeClr val="bg1"/>
-                </a:solidFill>
-              </a14:hiddenFill>
-            </a:ext>
-            <a:ext uri="{91240B29-F687-4f45-9708-019B960494DF}">
-              <a14:hiddenLine xmlns:a14="http://schemas.microsoft.com/office/drawing/2010/main" xmlns="" w="12700">
-                <a:pattFill prst="narHorz">
-                  <a:fgClr>
-                    <a:schemeClr val="tx1"/>
-                  </a:fgClr>
-                  <a:bgClr>
-                    <a:schemeClr val="bg1"/>
-                  </a:bgClr>
-                </a:pattFill>
-                <a:miter lim="800000"/>
-                <a:headEnd/>
-                <a:tailEnd/>
-              </a14:hiddenLine>
-            </a:ext>
-            <a:ext uri="{AF507438-7753-43e0-B8FC-AC1667EBCBE1}">
-              <a14:hiddenEffects xmlns:a14="http://schemas.microsoft.com/office/drawing/2010/main" xmlns="">
-                <a:effectLst>
-                  <a:outerShdw blurRad="63500" dist="38099" dir="2700000" algn="ctr" rotWithShape="0">
-                    <a:schemeClr val="bg2">
-                      <a:alpha val="74998"/>
-                    </a:schemeClr>
-                  </a:outerShdw>
-                </a:effectLst>
-              </a14:hiddenEffects>
-            </a:ext>
-          </a:extLst>
-        </p:spPr>
-        <p:txBody>
-          <a:bodyPr vert="horz" wrap="square" lIns="90478" tIns="44445" rIns="90478" bIns="44445" numCol="1" anchor="t" anchorCtr="0" compatLnSpc="1">
-            <a:prstTxWarp prst="textNoShape">
-              <a:avLst/>
-            </a:prstTxWarp>
-            <a:noAutofit/>
-          </a:bodyPr>
-          <a:lstStyle>
-            <a:lvl1pPr marL="285750" indent="-285750" algn="l" rtl="0" eaLnBrk="0" fontAlgn="base" hangingPunct="0">
-              <a:lnSpc>
-                <a:spcPct val="90000"/>
-              </a:lnSpc>
-              <a:spcBef>
-                <a:spcPct val="30000"/>
-              </a:spcBef>
-              <a:spcAft>
-                <a:spcPct val="0"/>
-              </a:spcAft>
-              <a:buSzPct val="100000"/>
-              <a:buChar char="•"/>
-              <a:defRPr sz="2400">
-                <a:solidFill>
-                  <a:schemeClr val="tx1"/>
-                </a:solidFill>
-                <a:latin typeface="Gill Sans" charset="0"/>
-                <a:ea typeface="ＭＳ Ｐゴシック" charset="0"/>
-                <a:cs typeface="Gill Sans" charset="0"/>
-              </a:defRPr>
-            </a:lvl1pPr>
-            <a:lvl2pPr marL="685800" indent="-228600" algn="l" rtl="0" eaLnBrk="0" fontAlgn="base" hangingPunct="0">
-              <a:lnSpc>
-                <a:spcPct val="90000"/>
-              </a:lnSpc>
-              <a:spcBef>
-                <a:spcPct val="30000"/>
-              </a:spcBef>
-              <a:spcAft>
-                <a:spcPct val="0"/>
-              </a:spcAft>
-              <a:buSzPct val="100000"/>
-              <a:buChar char="–"/>
-              <a:defRPr sz="2200">
-                <a:solidFill>
-                  <a:schemeClr val="tx1"/>
-                </a:solidFill>
-                <a:latin typeface="Gill Sans" charset="0"/>
-                <a:ea typeface="Gill Sans" charset="0"/>
-                <a:cs typeface="Gill Sans" charset="0"/>
-              </a:defRPr>
-            </a:lvl2pPr>
-            <a:lvl3pPr marL="1143000" indent="-228600" algn="l" rtl="0" eaLnBrk="0" fontAlgn="base" hangingPunct="0">
-              <a:lnSpc>
-                <a:spcPct val="90000"/>
-              </a:lnSpc>
-              <a:spcBef>
-                <a:spcPct val="30000"/>
-              </a:spcBef>
-              <a:spcAft>
-                <a:spcPct val="0"/>
-              </a:spcAft>
-              <a:buSzPct val="100000"/>
-              <a:buChar char="»"/>
-              <a:defRPr sz="2000">
-                <a:solidFill>
-                  <a:schemeClr val="tx1"/>
-                </a:solidFill>
-                <a:latin typeface="Gill Sans" charset="0"/>
-                <a:ea typeface="Gill Sans" charset="0"/>
-                <a:cs typeface="Gill Sans" charset="0"/>
-              </a:defRPr>
-            </a:lvl3pPr>
-            <a:lvl4pPr marL="1543050" indent="-171450" algn="l" rtl="0" eaLnBrk="0" fontAlgn="base" hangingPunct="0">
-              <a:lnSpc>
-                <a:spcPct val="90000"/>
-              </a:lnSpc>
-              <a:spcBef>
-                <a:spcPct val="30000"/>
-              </a:spcBef>
-              <a:spcAft>
-                <a:spcPct val="0"/>
-              </a:spcAft>
-              <a:buSzPct val="100000"/>
-              <a:buChar char="•"/>
-              <a:defRPr sz="2000">
-                <a:solidFill>
-                  <a:schemeClr val="tx1"/>
-                </a:solidFill>
-                <a:latin typeface="Gill Sans" charset="0"/>
-                <a:ea typeface="Gill Sans" charset="0"/>
-                <a:cs typeface="Gill Sans" charset="0"/>
-              </a:defRPr>
-            </a:lvl4pPr>
-            <a:lvl5pPr marL="2000250" indent="-171450" algn="l" rtl="0" eaLnBrk="0" fontAlgn="base" hangingPunct="0">
-              <a:lnSpc>
-                <a:spcPct val="90000"/>
-              </a:lnSpc>
-              <a:spcBef>
-                <a:spcPct val="30000"/>
-              </a:spcBef>
-              <a:spcAft>
-                <a:spcPct val="0"/>
-              </a:spcAft>
-              <a:buSzPct val="100000"/>
-              <a:buChar char="–"/>
-              <a:defRPr sz="2000">
-                <a:solidFill>
-                  <a:schemeClr val="tx1"/>
-                </a:solidFill>
-                <a:latin typeface="Gill Sans" charset="0"/>
-                <a:ea typeface="Gill Sans" charset="0"/>
-                <a:cs typeface="Gill Sans" charset="0"/>
-              </a:defRPr>
-            </a:lvl5pPr>
-            <a:lvl6pPr marL="2457450" indent="-171450" algn="l" rtl="0" eaLnBrk="0" fontAlgn="base" hangingPunct="0">
-              <a:lnSpc>
-                <a:spcPct val="90000"/>
-              </a:lnSpc>
-              <a:spcBef>
-                <a:spcPct val="30000"/>
-              </a:spcBef>
-              <a:spcAft>
-                <a:spcPct val="0"/>
-              </a:spcAft>
-              <a:buSzPct val="100000"/>
-              <a:buChar char="–"/>
-              <a:defRPr sz="2000" b="1">
-                <a:solidFill>
-                  <a:schemeClr val="tx1"/>
-                </a:solidFill>
-                <a:latin typeface="+mn-lt"/>
-              </a:defRPr>
-            </a:lvl6pPr>
-            <a:lvl7pPr marL="2914650" indent="-171450" algn="l" rtl="0" eaLnBrk="0" fontAlgn="base" hangingPunct="0">
-              <a:lnSpc>
-                <a:spcPct val="90000"/>
-              </a:lnSpc>
-              <a:spcBef>
-                <a:spcPct val="30000"/>
-              </a:spcBef>
-              <a:spcAft>
-                <a:spcPct val="0"/>
-              </a:spcAft>
-              <a:buSzPct val="100000"/>
-              <a:buChar char="–"/>
-              <a:defRPr sz="2000" b="1">
-                <a:solidFill>
-                  <a:schemeClr val="tx1"/>
-                </a:solidFill>
-                <a:latin typeface="+mn-lt"/>
-              </a:defRPr>
-            </a:lvl7pPr>
-            <a:lvl8pPr marL="3371850" indent="-171450" algn="l" rtl="0" eaLnBrk="0" fontAlgn="base" hangingPunct="0">
-              <a:lnSpc>
-                <a:spcPct val="90000"/>
-              </a:lnSpc>
-              <a:spcBef>
-                <a:spcPct val="30000"/>
-              </a:spcBef>
-              <a:spcAft>
-                <a:spcPct val="0"/>
-              </a:spcAft>
-              <a:buSzPct val="100000"/>
-              <a:buChar char="–"/>
-              <a:defRPr sz="2000" b="1">
-                <a:solidFill>
-                  <a:schemeClr val="tx1"/>
-                </a:solidFill>
-                <a:latin typeface="+mn-lt"/>
-              </a:defRPr>
-            </a:lvl8pPr>
-            <a:lvl9pPr marL="3829050" indent="-171450" algn="l" rtl="0" eaLnBrk="0" fontAlgn="base" hangingPunct="0">
-              <a:lnSpc>
-                <a:spcPct val="90000"/>
-              </a:lnSpc>
-              <a:spcBef>
-                <a:spcPct val="30000"/>
-              </a:spcBef>
-              <a:spcAft>
-                <a:spcPct val="0"/>
-              </a:spcAft>
-              <a:buSzPct val="100000"/>
-              <a:buChar char="–"/>
-              <a:defRPr sz="2000" b="1">
-                <a:solidFill>
-                  <a:schemeClr val="tx1"/>
-                </a:solidFill>
-                <a:latin typeface="+mn-lt"/>
-              </a:defRPr>
-            </a:lvl9pPr>
-          </a:lstStyle>
-          <a:p>
-            <a:pPr marL="0" indent="0">
-              <a:buFontTx/>
-              <a:buNone/>
-            </a:pPr>
-            <a:r>
-              <a:rPr lang="en-GB" altLang="zh-CN" sz="1700" b="0" kern="0" dirty="0">
-                <a:latin typeface="Courier New" panose="02070309020205020404" pitchFamily="49" charset="0"/>
-                <a:cs typeface="Courier New" panose="02070309020205020404" pitchFamily="49" charset="0"/>
-              </a:rPr>
-              <a:t>//Thread T0</a:t>
-            </a:r>
-          </a:p>
-          <a:p>
-            <a:pPr marL="0" indent="0">
-              <a:buFontTx/>
-              <a:buNone/>
-            </a:pPr>
-            <a:r>
-              <a:rPr lang="en-GB" altLang="zh-CN" sz="1700" b="0" kern="0" dirty="0">
-                <a:latin typeface="Courier New" panose="02070309020205020404" pitchFamily="49" charset="0"/>
-                <a:cs typeface="Courier New" panose="02070309020205020404" pitchFamily="49" charset="0"/>
-              </a:rPr>
-              <a:t>for (int i=0; i&lt;5; i++) {  </a:t>
-            </a:r>
-          </a:p>
-          <a:p>
-            <a:pPr marL="0" indent="0">
-              <a:buFontTx/>
-              <a:buNone/>
-            </a:pPr>
-            <a:r>
-              <a:rPr lang="en-GB" altLang="zh-CN" sz="1700" b="0" kern="0" dirty="0">
-                <a:latin typeface="Courier New" panose="02070309020205020404" pitchFamily="49" charset="0"/>
-                <a:cs typeface="Courier New" panose="02070309020205020404" pitchFamily="49" charset="0"/>
-              </a:rPr>
-              <a:t>   x = x + 1;</a:t>
-            </a:r>
-          </a:p>
-          <a:p>
-            <a:pPr marL="0" indent="0">
-              <a:buFontTx/>
-              <a:buNone/>
-            </a:pPr>
-            <a:r>
-              <a:rPr lang="en-GB" altLang="zh-CN" sz="1700" b="0" kern="0" dirty="0">
-                <a:latin typeface="Courier New" panose="02070309020205020404" pitchFamily="49" charset="0"/>
-                <a:cs typeface="Courier New" panose="02070309020205020404" pitchFamily="49" charset="0"/>
-              </a:rPr>
-              <a:t>}</a:t>
-            </a:r>
-          </a:p>
-        </p:txBody>
-      </p:sp>
-      <p:sp>
-        <p:nvSpPr>
-          <p:cNvPr id="5" name="Plassholder for innhold 2">
-            <a:extLst>
-              <a:ext uri="{FF2B5EF4-FFF2-40B4-BE49-F238E27FC236}">
-                <a16:creationId xmlns:a16="http://schemas.microsoft.com/office/drawing/2014/main" id="{9D5B75F7-DF91-87EF-42D7-37808B097603}"/>
-              </a:ext>
-            </a:extLst>
-          </p:cNvPr>
-          <p:cNvSpPr txBox="1">
-            <a:spLocks/>
-          </p:cNvSpPr>
-          <p:nvPr/>
-        </p:nvSpPr>
-        <p:spPr bwMode="auto">
-          <a:xfrm>
-            <a:off x="6324600" y="1419859"/>
-            <a:ext cx="3699076" cy="1276127"/>
-          </a:xfrm>
-          <a:prstGeom prst="rect">
-            <a:avLst/>
-          </a:prstGeom>
-          <a:noFill/>
-          <a:ln>
-            <a:solidFill>
-              <a:schemeClr val="accent1">
-                <a:lumMod val="50000"/>
-              </a:schemeClr>
-            </a:solidFill>
-          </a:ln>
-          <a:effectLst/>
-          <a:extLst>
-            <a:ext uri="{FAA26D3D-D897-4be2-8F04-BA451C77F1D7}">
-              <ma14:placeholderFlag xmlns:ma14="http://schemas.microsoft.com/office/mac/drawingml/2011/main" xmlns="" val="1"/>
-            </a:ext>
-            <a:ext uri="{909E8E84-426E-40dd-AFC4-6F175D3DCCD1}">
-              <a14:hiddenFill xmlns:a14="http://schemas.microsoft.com/office/drawing/2010/main" xmlns="">
-                <a:solidFill>
-                  <a:schemeClr val="bg1"/>
-                </a:solidFill>
-              </a14:hiddenFill>
-            </a:ext>
-            <a:ext uri="{91240B29-F687-4f45-9708-019B960494DF}">
-              <a14:hiddenLine xmlns:a14="http://schemas.microsoft.com/office/drawing/2010/main" xmlns="" w="12700">
-                <a:pattFill prst="narHorz">
-                  <a:fgClr>
-                    <a:schemeClr val="tx1"/>
-                  </a:fgClr>
-                  <a:bgClr>
-                    <a:schemeClr val="bg1"/>
-                  </a:bgClr>
-                </a:pattFill>
-                <a:miter lim="800000"/>
-                <a:headEnd/>
-                <a:tailEnd/>
-              </a14:hiddenLine>
-            </a:ext>
-            <a:ext uri="{AF507438-7753-43e0-B8FC-AC1667EBCBE1}">
-              <a14:hiddenEffects xmlns:a14="http://schemas.microsoft.com/office/drawing/2010/main" xmlns="">
-                <a:effectLst>
-                  <a:outerShdw blurRad="63500" dist="38099" dir="2700000" algn="ctr" rotWithShape="0">
-                    <a:schemeClr val="bg2">
-                      <a:alpha val="74998"/>
-                    </a:schemeClr>
-                  </a:outerShdw>
-                </a:effectLst>
-              </a14:hiddenEffects>
-            </a:ext>
-          </a:extLst>
-        </p:spPr>
-        <p:txBody>
-          <a:bodyPr vert="horz" wrap="square" lIns="90478" tIns="44445" rIns="90478" bIns="44445" numCol="1" anchor="t" anchorCtr="0" compatLnSpc="1">
-            <a:prstTxWarp prst="textNoShape">
-              <a:avLst/>
-            </a:prstTxWarp>
-            <a:noAutofit/>
-          </a:bodyPr>
-          <a:lstStyle>
-            <a:lvl1pPr marL="285750" indent="-285750" algn="l" rtl="0" eaLnBrk="0" fontAlgn="base" hangingPunct="0">
-              <a:lnSpc>
-                <a:spcPct val="90000"/>
-              </a:lnSpc>
-              <a:spcBef>
-                <a:spcPct val="30000"/>
-              </a:spcBef>
-              <a:spcAft>
-                <a:spcPct val="0"/>
-              </a:spcAft>
-              <a:buSzPct val="100000"/>
-              <a:buChar char="•"/>
-              <a:defRPr sz="2400">
-                <a:solidFill>
-                  <a:schemeClr val="tx1"/>
-                </a:solidFill>
-                <a:latin typeface="Gill Sans" charset="0"/>
-                <a:ea typeface="ＭＳ Ｐゴシック" charset="0"/>
-                <a:cs typeface="Gill Sans" charset="0"/>
-              </a:defRPr>
-            </a:lvl1pPr>
-            <a:lvl2pPr marL="685800" indent="-228600" algn="l" rtl="0" eaLnBrk="0" fontAlgn="base" hangingPunct="0">
-              <a:lnSpc>
-                <a:spcPct val="90000"/>
-              </a:lnSpc>
-              <a:spcBef>
-                <a:spcPct val="30000"/>
-              </a:spcBef>
-              <a:spcAft>
-                <a:spcPct val="0"/>
-              </a:spcAft>
-              <a:buSzPct val="100000"/>
-              <a:buChar char="–"/>
-              <a:defRPr sz="2200">
-                <a:solidFill>
-                  <a:schemeClr val="tx1"/>
-                </a:solidFill>
-                <a:latin typeface="Gill Sans" charset="0"/>
-                <a:ea typeface="Gill Sans" charset="0"/>
-                <a:cs typeface="Gill Sans" charset="0"/>
-              </a:defRPr>
-            </a:lvl2pPr>
-            <a:lvl3pPr marL="1143000" indent="-228600" algn="l" rtl="0" eaLnBrk="0" fontAlgn="base" hangingPunct="0">
-              <a:lnSpc>
-                <a:spcPct val="90000"/>
-              </a:lnSpc>
-              <a:spcBef>
-                <a:spcPct val="30000"/>
-              </a:spcBef>
-              <a:spcAft>
-                <a:spcPct val="0"/>
-              </a:spcAft>
-              <a:buSzPct val="100000"/>
-              <a:buChar char="»"/>
-              <a:defRPr sz="2000">
-                <a:solidFill>
-                  <a:schemeClr val="tx1"/>
-                </a:solidFill>
-                <a:latin typeface="Gill Sans" charset="0"/>
-                <a:ea typeface="Gill Sans" charset="0"/>
-                <a:cs typeface="Gill Sans" charset="0"/>
-              </a:defRPr>
-            </a:lvl3pPr>
-            <a:lvl4pPr marL="1543050" indent="-171450" algn="l" rtl="0" eaLnBrk="0" fontAlgn="base" hangingPunct="0">
-              <a:lnSpc>
-                <a:spcPct val="90000"/>
-              </a:lnSpc>
-              <a:spcBef>
-                <a:spcPct val="30000"/>
-              </a:spcBef>
-              <a:spcAft>
-                <a:spcPct val="0"/>
-              </a:spcAft>
-              <a:buSzPct val="100000"/>
-              <a:buChar char="•"/>
-              <a:defRPr sz="2000">
-                <a:solidFill>
-                  <a:schemeClr val="tx1"/>
-                </a:solidFill>
-                <a:latin typeface="Gill Sans" charset="0"/>
-                <a:ea typeface="Gill Sans" charset="0"/>
-                <a:cs typeface="Gill Sans" charset="0"/>
-              </a:defRPr>
-            </a:lvl4pPr>
-            <a:lvl5pPr marL="2000250" indent="-171450" algn="l" rtl="0" eaLnBrk="0" fontAlgn="base" hangingPunct="0">
-              <a:lnSpc>
-                <a:spcPct val="90000"/>
-              </a:lnSpc>
-              <a:spcBef>
-                <a:spcPct val="30000"/>
-              </a:spcBef>
-              <a:spcAft>
-                <a:spcPct val="0"/>
-              </a:spcAft>
-              <a:buSzPct val="100000"/>
-              <a:buChar char="–"/>
-              <a:defRPr sz="2000">
-                <a:solidFill>
-                  <a:schemeClr val="tx1"/>
-                </a:solidFill>
-                <a:latin typeface="Gill Sans" charset="0"/>
-                <a:ea typeface="Gill Sans" charset="0"/>
-                <a:cs typeface="Gill Sans" charset="0"/>
-              </a:defRPr>
-            </a:lvl5pPr>
-            <a:lvl6pPr marL="2457450" indent="-171450" algn="l" rtl="0" eaLnBrk="0" fontAlgn="base" hangingPunct="0">
-              <a:lnSpc>
-                <a:spcPct val="90000"/>
-              </a:lnSpc>
-              <a:spcBef>
-                <a:spcPct val="30000"/>
-              </a:spcBef>
-              <a:spcAft>
-                <a:spcPct val="0"/>
-              </a:spcAft>
-              <a:buSzPct val="100000"/>
-              <a:buChar char="–"/>
-              <a:defRPr sz="2000" b="1">
-                <a:solidFill>
-                  <a:schemeClr val="tx1"/>
-                </a:solidFill>
-                <a:latin typeface="+mn-lt"/>
-              </a:defRPr>
-            </a:lvl6pPr>
-            <a:lvl7pPr marL="2914650" indent="-171450" algn="l" rtl="0" eaLnBrk="0" fontAlgn="base" hangingPunct="0">
-              <a:lnSpc>
-                <a:spcPct val="90000"/>
-              </a:lnSpc>
-              <a:spcBef>
-                <a:spcPct val="30000"/>
-              </a:spcBef>
-              <a:spcAft>
-                <a:spcPct val="0"/>
-              </a:spcAft>
-              <a:buSzPct val="100000"/>
-              <a:buChar char="–"/>
-              <a:defRPr sz="2000" b="1">
-                <a:solidFill>
-                  <a:schemeClr val="tx1"/>
-                </a:solidFill>
-                <a:latin typeface="+mn-lt"/>
-              </a:defRPr>
-            </a:lvl7pPr>
-            <a:lvl8pPr marL="3371850" indent="-171450" algn="l" rtl="0" eaLnBrk="0" fontAlgn="base" hangingPunct="0">
-              <a:lnSpc>
-                <a:spcPct val="90000"/>
-              </a:lnSpc>
-              <a:spcBef>
-                <a:spcPct val="30000"/>
-              </a:spcBef>
-              <a:spcAft>
-                <a:spcPct val="0"/>
-              </a:spcAft>
-              <a:buSzPct val="100000"/>
-              <a:buChar char="–"/>
-              <a:defRPr sz="2000" b="1">
-                <a:solidFill>
-                  <a:schemeClr val="tx1"/>
-                </a:solidFill>
-                <a:latin typeface="+mn-lt"/>
-              </a:defRPr>
-            </a:lvl8pPr>
-            <a:lvl9pPr marL="3829050" indent="-171450" algn="l" rtl="0" eaLnBrk="0" fontAlgn="base" hangingPunct="0">
-              <a:lnSpc>
-                <a:spcPct val="90000"/>
-              </a:lnSpc>
-              <a:spcBef>
-                <a:spcPct val="30000"/>
-              </a:spcBef>
-              <a:spcAft>
-                <a:spcPct val="0"/>
-              </a:spcAft>
-              <a:buSzPct val="100000"/>
-              <a:buChar char="–"/>
-              <a:defRPr sz="2000" b="1">
-                <a:solidFill>
-                  <a:schemeClr val="tx1"/>
-                </a:solidFill>
-                <a:latin typeface="+mn-lt"/>
-              </a:defRPr>
-            </a:lvl9pPr>
-          </a:lstStyle>
-          <a:p>
-            <a:pPr marL="0" indent="0">
-              <a:buFontTx/>
-              <a:buNone/>
-            </a:pPr>
-            <a:r>
-              <a:rPr lang="en-GB" altLang="zh-CN" sz="1700" b="0" kern="0" dirty="0">
-                <a:latin typeface="Courier New" panose="02070309020205020404" pitchFamily="49" charset="0"/>
-                <a:cs typeface="Courier New" panose="02070309020205020404" pitchFamily="49" charset="0"/>
-              </a:rPr>
-              <a:t>//Thread T1</a:t>
-            </a:r>
-          </a:p>
-          <a:p>
-            <a:pPr marL="0" indent="0">
-              <a:buFontTx/>
-              <a:buNone/>
-            </a:pPr>
-            <a:r>
-              <a:rPr lang="en-GB" altLang="zh-CN" sz="1700" b="0" kern="0" dirty="0">
-                <a:latin typeface="Courier New" panose="02070309020205020404" pitchFamily="49" charset="0"/>
-                <a:cs typeface="Courier New" panose="02070309020205020404" pitchFamily="49" charset="0"/>
-              </a:rPr>
-              <a:t>for (int j=0; j&lt;5; </a:t>
-            </a:r>
-            <a:r>
-              <a:rPr lang="en-GB" altLang="zh-CN" sz="1700" b="0" kern="0" dirty="0" err="1">
-                <a:latin typeface="Courier New" panose="02070309020205020404" pitchFamily="49" charset="0"/>
-                <a:cs typeface="Courier New" panose="02070309020205020404" pitchFamily="49" charset="0"/>
-              </a:rPr>
-              <a:t>j++</a:t>
-            </a:r>
-            <a:r>
-              <a:rPr lang="en-GB" altLang="zh-CN" sz="1700" b="0" kern="0" dirty="0">
-                <a:latin typeface="Courier New" panose="02070309020205020404" pitchFamily="49" charset="0"/>
-                <a:cs typeface="Courier New" panose="02070309020205020404" pitchFamily="49" charset="0"/>
-              </a:rPr>
-              <a:t>) {  </a:t>
-            </a:r>
-          </a:p>
-          <a:p>
-            <a:pPr marL="0" indent="0">
-              <a:buFontTx/>
-              <a:buNone/>
-            </a:pPr>
-            <a:r>
-              <a:rPr lang="en-GB" altLang="zh-CN" sz="1700" b="0" kern="0" dirty="0">
-                <a:latin typeface="Courier New" panose="02070309020205020404" pitchFamily="49" charset="0"/>
-                <a:cs typeface="Courier New" panose="02070309020205020404" pitchFamily="49" charset="0"/>
-              </a:rPr>
-              <a:t>   x = x + 2;</a:t>
-            </a:r>
-          </a:p>
-          <a:p>
-            <a:pPr marL="0" indent="0">
-              <a:buFontTx/>
-              <a:buNone/>
-            </a:pPr>
-            <a:r>
-              <a:rPr lang="en-GB" altLang="zh-CN" sz="1700" b="0" kern="0" dirty="0">
-                <a:latin typeface="Courier New" panose="02070309020205020404" pitchFamily="49" charset="0"/>
-                <a:cs typeface="Courier New" panose="02070309020205020404" pitchFamily="49" charset="0"/>
-              </a:rPr>
-              <a:t>}</a:t>
-            </a:r>
-          </a:p>
-        </p:txBody>
-      </p:sp>
-      <p:sp>
-        <p:nvSpPr>
-          <p:cNvPr id="6" name="Plassholder for innhold 2">
-            <a:extLst>
-              <a:ext uri="{FF2B5EF4-FFF2-40B4-BE49-F238E27FC236}">
-                <a16:creationId xmlns:a16="http://schemas.microsoft.com/office/drawing/2014/main" id="{2D37079E-C01B-98FE-3AB3-789AD906045B}"/>
-              </a:ext>
-            </a:extLst>
-          </p:cNvPr>
-          <p:cNvSpPr txBox="1">
-            <a:spLocks/>
-          </p:cNvSpPr>
-          <p:nvPr/>
-        </p:nvSpPr>
-        <p:spPr bwMode="auto">
-          <a:xfrm>
-            <a:off x="5213551" y="836112"/>
-            <a:ext cx="2000250" cy="446762"/>
-          </a:xfrm>
-          <a:prstGeom prst="rect">
-            <a:avLst/>
-          </a:prstGeom>
-          <a:noFill/>
-          <a:ln>
-            <a:solidFill>
-              <a:schemeClr val="tx1"/>
-            </a:solidFill>
-          </a:ln>
-          <a:effectLst/>
-          <a:extLst>
-            <a:ext uri="{FAA26D3D-D897-4be2-8F04-BA451C77F1D7}">
-              <ma14:placeholderFlag xmlns:ma14="http://schemas.microsoft.com/office/mac/drawingml/2011/main" xmlns="" val="1"/>
-            </a:ext>
-            <a:ext uri="{909E8E84-426E-40dd-AFC4-6F175D3DCCD1}">
-              <a14:hiddenFill xmlns:a14="http://schemas.microsoft.com/office/drawing/2010/main" xmlns="">
-                <a:solidFill>
-                  <a:schemeClr val="bg1"/>
-                </a:solidFill>
-              </a14:hiddenFill>
-            </a:ext>
-            <a:ext uri="{91240B29-F687-4f45-9708-019B960494DF}">
-              <a14:hiddenLine xmlns:a14="http://schemas.microsoft.com/office/drawing/2010/main" xmlns="" w="12700">
-                <a:pattFill prst="narHorz">
-                  <a:fgClr>
-                    <a:schemeClr val="tx1"/>
-                  </a:fgClr>
-                  <a:bgClr>
-                    <a:schemeClr val="bg1"/>
-                  </a:bgClr>
-                </a:pattFill>
-                <a:miter lim="800000"/>
-                <a:headEnd/>
-                <a:tailEnd/>
-              </a14:hiddenLine>
-            </a:ext>
-            <a:ext uri="{AF507438-7753-43e0-B8FC-AC1667EBCBE1}">
-              <a14:hiddenEffects xmlns:a14="http://schemas.microsoft.com/office/drawing/2010/main" xmlns="">
-                <a:effectLst>
-                  <a:outerShdw blurRad="63500" dist="38099" dir="2700000" algn="ctr" rotWithShape="0">
-                    <a:schemeClr val="bg2">
-                      <a:alpha val="74998"/>
-                    </a:schemeClr>
-                  </a:outerShdw>
-                </a:effectLst>
-              </a14:hiddenEffects>
-            </a:ext>
-          </a:extLst>
-        </p:spPr>
-        <p:txBody>
-          <a:bodyPr vert="horz" wrap="square" lIns="90478" tIns="44445" rIns="90478" bIns="44445" numCol="1" anchor="t" anchorCtr="0" compatLnSpc="1">
-            <a:prstTxWarp prst="textNoShape">
-              <a:avLst/>
-            </a:prstTxWarp>
-            <a:normAutofit/>
-          </a:bodyPr>
-          <a:lstStyle>
-            <a:lvl1pPr marL="285750" indent="-285750" algn="l" rtl="0" eaLnBrk="0" fontAlgn="base" hangingPunct="0">
-              <a:lnSpc>
-                <a:spcPct val="90000"/>
-              </a:lnSpc>
-              <a:spcBef>
-                <a:spcPct val="30000"/>
-              </a:spcBef>
-              <a:spcAft>
-                <a:spcPct val="0"/>
-              </a:spcAft>
-              <a:buSzPct val="100000"/>
-              <a:buChar char="•"/>
-              <a:defRPr sz="2400">
-                <a:solidFill>
-                  <a:schemeClr val="tx1"/>
-                </a:solidFill>
-                <a:latin typeface="Gill Sans" charset="0"/>
-                <a:ea typeface="ＭＳ Ｐゴシック" charset="0"/>
-                <a:cs typeface="Gill Sans" charset="0"/>
-              </a:defRPr>
-            </a:lvl1pPr>
-            <a:lvl2pPr marL="685800" indent="-228600" algn="l" rtl="0" eaLnBrk="0" fontAlgn="base" hangingPunct="0">
-              <a:lnSpc>
-                <a:spcPct val="90000"/>
-              </a:lnSpc>
-              <a:spcBef>
-                <a:spcPct val="30000"/>
-              </a:spcBef>
-              <a:spcAft>
-                <a:spcPct val="0"/>
-              </a:spcAft>
-              <a:buSzPct val="100000"/>
-              <a:buChar char="–"/>
-              <a:defRPr sz="2200">
-                <a:solidFill>
-                  <a:schemeClr val="tx1"/>
-                </a:solidFill>
-                <a:latin typeface="Gill Sans" charset="0"/>
-                <a:ea typeface="Gill Sans" charset="0"/>
-                <a:cs typeface="Gill Sans" charset="0"/>
-              </a:defRPr>
-            </a:lvl2pPr>
-            <a:lvl3pPr marL="1143000" indent="-228600" algn="l" rtl="0" eaLnBrk="0" fontAlgn="base" hangingPunct="0">
-              <a:lnSpc>
-                <a:spcPct val="90000"/>
-              </a:lnSpc>
-              <a:spcBef>
-                <a:spcPct val="30000"/>
-              </a:spcBef>
-              <a:spcAft>
-                <a:spcPct val="0"/>
-              </a:spcAft>
-              <a:buSzPct val="100000"/>
-              <a:buChar char="»"/>
-              <a:defRPr sz="2000">
-                <a:solidFill>
-                  <a:schemeClr val="tx1"/>
-                </a:solidFill>
-                <a:latin typeface="Gill Sans" charset="0"/>
-                <a:ea typeface="Gill Sans" charset="0"/>
-                <a:cs typeface="Gill Sans" charset="0"/>
-              </a:defRPr>
-            </a:lvl3pPr>
-            <a:lvl4pPr marL="1543050" indent="-171450" algn="l" rtl="0" eaLnBrk="0" fontAlgn="base" hangingPunct="0">
-              <a:lnSpc>
-                <a:spcPct val="90000"/>
-              </a:lnSpc>
-              <a:spcBef>
-                <a:spcPct val="30000"/>
-              </a:spcBef>
-              <a:spcAft>
-                <a:spcPct val="0"/>
-              </a:spcAft>
-              <a:buSzPct val="100000"/>
-              <a:buChar char="•"/>
-              <a:defRPr sz="2000">
-                <a:solidFill>
-                  <a:schemeClr val="tx1"/>
-                </a:solidFill>
-                <a:latin typeface="Gill Sans" charset="0"/>
-                <a:ea typeface="Gill Sans" charset="0"/>
-                <a:cs typeface="Gill Sans" charset="0"/>
-              </a:defRPr>
-            </a:lvl4pPr>
-            <a:lvl5pPr marL="2000250" indent="-171450" algn="l" rtl="0" eaLnBrk="0" fontAlgn="base" hangingPunct="0">
-              <a:lnSpc>
-                <a:spcPct val="90000"/>
-              </a:lnSpc>
-              <a:spcBef>
-                <a:spcPct val="30000"/>
-              </a:spcBef>
-              <a:spcAft>
-                <a:spcPct val="0"/>
-              </a:spcAft>
-              <a:buSzPct val="100000"/>
-              <a:buChar char="–"/>
-              <a:defRPr sz="2000">
-                <a:solidFill>
-                  <a:schemeClr val="tx1"/>
-                </a:solidFill>
-                <a:latin typeface="Gill Sans" charset="0"/>
-                <a:ea typeface="Gill Sans" charset="0"/>
-                <a:cs typeface="Gill Sans" charset="0"/>
-              </a:defRPr>
-            </a:lvl5pPr>
-            <a:lvl6pPr marL="2457450" indent="-171450" algn="l" rtl="0" eaLnBrk="0" fontAlgn="base" hangingPunct="0">
-              <a:lnSpc>
-                <a:spcPct val="90000"/>
-              </a:lnSpc>
-              <a:spcBef>
-                <a:spcPct val="30000"/>
-              </a:spcBef>
-              <a:spcAft>
-                <a:spcPct val="0"/>
-              </a:spcAft>
-              <a:buSzPct val="100000"/>
-              <a:buChar char="–"/>
-              <a:defRPr sz="2000" b="1">
-                <a:solidFill>
-                  <a:schemeClr val="tx1"/>
-                </a:solidFill>
-                <a:latin typeface="+mn-lt"/>
-              </a:defRPr>
-            </a:lvl6pPr>
-            <a:lvl7pPr marL="2914650" indent="-171450" algn="l" rtl="0" eaLnBrk="0" fontAlgn="base" hangingPunct="0">
-              <a:lnSpc>
-                <a:spcPct val="90000"/>
-              </a:lnSpc>
-              <a:spcBef>
-                <a:spcPct val="30000"/>
-              </a:spcBef>
-              <a:spcAft>
-                <a:spcPct val="0"/>
-              </a:spcAft>
-              <a:buSzPct val="100000"/>
-              <a:buChar char="–"/>
-              <a:defRPr sz="2000" b="1">
-                <a:solidFill>
-                  <a:schemeClr val="tx1"/>
-                </a:solidFill>
-                <a:latin typeface="+mn-lt"/>
-              </a:defRPr>
-            </a:lvl7pPr>
-            <a:lvl8pPr marL="3371850" indent="-171450" algn="l" rtl="0" eaLnBrk="0" fontAlgn="base" hangingPunct="0">
-              <a:lnSpc>
-                <a:spcPct val="90000"/>
-              </a:lnSpc>
-              <a:spcBef>
-                <a:spcPct val="30000"/>
-              </a:spcBef>
-              <a:spcAft>
-                <a:spcPct val="0"/>
-              </a:spcAft>
-              <a:buSzPct val="100000"/>
-              <a:buChar char="–"/>
-              <a:defRPr sz="2000" b="1">
-                <a:solidFill>
-                  <a:schemeClr val="tx1"/>
-                </a:solidFill>
-                <a:latin typeface="+mn-lt"/>
-              </a:defRPr>
-            </a:lvl8pPr>
-            <a:lvl9pPr marL="3829050" indent="-171450" algn="l" rtl="0" eaLnBrk="0" fontAlgn="base" hangingPunct="0">
-              <a:lnSpc>
-                <a:spcPct val="90000"/>
-              </a:lnSpc>
-              <a:spcBef>
-                <a:spcPct val="30000"/>
-              </a:spcBef>
-              <a:spcAft>
-                <a:spcPct val="0"/>
-              </a:spcAft>
-              <a:buSzPct val="100000"/>
-              <a:buChar char="–"/>
-              <a:defRPr sz="2000" b="1">
-                <a:solidFill>
-                  <a:schemeClr val="tx1"/>
-                </a:solidFill>
-                <a:latin typeface="+mn-lt"/>
-              </a:defRPr>
-            </a:lvl9pPr>
-          </a:lstStyle>
-          <a:p>
-            <a:pPr marL="0" indent="0">
-              <a:buFontTx/>
-              <a:buNone/>
-            </a:pPr>
-            <a:r>
-              <a:rPr lang="en-GB" altLang="zh-CN" sz="1700" b="0" kern="0" dirty="0">
-                <a:latin typeface="Courier New" panose="02070309020205020404" pitchFamily="49" charset="0"/>
-                <a:cs typeface="Courier New" panose="02070309020205020404" pitchFamily="49" charset="0"/>
-              </a:rPr>
-              <a:t>int x = 0;</a:t>
-            </a:r>
-            <a:endParaRPr lang="en-US" altLang="zh-CN" sz="1700" b="0" kern="0" dirty="0">
-              <a:latin typeface="Courier New" panose="02070309020205020404" pitchFamily="49" charset="0"/>
-              <a:cs typeface="Courier New" panose="02070309020205020404" pitchFamily="49" charset="0"/>
-            </a:endParaRPr>
-          </a:p>
-        </p:txBody>
-      </p:sp>
-    </p:spTree>
-    <p:extLst>
-      <p:ext uri="{BB962C8B-B14F-4D97-AF65-F5344CB8AC3E}">
-        <p14:creationId xmlns:p14="http://schemas.microsoft.com/office/powerpoint/2010/main" val="2751476572"/>
-      </p:ext>
-    </p:extLst>
-  </p:cSld>
-  <p:clrMapOvr>
-    <a:masterClrMapping/>
-  </p:clrMapOvr>
-  <p:transition/>
-</p:sld>
-</file>
-
-<file path=ppt/slides/slide20.xml><?xml version="1.0" encoding="utf-8"?>
+<file path=ppt/slides/slide21.xml><?xml version="1.0" encoding="utf-8"?>
 <p:sld xmlns:a="http://schemas.openxmlformats.org/drawingml/2006/main" xmlns:r="http://schemas.openxmlformats.org/officeDocument/2006/relationships" xmlns:p="http://schemas.openxmlformats.org/presentationml/2006/main">
   <p:cSld>
     <p:spTree>
@@ -30131,7 +30483,7 @@
 </p:sld>
 </file>
 
-<file path=ppt/slides/slide21.xml><?xml version="1.0" encoding="utf-8"?>
+<file path=ppt/slides/slide22.xml><?xml version="1.0" encoding="utf-8"?>
 <p:sld xmlns:a="http://schemas.openxmlformats.org/drawingml/2006/main" xmlns:r="http://schemas.openxmlformats.org/officeDocument/2006/relationships" xmlns:p="http://schemas.openxmlformats.org/presentationml/2006/main">
   <p:cSld>
     <p:spTree>
@@ -31581,7 +31933,7 @@
 </p:sld>
 </file>
 
-<file path=ppt/slides/slide22.xml><?xml version="1.0" encoding="utf-8"?>
+<file path=ppt/slides/slide23.xml><?xml version="1.0" encoding="utf-8"?>
 <p:sld xmlns:a="http://schemas.openxmlformats.org/drawingml/2006/main" xmlns:r="http://schemas.openxmlformats.org/officeDocument/2006/relationships" xmlns:p="http://schemas.openxmlformats.org/presentationml/2006/main">
   <p:cSld>
     <p:spTree>
@@ -33926,7 +34278,7 @@
                 <a:cs typeface="Arial"/>
               </a:rPr>
               <a:pPr algn="ctr"/>
-              <a:t>22</a:t>
+              <a:t>23</a:t>
             </a:fld>
             <a:endParaRPr lang="nb-NO" sz="1400" b="0" i="0" dirty="0">
               <a:solidFill>
@@ -33947,7 +34299,7 @@
 </p:sld>
 </file>
 
-<file path=ppt/slides/slide23.xml><?xml version="1.0" encoding="utf-8"?>
+<file path=ppt/slides/slide24.xml><?xml version="1.0" encoding="utf-8"?>
 <p:sld xmlns:a="http://schemas.openxmlformats.org/drawingml/2006/main" xmlns:r="http://schemas.openxmlformats.org/officeDocument/2006/relationships" xmlns:p="http://schemas.openxmlformats.org/presentationml/2006/main">
   <p:cSld>
     <p:spTree>
@@ -36553,7 +36905,7 @@
                 <a:cs typeface="Arial"/>
               </a:rPr>
               <a:pPr algn="ctr"/>
-              <a:t>23</a:t>
+              <a:t>24</a:t>
             </a:fld>
             <a:endParaRPr lang="nb-NO" sz="1400" b="0" i="0" dirty="0">
               <a:solidFill>
@@ -38745,7 +39097,7 @@
 </p:sld>
 </file>
 
-<file path=ppt/slides/slide24.xml><?xml version="1.0" encoding="utf-8"?>
+<file path=ppt/slides/slide25.xml><?xml version="1.0" encoding="utf-8"?>
 <p:sld xmlns:a="http://schemas.openxmlformats.org/drawingml/2006/main" xmlns:r="http://schemas.openxmlformats.org/officeDocument/2006/relationships" xmlns:p="http://schemas.openxmlformats.org/presentationml/2006/main">
   <p:cSld>
     <p:spTree>
@@ -41114,7 +41466,7 @@
                 <a:cs typeface="Arial"/>
               </a:rPr>
               <a:pPr algn="ctr"/>
-              <a:t>24</a:t>
+              <a:t>25</a:t>
             </a:fld>
             <a:endParaRPr lang="nb-NO" sz="1400" b="0" i="0" dirty="0">
               <a:solidFill>
@@ -42858,7 +43210,7 @@
           <a:p>
             <a:r>
               <a:rPr lang="en-US" altLang="zh-CN" dirty="0"/>
-              <a:t>Recall: Locks:</a:t>
+              <a:t>Locks:</a:t>
             </a:r>
             <a:r>
               <a:rPr lang="zh-CN" altLang="en-US" dirty="0"/>
@@ -42952,7 +43304,7 @@
           <a:p>
             <a:r>
               <a:rPr lang="en-US" altLang="zh-CN" dirty="0"/>
-              <a:t>After Thread 1 reads flag==0 and exits the while loop, it is preempted/interrupted by Thread 2, which also reads flag==0 and exits the while loop. Then both threads set flag=1 and enter the critical section.</a:t>
+              <a:t>After Thread 1 reads flag==0 and exits the while(flag) spin-wait loop, it is preempted/interrupted by Thread 2, which also reads flag==0 and exits the while(flag) spin-wait loop. Then both threads set flag=1 and enter the critical section.</a:t>
             </a:r>
           </a:p>
           <a:p>
@@ -43009,8 +43361,8 @@
         </p:blipFill>
         <p:spPr>
           <a:xfrm>
-            <a:off x="0" y="2971800"/>
-            <a:ext cx="6107003" cy="3714749"/>
+            <a:off x="0" y="2971801"/>
+            <a:ext cx="5776961" cy="3513992"/>
           </a:xfrm>
           <a:prstGeom prst="rect">
             <a:avLst/>
@@ -43031,8 +43383,8 @@
         </p:nvGrpSpPr>
         <p:grpSpPr>
           <a:xfrm>
-            <a:off x="6107003" y="3409949"/>
-            <a:ext cx="5776961" cy="2508235"/>
+            <a:off x="5776961" y="3335779"/>
+            <a:ext cx="6186506" cy="2686051"/>
             <a:chOff x="1744735" y="877084"/>
             <a:chExt cx="8596146" cy="3732266"/>
           </a:xfrm>
@@ -43138,10 +43490,94 @@
           </p:txBody>
         </p:sp>
       </p:grpSp>
+      <p:sp>
+        <p:nvSpPr>
+          <p:cNvPr id="9" name="TextBox 8">
+            <a:extLst>
+              <a:ext uri="{FF2B5EF4-FFF2-40B4-BE49-F238E27FC236}">
+                <a16:creationId xmlns:a16="http://schemas.microsoft.com/office/drawing/2014/main" id="{8436BA8F-FB9B-44B3-B855-08E43B6D2417}"/>
+              </a:ext>
+            </a:extLst>
+          </p:cNvPr>
+          <p:cNvSpPr txBox="1"/>
+          <p:nvPr/>
+        </p:nvSpPr>
+        <p:spPr>
+          <a:xfrm>
+            <a:off x="7492126" y="4229827"/>
+            <a:ext cx="405515" cy="369332"/>
+          </a:xfrm>
+          <a:prstGeom prst="rect">
+            <a:avLst/>
+          </a:prstGeom>
+          <a:noFill/>
+        </p:spPr>
+        <p:txBody>
+          <a:bodyPr wrap="square">
+            <a:spAutoFit/>
+          </a:bodyPr>
+          <a:lstStyle/>
+          <a:p>
+            <a:r>
+              <a:rPr lang="en-US" altLang="zh-CN" b="0" dirty="0">
+                <a:latin typeface="Times New Roman" panose="02020603050405020304" pitchFamily="18" charset="0"/>
+                <a:cs typeface="Times New Roman" panose="02020603050405020304" pitchFamily="18" charset="0"/>
+              </a:rPr>
+              <a:t>;</a:t>
+            </a:r>
+            <a:endParaRPr lang="en-US" b="0" dirty="0">
+              <a:latin typeface="Times New Roman" panose="02020603050405020304" pitchFamily="18" charset="0"/>
+              <a:cs typeface="Times New Roman" panose="02020603050405020304" pitchFamily="18" charset="0"/>
+            </a:endParaRPr>
+          </a:p>
+        </p:txBody>
+      </p:sp>
+      <p:sp>
+        <p:nvSpPr>
+          <p:cNvPr id="13" name="TextBox 12">
+            <a:extLst>
+              <a:ext uri="{FF2B5EF4-FFF2-40B4-BE49-F238E27FC236}">
+                <a16:creationId xmlns:a16="http://schemas.microsoft.com/office/drawing/2014/main" id="{013C4B83-14BD-4F88-8114-350674B3E77C}"/>
+              </a:ext>
+            </a:extLst>
+          </p:cNvPr>
+          <p:cNvSpPr txBox="1"/>
+          <p:nvPr/>
+        </p:nvSpPr>
+        <p:spPr>
+          <a:xfrm>
+            <a:off x="10506547" y="4931118"/>
+            <a:ext cx="405515" cy="369332"/>
+          </a:xfrm>
+          <a:prstGeom prst="rect">
+            <a:avLst/>
+          </a:prstGeom>
+          <a:noFill/>
+        </p:spPr>
+        <p:txBody>
+          <a:bodyPr wrap="square">
+            <a:spAutoFit/>
+          </a:bodyPr>
+          <a:lstStyle/>
+          <a:p>
+            <a:r>
+              <a:rPr lang="en-US" altLang="zh-CN" b="0" dirty="0">
+                <a:latin typeface="Times New Roman" panose="02020603050405020304" pitchFamily="18" charset="0"/>
+                <a:cs typeface="Times New Roman" panose="02020603050405020304" pitchFamily="18" charset="0"/>
+              </a:rPr>
+              <a:t>;</a:t>
+            </a:r>
+            <a:endParaRPr lang="en-US" b="0" dirty="0">
+              <a:latin typeface="Times New Roman" panose="02020603050405020304" pitchFamily="18" charset="0"/>
+              <a:cs typeface="Times New Roman" panose="02020603050405020304" pitchFamily="18" charset="0"/>
+            </a:endParaRPr>
+          </a:p>
+        </p:txBody>
+      </p:sp>
     </p:spTree>
     <p:extLst>
       <p:ext uri="{BB962C8B-B14F-4D97-AF65-F5344CB8AC3E}">
-        <p14:creationId xmlns:p14="http://schemas.microsoft.com/office/powerpoint/2010/main" val="605361066"/>
+        <p14:creationId xmlns:p14="http://schemas.microsoft.com/office/powerpoint/2010/main" val="651289378"/>
       </p:ext>
     </p:extLst>
   </p:cSld>
@@ -46214,7 +46650,26 @@
             </a:r>
             <a:r>
               <a:rPr lang="en-GB" dirty="0"/>
-              <a:t> Instruction: Not required. The solution uses simple Boolean variables and logical operations. In the previous slide “Locks: Loads/Stores”, all threads read and update a single global shared flag variable, so CPU atomic instructions like </a:t>
+              <a:t> Instruction: Not required. The solution uses simple Boolean variables and logical operations. Each thread reads both S0 and S1, but T0 only updates S0 and T1 only updates S1. </a:t>
+            </a:r>
+            <a:r>
+              <a:rPr lang="en-GB" dirty="0">
+                <a:solidFill>
+                  <a:srgbClr val="FF0000"/>
+                </a:solidFill>
+              </a:rPr>
+              <a:t>They do not update the same variable</a:t>
+            </a:r>
+            <a:r>
+              <a:rPr lang="en-GB" dirty="0"/>
+              <a:t>, so no mutual exclusion is needed.</a:t>
+            </a:r>
+          </a:p>
+          <a:p>
+            <a:pPr lvl="1"/>
+            <a:r>
+              <a:rPr lang="en-GB" dirty="0"/>
+              <a:t>In the previous slide “Locks: Loads/Stores”, all threads read and update a single global shared flag variable, so CPU atomic instructions like </a:t>
             </a:r>
             <a:r>
               <a:rPr lang="en-GB" dirty="0" err="1"/>
@@ -46230,11 +46685,8 @@
             </a:r>
             <a:r>
               <a:rPr lang="en-GB" dirty="0"/>
-              <a:t>) of the shared flag variable. But in this solution, each thread reads both S0 and S1, but T0 only updates S0 and T1 only updates S1, so no mutual exclusion is needed.</a:t>
-            </a:r>
-          </a:p>
-          <a:p>
-            <a:endParaRPr lang="en-GB" dirty="0"/>
+              <a:t>) of the shared flag variable. </a:t>
+            </a:r>
           </a:p>
           <a:p>
             <a:r>

--- a/PPTs/L3-Exercises ANS.pptx
+++ b/PPTs/L3-Exercises ANS.pptx
@@ -5,10 +5,10 @@
     <p:sldMasterId id="2147483648" r:id="rId1"/>
   </p:sldMasterIdLst>
   <p:notesMasterIdLst>
-    <p:notesMasterId r:id="rId27"/>
+    <p:notesMasterId r:id="rId26"/>
   </p:notesMasterIdLst>
   <p:handoutMasterIdLst>
-    <p:handoutMasterId r:id="rId28"/>
+    <p:handoutMasterId r:id="rId27"/>
   </p:handoutMasterIdLst>
   <p:sldIdLst>
     <p:sldId id="256" r:id="rId2"/>
@@ -26,16 +26,15 @@
     <p:sldId id="1392" r:id="rId14"/>
     <p:sldId id="1389" r:id="rId15"/>
     <p:sldId id="1393" r:id="rId16"/>
-    <p:sldId id="1401" r:id="rId17"/>
-    <p:sldId id="257" r:id="rId18"/>
-    <p:sldId id="258" r:id="rId19"/>
-    <p:sldId id="259" r:id="rId20"/>
-    <p:sldId id="260" r:id="rId21"/>
-    <p:sldId id="1379" r:id="rId22"/>
-    <p:sldId id="1380" r:id="rId23"/>
-    <p:sldId id="262" r:id="rId24"/>
-    <p:sldId id="264" r:id="rId25"/>
-    <p:sldId id="421" r:id="rId26"/>
+    <p:sldId id="257" r:id="rId17"/>
+    <p:sldId id="258" r:id="rId18"/>
+    <p:sldId id="259" r:id="rId19"/>
+    <p:sldId id="260" r:id="rId20"/>
+    <p:sldId id="1379" r:id="rId21"/>
+    <p:sldId id="1380" r:id="rId22"/>
+    <p:sldId id="262" r:id="rId23"/>
+    <p:sldId id="264" r:id="rId24"/>
+    <p:sldId id="421" r:id="rId25"/>
   </p:sldIdLst>
   <p:sldSz cx="12192000" cy="6858000"/>
   <p:notesSz cx="9601200" cy="7315200"/>
@@ -344,14 +343,14 @@
           <a:effectLst/>
           <a:extLst>
             <a:ext uri="{909E8E84-426E-40dd-AFC4-6F175D3DCCD1}">
-              <a14:hiddenFill xmlns:a14="http://schemas.microsoft.com/office/drawing/2010/main" xmlns="">
+              <a14:hiddenFill xmlns="" xmlns:a14="http://schemas.microsoft.com/office/drawing/2010/main">
                 <a:solidFill>
                   <a:schemeClr val="bg1"/>
                 </a:solidFill>
               </a14:hiddenFill>
             </a:ext>
             <a:ext uri="{91240B29-F687-4f45-9708-019B960494DF}">
-              <a14:hiddenLine xmlns:a14="http://schemas.microsoft.com/office/drawing/2010/main" xmlns="" w="12700">
+              <a14:hiddenLine xmlns="" xmlns:a14="http://schemas.microsoft.com/office/drawing/2010/main" w="12700">
                 <a:pattFill prst="narHorz">
                   <a:fgClr>
                     <a:schemeClr val="tx1"/>
@@ -366,7 +365,7 @@
               </a14:hiddenLine>
             </a:ext>
             <a:ext uri="{AF507438-7753-43e0-B8FC-AC1667EBCBE1}">
-              <a14:hiddenEffects xmlns:a14="http://schemas.microsoft.com/office/drawing/2010/main" xmlns="">
+              <a14:hiddenEffects xmlns="" xmlns:a14="http://schemas.microsoft.com/office/drawing/2010/main">
                 <a:effectLst>
                   <a:outerShdw dist="35921" dir="2700000" algn="ctr" rotWithShape="0">
                     <a:schemeClr val="bg2"/>
@@ -438,6 +437,32 @@
           <inkml:channelProperty channel="Y" name="resolution" value="1000" units="1/cm"/>
         </inkml:channelProperties>
       </inkml:inkSource>
+      <inkml:timestamp xml:id="ts0" timeString="2026-09-28T20:24:37.568"/>
+    </inkml:context>
+    <inkml:brush xml:id="br0">
+      <inkml:brushProperty name="width" value="0.05" units="cm"/>
+      <inkml:brushProperty name="height" value="0.05" units="cm"/>
+      <inkml:brushProperty name="ignorePressure" value="1"/>
+    </inkml:brush>
+  </inkml:definitions>
+  <inkml:trace contextRef="#ctx0" brushRef="#br0">1 1,'0'0</inkml:trace>
+</inkml:ink>
+</file>
+
+<file path=ppt/ink/ink2.xml><?xml version="1.0" encoding="utf-8"?>
+<inkml:ink xmlns:inkml="http://www.w3.org/2003/InkML">
+  <inkml:definitions>
+    <inkml:context xml:id="ctx0">
+      <inkml:inkSource xml:id="inkSrc0">
+        <inkml:traceFormat>
+          <inkml:channel name="X" type="integer" min="-2.14748E9" max="2.14748E9" units="cm"/>
+          <inkml:channel name="Y" type="integer" min="-2.14748E9" max="2.14748E9" units="cm"/>
+        </inkml:traceFormat>
+        <inkml:channelProperties>
+          <inkml:channelProperty channel="X" name="resolution" value="1000" units="1/cm"/>
+          <inkml:channelProperty channel="Y" name="resolution" value="1000" units="1/cm"/>
+        </inkml:channelProperties>
+      </inkml:inkSource>
       <inkml:timestamp xml:id="ts0" timeString="2026-09-23T21:15:49.894"/>
     </inkml:context>
     <inkml:brush xml:id="br0">
@@ -447,6 +472,58 @@
     </inkml:brush>
   </inkml:definitions>
   <inkml:trace contextRef="#ctx0" brushRef="#br0">0 0,'0'0</inkml:trace>
+</inkml:ink>
+</file>
+
+<file path=ppt/ink/ink3.xml><?xml version="1.0" encoding="utf-8"?>
+<inkml:ink xmlns:inkml="http://www.w3.org/2003/InkML">
+  <inkml:definitions>
+    <inkml:context xml:id="ctx0">
+      <inkml:inkSource xml:id="inkSrc0">
+        <inkml:traceFormat>
+          <inkml:channel name="X" type="integer" min="-2.14748E9" max="2.14748E9" units="cm"/>
+          <inkml:channel name="Y" type="integer" min="-2.14748E9" max="2.14748E9" units="cm"/>
+        </inkml:traceFormat>
+        <inkml:channelProperties>
+          <inkml:channelProperty channel="X" name="resolution" value="1000" units="1/cm"/>
+          <inkml:channelProperty channel="Y" name="resolution" value="1000" units="1/cm"/>
+        </inkml:channelProperties>
+      </inkml:inkSource>
+      <inkml:timestamp xml:id="ts0" timeString="2026-09-28T20:56:15.931"/>
+    </inkml:context>
+    <inkml:brush xml:id="br0">
+      <inkml:brushProperty name="width" value="0.05" units="cm"/>
+      <inkml:brushProperty name="height" value="0.05" units="cm"/>
+      <inkml:brushProperty name="ignorePressure" value="1"/>
+    </inkml:brush>
+  </inkml:definitions>
+  <inkml:trace contextRef="#ctx0" brushRef="#br0">1 0,'0'0</inkml:trace>
+</inkml:ink>
+</file>
+
+<file path=ppt/ink/ink4.xml><?xml version="1.0" encoding="utf-8"?>
+<inkml:ink xmlns:inkml="http://www.w3.org/2003/InkML">
+  <inkml:definitions>
+    <inkml:context xml:id="ctx0">
+      <inkml:inkSource xml:id="inkSrc0">
+        <inkml:traceFormat>
+          <inkml:channel name="X" type="integer" min="-2.14748E9" max="2.14748E9" units="cm"/>
+          <inkml:channel name="Y" type="integer" min="-2.14748E9" max="2.14748E9" units="cm"/>
+        </inkml:traceFormat>
+        <inkml:channelProperties>
+          <inkml:channelProperty channel="X" name="resolution" value="1000" units="1/cm"/>
+          <inkml:channelProperty channel="Y" name="resolution" value="1000" units="1/cm"/>
+        </inkml:channelProperties>
+      </inkml:inkSource>
+      <inkml:timestamp xml:id="ts0" timeString="2026-09-28T21:02:40.169"/>
+    </inkml:context>
+    <inkml:brush xml:id="br0">
+      <inkml:brushProperty name="width" value="0.05" units="cm"/>
+      <inkml:brushProperty name="height" value="0.05" units="cm"/>
+      <inkml:brushProperty name="ignorePressure" value="1"/>
+    </inkml:brush>
+  </inkml:definitions>
+  <inkml:trace contextRef="#ctx0" brushRef="#br0">1 0,'0'0</inkml:trace>
 </inkml:ink>
 </file>
 
@@ -498,14 +575,14 @@
           <a:effectLst/>
           <a:extLst>
             <a:ext uri="{909E8E84-426E-40dd-AFC4-6F175D3DCCD1}">
-              <a14:hiddenFill xmlns:a14="http://schemas.microsoft.com/office/drawing/2010/main" xmlns="">
+              <a14:hiddenFill xmlns="" xmlns:a14="http://schemas.microsoft.com/office/drawing/2010/main">
                 <a:solidFill>
                   <a:schemeClr val="bg1"/>
                 </a:solidFill>
               </a14:hiddenFill>
             </a:ext>
             <a:ext uri="{91240B29-F687-4f45-9708-019B960494DF}">
-              <a14:hiddenLine xmlns:a14="http://schemas.microsoft.com/office/drawing/2010/main" xmlns="" w="12700">
+              <a14:hiddenLine xmlns="" xmlns:a14="http://schemas.microsoft.com/office/drawing/2010/main" w="12700">
                 <a:pattFill prst="narHorz">
                   <a:fgClr>
                     <a:schemeClr val="tx1"/>
@@ -520,7 +597,7 @@
               </a14:hiddenLine>
             </a:ext>
             <a:ext uri="{AF507438-7753-43e0-B8FC-AC1667EBCBE1}">
-              <a14:hiddenEffects xmlns:a14="http://schemas.microsoft.com/office/drawing/2010/main" xmlns="">
+              <a14:hiddenEffects xmlns="" xmlns:a14="http://schemas.microsoft.com/office/drawing/2010/main">
                 <a:effectLst>
                   <a:outerShdw dist="35921" dir="2700000" algn="ctr" rotWithShape="0">
                     <a:schemeClr val="bg2"/>
@@ -588,17 +665,17 @@
           <a:effectLst/>
           <a:extLst>
             <a:ext uri="{FAA26D3D-D897-4be2-8F04-BA451C77F1D7}">
-              <ma14:placeholderFlag xmlns:ma14="http://schemas.microsoft.com/office/mac/drawingml/2011/main" xmlns="" val="1"/>
+              <ma14:placeholderFlag xmlns="" xmlns:ma14="http://schemas.microsoft.com/office/mac/drawingml/2011/main" val="1"/>
             </a:ext>
             <a:ext uri="{909E8E84-426E-40dd-AFC4-6F175D3DCCD1}">
-              <a14:hiddenFill xmlns:a14="http://schemas.microsoft.com/office/drawing/2010/main" xmlns="">
+              <a14:hiddenFill xmlns="" xmlns:a14="http://schemas.microsoft.com/office/drawing/2010/main">
                 <a:solidFill>
                   <a:srgbClr val="FFFFFF"/>
                 </a:solidFill>
               </a14:hiddenFill>
             </a:ext>
             <a:ext uri="{AF507438-7753-43e0-B8FC-AC1667EBCBE1}">
-              <a14:hiddenEffects xmlns:a14="http://schemas.microsoft.com/office/drawing/2010/main" xmlns="">
+              <a14:hiddenEffects xmlns="" xmlns:a14="http://schemas.microsoft.com/office/drawing/2010/main">
                 <a:effectLst>
                   <a:outerShdw blurRad="63500" dist="38099" dir="2700000" algn="ctr" rotWithShape="0">
                     <a:srgbClr val="000000">
@@ -609,7 +686,7 @@
               </a14:hiddenEffects>
             </a:ext>
             <a:ext uri="{53640926-AAD7-44d8-BBD7-CCE9431645EC}">
-              <a14:shadowObscured xmlns:a14="http://schemas.microsoft.com/office/drawing/2010/main" xmlns="" val="1"/>
+              <a14:shadowObscured xmlns="" xmlns:a14="http://schemas.microsoft.com/office/drawing/2010/main" val="1"/>
             </a:ext>
           </a:extLst>
         </p:spPr>
@@ -639,14 +716,14 @@
           <a:effectLst/>
           <a:extLst>
             <a:ext uri="{909E8E84-426E-40dd-AFC4-6F175D3DCCD1}">
-              <a14:hiddenFill xmlns:a14="http://schemas.microsoft.com/office/drawing/2010/main" xmlns="">
+              <a14:hiddenFill xmlns="" xmlns:a14="http://schemas.microsoft.com/office/drawing/2010/main">
                 <a:solidFill>
                   <a:schemeClr val="bg1"/>
                 </a:solidFill>
               </a14:hiddenFill>
             </a:ext>
             <a:ext uri="{91240B29-F687-4f45-9708-019B960494DF}">
-              <a14:hiddenLine xmlns:a14="http://schemas.microsoft.com/office/drawing/2010/main" xmlns="" w="12700">
+              <a14:hiddenLine xmlns="" xmlns:a14="http://schemas.microsoft.com/office/drawing/2010/main" w="12700">
                 <a:pattFill prst="narHorz">
                   <a:fgClr>
                     <a:schemeClr val="tx1"/>
@@ -661,7 +738,7 @@
               </a14:hiddenLine>
             </a:ext>
             <a:ext uri="{AF507438-7753-43e0-B8FC-AC1667EBCBE1}">
-              <a14:hiddenEffects xmlns:a14="http://schemas.microsoft.com/office/drawing/2010/main" xmlns="">
+              <a14:hiddenEffects xmlns="" xmlns:a14="http://schemas.microsoft.com/office/drawing/2010/main">
                 <a:effectLst>
                   <a:outerShdw dist="35921" dir="2700000" algn="ctr" rotWithShape="0">
                     <a:schemeClr val="bg2"/>
@@ -911,10 +988,10 @@
         <p:spPr>
           <a:extLst>
             <a:ext uri="{FAA26D3D-D897-4be2-8F04-BA451C77F1D7}">
-              <ma14:placeholderFlag xmlns:ma14="http://schemas.microsoft.com/office/mac/drawingml/2011/main" xmlns="" val="1"/>
+              <ma14:placeholderFlag xmlns="" xmlns:ma14="http://schemas.microsoft.com/office/mac/drawingml/2011/main" val="1"/>
             </a:ext>
             <a:ext uri="{AF507438-7753-43e0-B8FC-AC1667EBCBE1}">
-              <a14:hiddenEffects xmlns:a14="http://schemas.microsoft.com/office/drawing/2010/main" xmlns="">
+              <a14:hiddenEffects xmlns="" xmlns:a14="http://schemas.microsoft.com/office/drawing/2010/main">
                 <a:effectLst>
                   <a:outerShdw blurRad="63500" dist="38099" dir="2700000" algn="ctr" rotWithShape="0">
                     <a:schemeClr val="bg2">
@@ -6590,17 +6667,17 @@
           <a:effectLst/>
           <a:extLst>
             <a:ext uri="{FAA26D3D-D897-4be2-8F04-BA451C77F1D7}">
-              <ma14:placeholderFlag xmlns:ma14="http://schemas.microsoft.com/office/mac/drawingml/2011/main" xmlns="" val="1"/>
+              <ma14:placeholderFlag xmlns="" xmlns:ma14="http://schemas.microsoft.com/office/mac/drawingml/2011/main" val="1"/>
             </a:ext>
             <a:ext uri="{909E8E84-426E-40dd-AFC4-6F175D3DCCD1}">
-              <a14:hiddenFill xmlns:a14="http://schemas.microsoft.com/office/drawing/2010/main" xmlns="">
+              <a14:hiddenFill xmlns="" xmlns:a14="http://schemas.microsoft.com/office/drawing/2010/main">
                 <a:solidFill>
                   <a:schemeClr val="bg1"/>
                 </a:solidFill>
               </a14:hiddenFill>
             </a:ext>
             <a:ext uri="{91240B29-F687-4f45-9708-019B960494DF}">
-              <a14:hiddenLine xmlns:a14="http://schemas.microsoft.com/office/drawing/2010/main" xmlns="" w="12700">
+              <a14:hiddenLine xmlns="" xmlns:a14="http://schemas.microsoft.com/office/drawing/2010/main" w="12700">
                 <a:pattFill prst="narHorz">
                   <a:fgClr>
                     <a:schemeClr val="tx1"/>
@@ -6615,7 +6692,7 @@
               </a14:hiddenLine>
             </a:ext>
             <a:ext uri="{AF507438-7753-43e0-B8FC-AC1667EBCBE1}">
-              <a14:hiddenEffects xmlns:a14="http://schemas.microsoft.com/office/drawing/2010/main" xmlns="">
+              <a14:hiddenEffects xmlns="" xmlns:a14="http://schemas.microsoft.com/office/drawing/2010/main">
                 <a:effectLst>
                   <a:outerShdw blurRad="63500" dist="38099" dir="2700000" algn="ctr" rotWithShape="0">
                     <a:schemeClr val="bg2">
@@ -6668,17 +6745,17 @@
           <a:effectLst/>
           <a:extLst>
             <a:ext uri="{FAA26D3D-D897-4be2-8F04-BA451C77F1D7}">
-              <ma14:placeholderFlag xmlns:ma14="http://schemas.microsoft.com/office/mac/drawingml/2011/main" xmlns="" val="1"/>
+              <ma14:placeholderFlag xmlns="" xmlns:ma14="http://schemas.microsoft.com/office/mac/drawingml/2011/main" val="1"/>
             </a:ext>
             <a:ext uri="{909E8E84-426E-40dd-AFC4-6F175D3DCCD1}">
-              <a14:hiddenFill xmlns:a14="http://schemas.microsoft.com/office/drawing/2010/main" xmlns="">
+              <a14:hiddenFill xmlns="" xmlns:a14="http://schemas.microsoft.com/office/drawing/2010/main">
                 <a:solidFill>
                   <a:schemeClr val="bg1"/>
                 </a:solidFill>
               </a14:hiddenFill>
             </a:ext>
             <a:ext uri="{91240B29-F687-4f45-9708-019B960494DF}">
-              <a14:hiddenLine xmlns:a14="http://schemas.microsoft.com/office/drawing/2010/main" xmlns="" w="12700">
+              <a14:hiddenLine xmlns="" xmlns:a14="http://schemas.microsoft.com/office/drawing/2010/main" w="12700">
                 <a:pattFill prst="narHorz">
                   <a:fgClr>
                     <a:schemeClr val="tx1"/>
@@ -6693,7 +6770,7 @@
               </a14:hiddenLine>
             </a:ext>
             <a:ext uri="{AF507438-7753-43e0-B8FC-AC1667EBCBE1}">
-              <a14:hiddenEffects xmlns:a14="http://schemas.microsoft.com/office/drawing/2010/main" xmlns="">
+              <a14:hiddenEffects xmlns="" xmlns:a14="http://schemas.microsoft.com/office/drawing/2010/main">
                 <a:effectLst>
                   <a:outerShdw blurRad="63500" dist="38099" dir="2700000" algn="ctr" rotWithShape="0">
                     <a:schemeClr val="bg2">
@@ -6777,12 +6854,12 @@
           <a:effectLst/>
           <a:extLst>
             <a:ext uri="{909E8E84-426E-40dd-AFC4-6F175D3DCCD1}">
-              <a14:hiddenFill xmlns:a14="http://schemas.microsoft.com/office/drawing/2010/main" xmlns="">
+              <a14:hiddenFill xmlns="" xmlns:a14="http://schemas.microsoft.com/office/drawing/2010/main">
                 <a:noFill/>
               </a14:hiddenFill>
             </a:ext>
             <a:ext uri="{AF507438-7753-43e0-B8FC-AC1667EBCBE1}">
-              <a14:hiddenEffects xmlns:a14="http://schemas.microsoft.com/office/drawing/2010/main" xmlns="">
+              <a14:hiddenEffects xmlns="" xmlns:a14="http://schemas.microsoft.com/office/drawing/2010/main">
                 <a:effectLst>
                   <a:outerShdw blurRad="63500" dist="38099" dir="2700000" algn="ctr" rotWithShape="0">
                     <a:schemeClr val="bg2">
@@ -7602,6 +7679,57 @@
           </a:p>
         </p:txBody>
       </p:sp>
+      <mc:AlternateContent xmlns:mc="http://schemas.openxmlformats.org/markup-compatibility/2006" xmlns:p14="http://schemas.microsoft.com/office/powerpoint/2010/main">
+        <mc:Choice Requires="p14">
+          <p:contentPart p14:bwMode="auto" r:id="rId3">
+            <p14:nvContentPartPr>
+              <p14:cNvPr id="3" name="Ink 2">
+                <a:extLst>
+                  <a:ext uri="{FF2B5EF4-FFF2-40B4-BE49-F238E27FC236}">
+                    <a16:creationId xmlns:a16="http://schemas.microsoft.com/office/drawing/2014/main" id="{1294465E-E132-4297-9C9F-E7AD5A1C6767}"/>
+                  </a:ext>
+                </a:extLst>
+              </p14:cNvPr>
+              <p14:cNvContentPartPr/>
+              <p14:nvPr/>
+            </p14:nvContentPartPr>
+            <p14:xfrm>
+              <a:off x="10251582" y="3929843"/>
+              <a:ext cx="360" cy="360"/>
+            </p14:xfrm>
+          </p:contentPart>
+        </mc:Choice>
+        <mc:Fallback xmlns="">
+          <p:pic>
+            <p:nvPicPr>
+              <p:cNvPr id="3" name="Ink 2">
+                <a:extLst>
+                  <a:ext uri="{FF2B5EF4-FFF2-40B4-BE49-F238E27FC236}">
+                    <a16:creationId xmlns:a16="http://schemas.microsoft.com/office/drawing/2014/main" id="{1294465E-E132-4297-9C9F-E7AD5A1C6767}"/>
+                  </a:ext>
+                </a:extLst>
+              </p:cNvPr>
+              <p:cNvPicPr/>
+              <p:nvPr/>
+            </p:nvPicPr>
+            <p:blipFill>
+              <a:blip r:embed="rId4"/>
+              <a:stretch>
+                <a:fillRect/>
+              </a:stretch>
+            </p:blipFill>
+            <p:spPr>
+              <a:xfrm>
+                <a:off x="10242942" y="3921203"/>
+                <a:ext cx="18000" cy="18000"/>
+              </a:xfrm>
+              <a:prstGeom prst="rect">
+                <a:avLst/>
+              </a:prstGeom>
+            </p:spPr>
+          </p:pic>
+        </mc:Fallback>
+      </mc:AlternateContent>
     </p:spTree>
   </p:cSld>
   <p:clrMapOvr>
@@ -7759,17 +7887,17 @@
           <a:effectLst/>
           <a:extLst>
             <a:ext uri="{FAA26D3D-D897-4be2-8F04-BA451C77F1D7}">
-              <ma14:placeholderFlag xmlns:ma14="http://schemas.microsoft.com/office/mac/drawingml/2011/main" xmlns="" val="1"/>
+              <ma14:placeholderFlag xmlns="" xmlns:ma14="http://schemas.microsoft.com/office/mac/drawingml/2011/main" val="1"/>
             </a:ext>
             <a:ext uri="{909E8E84-426E-40dd-AFC4-6F175D3DCCD1}">
-              <a14:hiddenFill xmlns:a14="http://schemas.microsoft.com/office/drawing/2010/main" xmlns="">
+              <a14:hiddenFill xmlns="" xmlns:a14="http://schemas.microsoft.com/office/drawing/2010/main">
                 <a:solidFill>
                   <a:schemeClr val="bg1"/>
                 </a:solidFill>
               </a14:hiddenFill>
             </a:ext>
             <a:ext uri="{91240B29-F687-4f45-9708-019B960494DF}">
-              <a14:hiddenLine xmlns:a14="http://schemas.microsoft.com/office/drawing/2010/main" xmlns="" w="12700">
+              <a14:hiddenLine xmlns="" xmlns:a14="http://schemas.microsoft.com/office/drawing/2010/main" w="12700">
                 <a:pattFill prst="narHorz">
                   <a:fgClr>
                     <a:schemeClr val="tx1"/>
@@ -7784,7 +7912,7 @@
               </a14:hiddenLine>
             </a:ext>
             <a:ext uri="{AF507438-7753-43e0-B8FC-AC1667EBCBE1}">
-              <a14:hiddenEffects xmlns:a14="http://schemas.microsoft.com/office/drawing/2010/main" xmlns="">
+              <a14:hiddenEffects xmlns="" xmlns:a14="http://schemas.microsoft.com/office/drawing/2010/main">
                 <a:effectLst>
                   <a:outerShdw blurRad="63500" dist="38099" dir="2700000" algn="ctr" rotWithShape="0">
                     <a:schemeClr val="bg2">
@@ -8112,17 +8240,17 @@
           <a:effectLst/>
           <a:extLst>
             <a:ext uri="{FAA26D3D-D897-4be2-8F04-BA451C77F1D7}">
-              <ma14:placeholderFlag xmlns:ma14="http://schemas.microsoft.com/office/mac/drawingml/2011/main" xmlns="" val="1"/>
+              <ma14:placeholderFlag xmlns="" xmlns:ma14="http://schemas.microsoft.com/office/mac/drawingml/2011/main" val="1"/>
             </a:ext>
             <a:ext uri="{909E8E84-426E-40dd-AFC4-6F175D3DCCD1}">
-              <a14:hiddenFill xmlns:a14="http://schemas.microsoft.com/office/drawing/2010/main" xmlns="">
+              <a14:hiddenFill xmlns="" xmlns:a14="http://schemas.microsoft.com/office/drawing/2010/main">
                 <a:solidFill>
                   <a:schemeClr val="bg1"/>
                 </a:solidFill>
               </a14:hiddenFill>
             </a:ext>
             <a:ext uri="{91240B29-F687-4f45-9708-019B960494DF}">
-              <a14:hiddenLine xmlns:a14="http://schemas.microsoft.com/office/drawing/2010/main" xmlns="" w="12700">
+              <a14:hiddenLine xmlns="" xmlns:a14="http://schemas.microsoft.com/office/drawing/2010/main" w="12700">
                 <a:pattFill prst="narHorz">
                   <a:fgClr>
                     <a:schemeClr val="tx1"/>
@@ -8137,7 +8265,7 @@
               </a14:hiddenLine>
             </a:ext>
             <a:ext uri="{AF507438-7753-43e0-B8FC-AC1667EBCBE1}">
-              <a14:hiddenEffects xmlns:a14="http://schemas.microsoft.com/office/drawing/2010/main" xmlns="">
+              <a14:hiddenEffects xmlns="" xmlns:a14="http://schemas.microsoft.com/office/drawing/2010/main">
                 <a:effectLst>
                   <a:outerShdw blurRad="63500" dist="38099" dir="2700000" algn="ctr" rotWithShape="0">
                     <a:schemeClr val="bg2">
@@ -8463,17 +8591,17 @@
           <a:effectLst/>
           <a:extLst>
             <a:ext uri="{FAA26D3D-D897-4be2-8F04-BA451C77F1D7}">
-              <ma14:placeholderFlag xmlns:ma14="http://schemas.microsoft.com/office/mac/drawingml/2011/main" xmlns="" val="1"/>
+              <ma14:placeholderFlag xmlns="" xmlns:ma14="http://schemas.microsoft.com/office/mac/drawingml/2011/main" val="1"/>
             </a:ext>
             <a:ext uri="{909E8E84-426E-40dd-AFC4-6F175D3DCCD1}">
-              <a14:hiddenFill xmlns:a14="http://schemas.microsoft.com/office/drawing/2010/main" xmlns="">
+              <a14:hiddenFill xmlns="" xmlns:a14="http://schemas.microsoft.com/office/drawing/2010/main">
                 <a:solidFill>
                   <a:schemeClr val="bg1"/>
                 </a:solidFill>
               </a14:hiddenFill>
             </a:ext>
             <a:ext uri="{91240B29-F687-4f45-9708-019B960494DF}">
-              <a14:hiddenLine xmlns:a14="http://schemas.microsoft.com/office/drawing/2010/main" xmlns="" w="12700">
+              <a14:hiddenLine xmlns="" xmlns:a14="http://schemas.microsoft.com/office/drawing/2010/main" w="12700">
                 <a:pattFill prst="narHorz">
                   <a:fgClr>
                     <a:schemeClr val="tx1"/>
@@ -8488,7 +8616,7 @@
               </a14:hiddenLine>
             </a:ext>
             <a:ext uri="{AF507438-7753-43e0-B8FC-AC1667EBCBE1}">
-              <a14:hiddenEffects xmlns:a14="http://schemas.microsoft.com/office/drawing/2010/main" xmlns="">
+              <a14:hiddenEffects xmlns="" xmlns:a14="http://schemas.microsoft.com/office/drawing/2010/main">
                 <a:effectLst>
                   <a:outerShdw blurRad="63500" dist="38099" dir="2700000" algn="ctr" rotWithShape="0">
                     <a:schemeClr val="bg2">
@@ -8821,17 +8949,17 @@
           <a:effectLst/>
           <a:extLst>
             <a:ext uri="{FAA26D3D-D897-4be2-8F04-BA451C77F1D7}">
-              <ma14:placeholderFlag xmlns:ma14="http://schemas.microsoft.com/office/mac/drawingml/2011/main" xmlns="" val="1"/>
+              <ma14:placeholderFlag xmlns="" xmlns:ma14="http://schemas.microsoft.com/office/mac/drawingml/2011/main" val="1"/>
             </a:ext>
             <a:ext uri="{909E8E84-426E-40dd-AFC4-6F175D3DCCD1}">
-              <a14:hiddenFill xmlns:a14="http://schemas.microsoft.com/office/drawing/2010/main" xmlns="">
+              <a14:hiddenFill xmlns="" xmlns:a14="http://schemas.microsoft.com/office/drawing/2010/main">
                 <a:solidFill>
                   <a:schemeClr val="bg1"/>
                 </a:solidFill>
               </a14:hiddenFill>
             </a:ext>
             <a:ext uri="{91240B29-F687-4f45-9708-019B960494DF}">
-              <a14:hiddenLine xmlns:a14="http://schemas.microsoft.com/office/drawing/2010/main" xmlns="" w="12700">
+              <a14:hiddenLine xmlns="" xmlns:a14="http://schemas.microsoft.com/office/drawing/2010/main" w="12700">
                 <a:pattFill prst="narHorz">
                   <a:fgClr>
                     <a:schemeClr val="tx1"/>
@@ -8846,7 +8974,7 @@
               </a14:hiddenLine>
             </a:ext>
             <a:ext uri="{AF507438-7753-43e0-B8FC-AC1667EBCBE1}">
-              <a14:hiddenEffects xmlns:a14="http://schemas.microsoft.com/office/drawing/2010/main" xmlns="">
+              <a14:hiddenEffects xmlns="" xmlns:a14="http://schemas.microsoft.com/office/drawing/2010/main">
                 <a:effectLst>
                   <a:outerShdw blurRad="63500" dist="38099" dir="2700000" algn="ctr" rotWithShape="0">
                     <a:schemeClr val="bg2">
@@ -9174,17 +9302,17 @@
           <a:effectLst/>
           <a:extLst>
             <a:ext uri="{FAA26D3D-D897-4be2-8F04-BA451C77F1D7}">
-              <ma14:placeholderFlag xmlns:ma14="http://schemas.microsoft.com/office/mac/drawingml/2011/main" xmlns="" val="1"/>
+              <ma14:placeholderFlag xmlns="" xmlns:ma14="http://schemas.microsoft.com/office/mac/drawingml/2011/main" val="1"/>
             </a:ext>
             <a:ext uri="{909E8E84-426E-40dd-AFC4-6F175D3DCCD1}">
-              <a14:hiddenFill xmlns:a14="http://schemas.microsoft.com/office/drawing/2010/main" xmlns="">
+              <a14:hiddenFill xmlns="" xmlns:a14="http://schemas.microsoft.com/office/drawing/2010/main">
                 <a:solidFill>
                   <a:schemeClr val="bg1"/>
                 </a:solidFill>
               </a14:hiddenFill>
             </a:ext>
             <a:ext uri="{91240B29-F687-4f45-9708-019B960494DF}">
-              <a14:hiddenLine xmlns:a14="http://schemas.microsoft.com/office/drawing/2010/main" xmlns="" w="12700">
+              <a14:hiddenLine xmlns="" xmlns:a14="http://schemas.microsoft.com/office/drawing/2010/main" w="12700">
                 <a:pattFill prst="narHorz">
                   <a:fgClr>
                     <a:schemeClr val="tx1"/>
@@ -9199,7 +9327,7 @@
               </a14:hiddenLine>
             </a:ext>
             <a:ext uri="{AF507438-7753-43e0-B8FC-AC1667EBCBE1}">
-              <a14:hiddenEffects xmlns:a14="http://schemas.microsoft.com/office/drawing/2010/main" xmlns="">
+              <a14:hiddenEffects xmlns="" xmlns:a14="http://schemas.microsoft.com/office/drawing/2010/main">
                 <a:effectLst>
                   <a:outerShdw blurRad="63500" dist="38099" dir="2700000" algn="ctr" rotWithShape="0">
                     <a:schemeClr val="bg2">
@@ -9525,17 +9653,17 @@
           <a:effectLst/>
           <a:extLst>
             <a:ext uri="{FAA26D3D-D897-4be2-8F04-BA451C77F1D7}">
-              <ma14:placeholderFlag xmlns:ma14="http://schemas.microsoft.com/office/mac/drawingml/2011/main" xmlns="" val="1"/>
+              <ma14:placeholderFlag xmlns="" xmlns:ma14="http://schemas.microsoft.com/office/mac/drawingml/2011/main" val="1"/>
             </a:ext>
             <a:ext uri="{909E8E84-426E-40dd-AFC4-6F175D3DCCD1}">
-              <a14:hiddenFill xmlns:a14="http://schemas.microsoft.com/office/drawing/2010/main" xmlns="">
+              <a14:hiddenFill xmlns="" xmlns:a14="http://schemas.microsoft.com/office/drawing/2010/main">
                 <a:solidFill>
                   <a:schemeClr val="bg1"/>
                 </a:solidFill>
               </a14:hiddenFill>
             </a:ext>
             <a:ext uri="{91240B29-F687-4f45-9708-019B960494DF}">
-              <a14:hiddenLine xmlns:a14="http://schemas.microsoft.com/office/drawing/2010/main" xmlns="" w="12700">
+              <a14:hiddenLine xmlns="" xmlns:a14="http://schemas.microsoft.com/office/drawing/2010/main" w="12700">
                 <a:pattFill prst="narHorz">
                   <a:fgClr>
                     <a:schemeClr val="tx1"/>
@@ -9550,7 +9678,7 @@
               </a14:hiddenLine>
             </a:ext>
             <a:ext uri="{AF507438-7753-43e0-B8FC-AC1667EBCBE1}">
-              <a14:hiddenEffects xmlns:a14="http://schemas.microsoft.com/office/drawing/2010/main" xmlns="">
+              <a14:hiddenEffects xmlns="" xmlns:a14="http://schemas.microsoft.com/office/drawing/2010/main">
                 <a:effectLst>
                   <a:outerShdw blurRad="63500" dist="38099" dir="2700000" algn="ctr" rotWithShape="0">
                     <a:schemeClr val="bg2">
@@ -10671,17 +10799,17 @@
           <a:effectLst/>
           <a:extLst>
             <a:ext uri="{FAA26D3D-D897-4be2-8F04-BA451C77F1D7}">
-              <ma14:placeholderFlag xmlns:ma14="http://schemas.microsoft.com/office/mac/drawingml/2011/main" xmlns="" val="1"/>
+              <ma14:placeholderFlag xmlns="" xmlns:ma14="http://schemas.microsoft.com/office/mac/drawingml/2011/main" val="1"/>
             </a:ext>
             <a:ext uri="{909E8E84-426E-40dd-AFC4-6F175D3DCCD1}">
-              <a14:hiddenFill xmlns:a14="http://schemas.microsoft.com/office/drawing/2010/main" xmlns="">
+              <a14:hiddenFill xmlns="" xmlns:a14="http://schemas.microsoft.com/office/drawing/2010/main">
                 <a:solidFill>
                   <a:schemeClr val="bg1"/>
                 </a:solidFill>
               </a14:hiddenFill>
             </a:ext>
             <a:ext uri="{91240B29-F687-4f45-9708-019B960494DF}">
-              <a14:hiddenLine xmlns:a14="http://schemas.microsoft.com/office/drawing/2010/main" xmlns="" w="12700">
+              <a14:hiddenLine xmlns="" xmlns:a14="http://schemas.microsoft.com/office/drawing/2010/main" w="12700">
                 <a:pattFill prst="narHorz">
                   <a:fgClr>
                     <a:schemeClr val="tx1"/>
@@ -10696,7 +10824,7 @@
               </a14:hiddenLine>
             </a:ext>
             <a:ext uri="{AF507438-7753-43e0-B8FC-AC1667EBCBE1}">
-              <a14:hiddenEffects xmlns:a14="http://schemas.microsoft.com/office/drawing/2010/main" xmlns="">
+              <a14:hiddenEffects xmlns="" xmlns:a14="http://schemas.microsoft.com/office/drawing/2010/main">
                 <a:effectLst>
                   <a:outerShdw blurRad="63500" dist="38099" dir="2700000" algn="ctr" rotWithShape="0">
                     <a:schemeClr val="bg2">
@@ -11045,17 +11173,17 @@
           <a:effectLst/>
           <a:extLst>
             <a:ext uri="{FAA26D3D-D897-4be2-8F04-BA451C77F1D7}">
-              <ma14:placeholderFlag xmlns:ma14="http://schemas.microsoft.com/office/mac/drawingml/2011/main" xmlns="" val="1"/>
+              <ma14:placeholderFlag xmlns="" xmlns:ma14="http://schemas.microsoft.com/office/mac/drawingml/2011/main" val="1"/>
             </a:ext>
             <a:ext uri="{909E8E84-426E-40dd-AFC4-6F175D3DCCD1}">
-              <a14:hiddenFill xmlns:a14="http://schemas.microsoft.com/office/drawing/2010/main" xmlns="">
+              <a14:hiddenFill xmlns="" xmlns:a14="http://schemas.microsoft.com/office/drawing/2010/main">
                 <a:solidFill>
                   <a:schemeClr val="bg1"/>
                 </a:solidFill>
               </a14:hiddenFill>
             </a:ext>
             <a:ext uri="{91240B29-F687-4f45-9708-019B960494DF}">
-              <a14:hiddenLine xmlns:a14="http://schemas.microsoft.com/office/drawing/2010/main" xmlns="" w="12700">
+              <a14:hiddenLine xmlns="" xmlns:a14="http://schemas.microsoft.com/office/drawing/2010/main" w="12700">
                 <a:pattFill prst="narHorz">
                   <a:fgClr>
                     <a:schemeClr val="tx1"/>
@@ -11070,7 +11198,7 @@
               </a14:hiddenLine>
             </a:ext>
             <a:ext uri="{AF507438-7753-43e0-B8FC-AC1667EBCBE1}">
-              <a14:hiddenEffects xmlns:a14="http://schemas.microsoft.com/office/drawing/2010/main" xmlns="">
+              <a14:hiddenEffects xmlns="" xmlns:a14="http://schemas.microsoft.com/office/drawing/2010/main">
                 <a:effectLst>
                   <a:outerShdw blurRad="63500" dist="38099" dir="2700000" algn="ctr" rotWithShape="0">
                     <a:schemeClr val="bg2">
@@ -11409,17 +11537,17 @@
           <a:effectLst/>
           <a:extLst>
             <a:ext uri="{FAA26D3D-D897-4be2-8F04-BA451C77F1D7}">
-              <ma14:placeholderFlag xmlns:ma14="http://schemas.microsoft.com/office/mac/drawingml/2011/main" xmlns="" val="1"/>
+              <ma14:placeholderFlag xmlns="" xmlns:ma14="http://schemas.microsoft.com/office/mac/drawingml/2011/main" val="1"/>
             </a:ext>
             <a:ext uri="{909E8E84-426E-40dd-AFC4-6F175D3DCCD1}">
-              <a14:hiddenFill xmlns:a14="http://schemas.microsoft.com/office/drawing/2010/main" xmlns="">
+              <a14:hiddenFill xmlns="" xmlns:a14="http://schemas.microsoft.com/office/drawing/2010/main">
                 <a:solidFill>
                   <a:schemeClr val="bg1"/>
                 </a:solidFill>
               </a14:hiddenFill>
             </a:ext>
             <a:ext uri="{91240B29-F687-4f45-9708-019B960494DF}">
-              <a14:hiddenLine xmlns:a14="http://schemas.microsoft.com/office/drawing/2010/main" xmlns="" w="12700">
+              <a14:hiddenLine xmlns="" xmlns:a14="http://schemas.microsoft.com/office/drawing/2010/main" w="12700">
                 <a:pattFill prst="narHorz">
                   <a:fgClr>
                     <a:schemeClr val="tx1"/>
@@ -11434,7 +11562,7 @@
               </a14:hiddenLine>
             </a:ext>
             <a:ext uri="{AF507438-7753-43e0-B8FC-AC1667EBCBE1}">
-              <a14:hiddenEffects xmlns:a14="http://schemas.microsoft.com/office/drawing/2010/main" xmlns="">
+              <a14:hiddenEffects xmlns="" xmlns:a14="http://schemas.microsoft.com/office/drawing/2010/main">
                 <a:effectLst>
                   <a:outerShdw blurRad="63500" dist="38099" dir="2700000" algn="ctr" rotWithShape="0">
                     <a:schemeClr val="bg2">
@@ -11710,17 +11838,17 @@
           <a:effectLst/>
           <a:extLst>
             <a:ext uri="{FAA26D3D-D897-4be2-8F04-BA451C77F1D7}">
-              <ma14:placeholderFlag xmlns:ma14="http://schemas.microsoft.com/office/mac/drawingml/2011/main" xmlns="" val="1"/>
+              <ma14:placeholderFlag xmlns="" xmlns:ma14="http://schemas.microsoft.com/office/mac/drawingml/2011/main" val="1"/>
             </a:ext>
             <a:ext uri="{909E8E84-426E-40dd-AFC4-6F175D3DCCD1}">
-              <a14:hiddenFill xmlns:a14="http://schemas.microsoft.com/office/drawing/2010/main" xmlns="">
+              <a14:hiddenFill xmlns="" xmlns:a14="http://schemas.microsoft.com/office/drawing/2010/main">
                 <a:solidFill>
                   <a:schemeClr val="bg1"/>
                 </a:solidFill>
               </a14:hiddenFill>
             </a:ext>
             <a:ext uri="{91240B29-F687-4f45-9708-019B960494DF}">
-              <a14:hiddenLine xmlns:a14="http://schemas.microsoft.com/office/drawing/2010/main" xmlns="" w="12700">
+              <a14:hiddenLine xmlns="" xmlns:a14="http://schemas.microsoft.com/office/drawing/2010/main" w="12700">
                 <a:pattFill prst="narHorz">
                   <a:fgClr>
                     <a:schemeClr val="tx1"/>
@@ -11735,7 +11863,7 @@
               </a14:hiddenLine>
             </a:ext>
             <a:ext uri="{AF507438-7753-43e0-B8FC-AC1667EBCBE1}">
-              <a14:hiddenEffects xmlns:a14="http://schemas.microsoft.com/office/drawing/2010/main" xmlns="">
+              <a14:hiddenEffects xmlns="" xmlns:a14="http://schemas.microsoft.com/office/drawing/2010/main">
                 <a:effectLst>
                   <a:outerShdw blurRad="63500" dist="38099" dir="2700000" algn="ctr" rotWithShape="0">
                     <a:schemeClr val="bg2">
@@ -13849,17 +13977,17 @@
           <a:effectLst/>
           <a:extLst>
             <a:ext uri="{FAA26D3D-D897-4be2-8F04-BA451C77F1D7}">
-              <ma14:placeholderFlag xmlns:ma14="http://schemas.microsoft.com/office/mac/drawingml/2011/main" xmlns="" val="1"/>
+              <ma14:placeholderFlag xmlns="" xmlns:ma14="http://schemas.microsoft.com/office/mac/drawingml/2011/main" val="1"/>
             </a:ext>
             <a:ext uri="{909E8E84-426E-40dd-AFC4-6F175D3DCCD1}">
-              <a14:hiddenFill xmlns:a14="http://schemas.microsoft.com/office/drawing/2010/main" xmlns="">
+              <a14:hiddenFill xmlns="" xmlns:a14="http://schemas.microsoft.com/office/drawing/2010/main">
                 <a:solidFill>
                   <a:schemeClr val="bg1"/>
                 </a:solidFill>
               </a14:hiddenFill>
             </a:ext>
             <a:ext uri="{91240B29-F687-4f45-9708-019B960494DF}">
-              <a14:hiddenLine xmlns:a14="http://schemas.microsoft.com/office/drawing/2010/main" xmlns="" w="12700">
+              <a14:hiddenLine xmlns="" xmlns:a14="http://schemas.microsoft.com/office/drawing/2010/main" w="12700">
                 <a:pattFill prst="narHorz">
                   <a:fgClr>
                     <a:schemeClr val="tx1"/>
@@ -13874,7 +14002,7 @@
               </a14:hiddenLine>
             </a:ext>
             <a:ext uri="{AF507438-7753-43e0-B8FC-AC1667EBCBE1}">
-              <a14:hiddenEffects xmlns:a14="http://schemas.microsoft.com/office/drawing/2010/main" xmlns="">
+              <a14:hiddenEffects xmlns="" xmlns:a14="http://schemas.microsoft.com/office/drawing/2010/main">
                 <a:effectLst>
                   <a:outerShdw blurRad="63500" dist="38099" dir="2700000" algn="ctr" rotWithShape="0">
                     <a:schemeClr val="bg2">
@@ -14230,17 +14358,17 @@
           <a:effectLst/>
           <a:extLst>
             <a:ext uri="{FAA26D3D-D897-4be2-8F04-BA451C77F1D7}">
-              <ma14:placeholderFlag xmlns:ma14="http://schemas.microsoft.com/office/mac/drawingml/2011/main" xmlns="" val="1"/>
+              <ma14:placeholderFlag xmlns="" xmlns:ma14="http://schemas.microsoft.com/office/mac/drawingml/2011/main" val="1"/>
             </a:ext>
             <a:ext uri="{909E8E84-426E-40dd-AFC4-6F175D3DCCD1}">
-              <a14:hiddenFill xmlns:a14="http://schemas.microsoft.com/office/drawing/2010/main" xmlns="">
+              <a14:hiddenFill xmlns="" xmlns:a14="http://schemas.microsoft.com/office/drawing/2010/main">
                 <a:solidFill>
                   <a:schemeClr val="bg1"/>
                 </a:solidFill>
               </a14:hiddenFill>
             </a:ext>
             <a:ext uri="{91240B29-F687-4f45-9708-019B960494DF}">
-              <a14:hiddenLine xmlns:a14="http://schemas.microsoft.com/office/drawing/2010/main" xmlns="" w="12700">
+              <a14:hiddenLine xmlns="" xmlns:a14="http://schemas.microsoft.com/office/drawing/2010/main" w="12700">
                 <a:pattFill prst="narHorz">
                   <a:fgClr>
                     <a:schemeClr val="tx1"/>
@@ -14255,7 +14383,7 @@
               </a14:hiddenLine>
             </a:ext>
             <a:ext uri="{AF507438-7753-43e0-B8FC-AC1667EBCBE1}">
-              <a14:hiddenEffects xmlns:a14="http://schemas.microsoft.com/office/drawing/2010/main" xmlns="">
+              <a14:hiddenEffects xmlns="" xmlns:a14="http://schemas.microsoft.com/office/drawing/2010/main">
                 <a:effectLst>
                   <a:outerShdw blurRad="63500" dist="38099" dir="2700000" algn="ctr" rotWithShape="0">
                     <a:schemeClr val="bg2">
@@ -14531,17 +14659,17 @@
           <a:effectLst/>
           <a:extLst>
             <a:ext uri="{FAA26D3D-D897-4be2-8F04-BA451C77F1D7}">
-              <ma14:placeholderFlag xmlns:ma14="http://schemas.microsoft.com/office/mac/drawingml/2011/main" xmlns="" val="1"/>
+              <ma14:placeholderFlag xmlns="" xmlns:ma14="http://schemas.microsoft.com/office/mac/drawingml/2011/main" val="1"/>
             </a:ext>
             <a:ext uri="{909E8E84-426E-40dd-AFC4-6F175D3DCCD1}">
-              <a14:hiddenFill xmlns:a14="http://schemas.microsoft.com/office/drawing/2010/main" xmlns="">
+              <a14:hiddenFill xmlns="" xmlns:a14="http://schemas.microsoft.com/office/drawing/2010/main">
                 <a:solidFill>
                   <a:schemeClr val="bg1"/>
                 </a:solidFill>
               </a14:hiddenFill>
             </a:ext>
             <a:ext uri="{91240B29-F687-4f45-9708-019B960494DF}">
-              <a14:hiddenLine xmlns:a14="http://schemas.microsoft.com/office/drawing/2010/main" xmlns="" w="12700">
+              <a14:hiddenLine xmlns="" xmlns:a14="http://schemas.microsoft.com/office/drawing/2010/main" w="12700">
                 <a:pattFill prst="narHorz">
                   <a:fgClr>
                     <a:schemeClr val="tx1"/>
@@ -14556,7 +14684,7 @@
               </a14:hiddenLine>
             </a:ext>
             <a:ext uri="{AF507438-7753-43e0-B8FC-AC1667EBCBE1}">
-              <a14:hiddenEffects xmlns:a14="http://schemas.microsoft.com/office/drawing/2010/main" xmlns="">
+              <a14:hiddenEffects xmlns="" xmlns:a14="http://schemas.microsoft.com/office/drawing/2010/main">
                 <a:effectLst>
                   <a:outerShdw blurRad="63500" dist="38099" dir="2700000" algn="ctr" rotWithShape="0">
                     <a:schemeClr val="bg2">
@@ -15028,12 +15156,12 @@
         <p:spPr>
           <a:xfrm>
             <a:off x="152400" y="914400"/>
-            <a:ext cx="8077200" cy="5334000"/>
+            <a:ext cx="8077200" cy="5486400"/>
           </a:xfrm>
         </p:spPr>
         <p:txBody>
           <a:bodyPr>
-            <a:normAutofit fontScale="62500" lnSpcReduction="20000"/>
+            <a:normAutofit fontScale="55000" lnSpcReduction="20000"/>
           </a:bodyPr>
           <a:lstStyle/>
           <a:p>
@@ -15090,7 +15218,7 @@
           <a:p>
             <a:r>
               <a:rPr lang="en-GB" dirty="0"/>
-              <a:t>Bounded Waiting (Starvation-Free): Not satisfied. A thread may be indefinitely delayed if the other repeatedly sets its flag and does not allow alternation via the turn variable, i.e., one thread can repeatedly enter the CS and starve the other thread.</a:t>
+              <a:t>Bounded Waiting (Starvation-Free): Not satisfied. A thread may be indefinitely delayed if the other repeatedly sets its flag and does not allow alternation via the turn variable, i.e., one thread can repeatedly enter the CS and starve the other thread, which will spin-wait at the while() loop forever.</a:t>
             </a:r>
           </a:p>
           <a:p>
@@ -16617,157 +16745,6 @@
       </p:grpSpPr>
       <p:sp>
         <p:nvSpPr>
-          <p:cNvPr id="2" name="Title 1">
-            <a:extLst>
-              <a:ext uri="{FF2B5EF4-FFF2-40B4-BE49-F238E27FC236}">
-                <a16:creationId xmlns:a16="http://schemas.microsoft.com/office/drawing/2014/main" id="{50107551-AA94-1C8A-669D-DC4DE44EEEA7}"/>
-              </a:ext>
-            </a:extLst>
-          </p:cNvPr>
-          <p:cNvSpPr>
-            <a:spLocks noGrp="1"/>
-          </p:cNvSpPr>
-          <p:nvPr>
-            <p:ph type="title"/>
-          </p:nvPr>
-        </p:nvSpPr>
-        <p:spPr/>
-        <p:txBody>
-          <a:bodyPr/>
-          <a:lstStyle/>
-          <a:p>
-            <a:r>
-              <a:rPr lang="en-US" altLang="zh-CN" dirty="0"/>
-              <a:t>Why Peterson’s Algorithm Is Not Used in Practice</a:t>
-            </a:r>
-            <a:endParaRPr lang="zh-CN" altLang="en-US" dirty="0"/>
-          </a:p>
-        </p:txBody>
-      </p:sp>
-      <p:sp>
-        <p:nvSpPr>
-          <p:cNvPr id="3" name="Content Placeholder 2">
-            <a:extLst>
-              <a:ext uri="{FF2B5EF4-FFF2-40B4-BE49-F238E27FC236}">
-                <a16:creationId xmlns:a16="http://schemas.microsoft.com/office/drawing/2014/main" id="{128557BA-09BE-CB4A-E18F-0E723F1B78B2}"/>
-              </a:ext>
-            </a:extLst>
-          </p:cNvPr>
-          <p:cNvSpPr>
-            <a:spLocks noGrp="1"/>
-          </p:cNvSpPr>
-          <p:nvPr>
-            <p:ph idx="1"/>
-          </p:nvPr>
-        </p:nvSpPr>
-        <p:spPr/>
-        <p:txBody>
-          <a:bodyPr>
-            <a:normAutofit fontScale="77500" lnSpcReduction="20000"/>
-          </a:bodyPr>
-          <a:lstStyle/>
-          <a:p>
-            <a:r>
-              <a:rPr lang="zh-CN" altLang="zh-CN" b="1" dirty="0"/>
-              <a:t>Peterson’s algorithm is a proof-of-concept, not a production lock.</a:t>
-            </a:r>
-            <a:endParaRPr lang="zh-CN" altLang="zh-CN" dirty="0"/>
-          </a:p>
-          <a:p>
-            <a:pPr lvl="0"/>
-            <a:r>
-              <a:rPr lang="zh-CN" altLang="zh-CN" b="1" dirty="0"/>
-              <a:t>Only supports two threads.</a:t>
-            </a:r>
-            <a:r>
-              <a:rPr lang="zh-CN" altLang="zh-CN" dirty="0"/>
-              <a:t> Extending it to many threads is complicated and inefficient; real programs may have dozens or thousands of threads.</a:t>
-            </a:r>
-          </a:p>
-          <a:p>
-            <a:pPr lvl="0"/>
-            <a:r>
-              <a:rPr lang="zh-CN" altLang="zh-CN" b="1" dirty="0"/>
-              <a:t>Busy waiting wastes CPU.</a:t>
-            </a:r>
-            <a:r>
-              <a:rPr lang="zh-CN" altLang="zh-CN" dirty="0"/>
-              <a:t> A waiting thread repeatedly executes a while loop, consuming processor cycles instead of sleeping and allowing useful work to run.</a:t>
-            </a:r>
-          </a:p>
-          <a:p>
-            <a:pPr lvl="0"/>
-            <a:r>
-              <a:rPr lang="zh-CN" altLang="zh-CN" b="1" dirty="0"/>
-              <a:t>Assumes a simple memory model.</a:t>
-            </a:r>
-            <a:r>
-              <a:rPr lang="zh-CN" altLang="zh-CN" dirty="0"/>
-              <a:t> Its correctness assumes that reads and writes occur in the order written by the program. Modern CPUs and optimizing compilers may reorder or delay memory operations unless explicit memory barriers/atomic operations are used.</a:t>
-            </a:r>
-          </a:p>
-          <a:p>
-            <a:pPr lvl="0"/>
-            <a:r>
-              <a:rPr lang="zh-CN" altLang="zh-CN" b="1" dirty="0"/>
-              <a:t>Poor scalability and cache contention.</a:t>
-            </a:r>
-            <a:r>
-              <a:rPr lang="zh-CN" altLang="zh-CN" dirty="0"/>
-              <a:t> Threads continuously read/write shared flag[] and turn variables, causing cache-coherence traffic as core count rises.</a:t>
-            </a:r>
-          </a:p>
-          <a:p>
-            <a:pPr lvl="0"/>
-            <a:r>
-              <a:rPr lang="zh-CN" altLang="zh-CN" b="1" dirty="0"/>
-              <a:t>Better OS/hardware-supported alternatives exist.</a:t>
-            </a:r>
-            <a:r>
-              <a:rPr lang="zh-CN" altLang="zh-CN" dirty="0"/>
-              <a:t> Production code uses atomic instructions plus mutexes, semaphores, condition variables, spinlock</a:t>
-            </a:r>
-            <a:r>
-              <a:rPr lang="zh-CN" altLang="zh-CN"/>
-              <a:t>s.</a:t>
-            </a:r>
-            <a:endParaRPr lang="zh-CN" altLang="zh-CN" dirty="0"/>
-          </a:p>
-        </p:txBody>
-      </p:sp>
-    </p:spTree>
-    <p:extLst>
-      <p:ext uri="{BB962C8B-B14F-4D97-AF65-F5344CB8AC3E}">
-        <p14:creationId xmlns:p14="http://schemas.microsoft.com/office/powerpoint/2010/main" val="2297062265"/>
-      </p:ext>
-    </p:extLst>
-  </p:cSld>
-  <p:clrMapOvr>
-    <a:masterClrMapping/>
-  </p:clrMapOvr>
-  <p:transition/>
-</p:sld>
-</file>
-
-<file path=ppt/slides/slide17.xml><?xml version="1.0" encoding="utf-8"?>
-<p:sld xmlns:a="http://schemas.openxmlformats.org/drawingml/2006/main" xmlns:r="http://schemas.openxmlformats.org/officeDocument/2006/relationships" xmlns:p="http://schemas.openxmlformats.org/presentationml/2006/main">
-  <p:cSld>
-    <p:spTree>
-      <p:nvGrpSpPr>
-        <p:cNvPr id="1" name=""/>
-        <p:cNvGrpSpPr/>
-        <p:nvPr/>
-      </p:nvGrpSpPr>
-      <p:grpSpPr>
-        <a:xfrm>
-          <a:off x="0" y="0"/>
-          <a:ext cx="0" cy="0"/>
-          <a:chOff x="0" y="0"/>
-          <a:chExt cx="0" cy="0"/>
-        </a:xfrm>
-      </p:grpSpPr>
-      <p:sp>
-        <p:nvSpPr>
           <p:cNvPr id="2" name="object 2"/>
           <p:cNvSpPr txBox="1">
             <a:spLocks noGrp="1"/>
@@ -19256,17 +19233,17 @@
           <a:effectLst/>
           <a:extLst>
             <a:ext uri="{FAA26D3D-D897-4be2-8F04-BA451C77F1D7}">
-              <ma14:placeholderFlag xmlns:ma14="http://schemas.microsoft.com/office/mac/drawingml/2011/main" xmlns="" val="1"/>
+              <ma14:placeholderFlag xmlns="" xmlns:ma14="http://schemas.microsoft.com/office/mac/drawingml/2011/main" val="1"/>
             </a:ext>
             <a:ext uri="{909E8E84-426E-40dd-AFC4-6F175D3DCCD1}">
-              <a14:hiddenFill xmlns:a14="http://schemas.microsoft.com/office/drawing/2010/main" xmlns="">
+              <a14:hiddenFill xmlns="" xmlns:a14="http://schemas.microsoft.com/office/drawing/2010/main">
                 <a:solidFill>
                   <a:schemeClr val="bg1"/>
                 </a:solidFill>
               </a14:hiddenFill>
             </a:ext>
             <a:ext uri="{91240B29-F687-4f45-9708-019B960494DF}">
-              <a14:hiddenLine xmlns:a14="http://schemas.microsoft.com/office/drawing/2010/main" xmlns="" w="12700">
+              <a14:hiddenLine xmlns="" xmlns:a14="http://schemas.microsoft.com/office/drawing/2010/main" w="12700">
                 <a:pattFill prst="narHorz">
                   <a:fgClr>
                     <a:schemeClr val="tx1"/>
@@ -19281,7 +19258,7 @@
               </a14:hiddenLine>
             </a:ext>
             <a:ext uri="{AF507438-7753-43e0-B8FC-AC1667EBCBE1}">
-              <a14:hiddenEffects xmlns:a14="http://schemas.microsoft.com/office/drawing/2010/main" xmlns="">
+              <a14:hiddenEffects xmlns="" xmlns:a14="http://schemas.microsoft.com/office/drawing/2010/main">
                 <a:effectLst>
                   <a:outerShdw blurRad="63500" dist="38099" dir="2700000" algn="ctr" rotWithShape="0">
                     <a:schemeClr val="bg2">
@@ -19633,7 +19610,7 @@
                 <a:cs typeface="Arial"/>
               </a:rPr>
               <a:pPr algn="ctr"/>
-              <a:t>17</a:t>
+              <a:t>16</a:t>
             </a:fld>
             <a:endParaRPr lang="nb-NO" sz="1400" b="0" i="0" dirty="0">
               <a:solidFill>
@@ -19654,7 +19631,7 @@
 </p:sld>
 </file>
 
-<file path=ppt/slides/slide18.xml><?xml version="1.0" encoding="utf-8"?>
+<file path=ppt/slides/slide17.xml><?xml version="1.0" encoding="utf-8"?>
 <p:sld xmlns:a="http://schemas.openxmlformats.org/drawingml/2006/main" xmlns:r="http://schemas.openxmlformats.org/officeDocument/2006/relationships" xmlns:p="http://schemas.openxmlformats.org/presentationml/2006/main">
   <p:cSld>
     <p:spTree>
@@ -22151,17 +22128,17 @@
           <a:effectLst/>
           <a:extLst>
             <a:ext uri="{FAA26D3D-D897-4be2-8F04-BA451C77F1D7}">
-              <ma14:placeholderFlag xmlns:ma14="http://schemas.microsoft.com/office/mac/drawingml/2011/main" xmlns="" val="1"/>
+              <ma14:placeholderFlag xmlns="" xmlns:ma14="http://schemas.microsoft.com/office/mac/drawingml/2011/main" val="1"/>
             </a:ext>
             <a:ext uri="{909E8E84-426E-40dd-AFC4-6F175D3DCCD1}">
-              <a14:hiddenFill xmlns:a14="http://schemas.microsoft.com/office/drawing/2010/main" xmlns="">
+              <a14:hiddenFill xmlns="" xmlns:a14="http://schemas.microsoft.com/office/drawing/2010/main">
                 <a:solidFill>
                   <a:schemeClr val="bg1"/>
                 </a:solidFill>
               </a14:hiddenFill>
             </a:ext>
             <a:ext uri="{91240B29-F687-4f45-9708-019B960494DF}">
-              <a14:hiddenLine xmlns:a14="http://schemas.microsoft.com/office/drawing/2010/main" xmlns="" w="12700">
+              <a14:hiddenLine xmlns="" xmlns:a14="http://schemas.microsoft.com/office/drawing/2010/main" w="12700">
                 <a:pattFill prst="narHorz">
                   <a:fgClr>
                     <a:schemeClr val="tx1"/>
@@ -22176,7 +22153,7 @@
               </a14:hiddenLine>
             </a:ext>
             <a:ext uri="{AF507438-7753-43e0-B8FC-AC1667EBCBE1}">
-              <a14:hiddenEffects xmlns:a14="http://schemas.microsoft.com/office/drawing/2010/main" xmlns="">
+              <a14:hiddenEffects xmlns="" xmlns:a14="http://schemas.microsoft.com/office/drawing/2010/main">
                 <a:effectLst>
                   <a:outerShdw blurRad="63500" dist="38099" dir="2700000" algn="ctr" rotWithShape="0">
                     <a:schemeClr val="bg2">
@@ -22528,7 +22505,7 @@
                 <a:cs typeface="Arial"/>
               </a:rPr>
               <a:pPr algn="ctr"/>
-              <a:t>18</a:t>
+              <a:t>17</a:t>
             </a:fld>
             <a:endParaRPr lang="nb-NO" sz="1400" b="0" i="0" dirty="0">
               <a:solidFill>
@@ -22549,7 +22526,7 @@
 </p:sld>
 </file>
 
-<file path=ppt/slides/slide19.xml><?xml version="1.0" encoding="utf-8"?>
+<file path=ppt/slides/slide18.xml><?xml version="1.0" encoding="utf-8"?>
 <p:sld xmlns:a="http://schemas.openxmlformats.org/drawingml/2006/main" xmlns:r="http://schemas.openxmlformats.org/officeDocument/2006/relationships" xmlns:p="http://schemas.openxmlformats.org/presentationml/2006/main">
   <p:cSld>
     <p:spTree>
@@ -22575,7 +22552,7 @@
         <p:spPr>
           <a:xfrm>
             <a:off x="1409406" y="760912"/>
-            <a:ext cx="9715794" cy="1967655"/>
+            <a:ext cx="9715794" cy="2929456"/>
           </a:xfrm>
           <a:prstGeom prst="rect">
             <a:avLst/>
@@ -23047,18 +23024,11 @@
               </a:spcBef>
             </a:pPr>
             <a:r>
-              <a:rPr lang="en-GB" sz="2400" b="0" spc="-50">
-                <a:latin typeface="Gill Sans" panose="020B0502020104020203"/>
-                <a:cs typeface="Arial MT"/>
-              </a:rPr>
-              <a:t>(We </a:t>
-            </a:r>
-            <a:r>
               <a:rPr lang="en-GB" sz="2400" b="0" spc="-50" dirty="0">
                 <a:latin typeface="Gill Sans" panose="020B0502020104020203"/>
                 <a:cs typeface="Arial MT"/>
               </a:rPr>
-              <a:t>use a slightly different notation of </a:t>
+              <a:t>(We use a slightly different notation of </a:t>
             </a:r>
             <a:r>
               <a:rPr lang="en-GB" sz="2400" b="0" spc="-50" dirty="0" err="1">
@@ -23114,7 +23084,7 @@
                 <a:latin typeface="Gill Sans" panose="020B0502020104020203"/>
                 <a:cs typeface="Arial MT"/>
               </a:rPr>
-              <a:t>(&amp;s).</a:t>
+              <a:t>(&amp;s). Note that a binary semaphore’s wait() and signal() are equivalent to a mutex’s lock() and unlock(), when used for mutual exclusion. But a semaphore (binary or not) may be used for general synchronization/sequencing, in addition to working as a mutex.)</a:t>
             </a:r>
             <a:endParaRPr sz="2400" b="0" dirty="0">
               <a:latin typeface="Gill Sans" panose="020B0502020104020203"/>
@@ -24373,7 +24343,7 @@
                 <a:cs typeface="Arial"/>
               </a:rPr>
               <a:pPr algn="ctr"/>
-              <a:t>19</a:t>
+              <a:t>18</a:t>
             </a:fld>
             <a:endParaRPr lang="nb-NO" sz="1400" b="0" i="0" dirty="0">
               <a:solidFill>
@@ -24416,17 +24386,17 @@
           <a:effectLst/>
           <a:extLst>
             <a:ext uri="{FAA26D3D-D897-4be2-8F04-BA451C77F1D7}">
-              <ma14:placeholderFlag xmlns:ma14="http://schemas.microsoft.com/office/mac/drawingml/2011/main" xmlns="" val="1"/>
+              <ma14:placeholderFlag xmlns="" xmlns:ma14="http://schemas.microsoft.com/office/mac/drawingml/2011/main" val="1"/>
             </a:ext>
             <a:ext uri="{909E8E84-426E-40dd-AFC4-6F175D3DCCD1}">
-              <a14:hiddenFill xmlns:a14="http://schemas.microsoft.com/office/drawing/2010/main" xmlns="">
+              <a14:hiddenFill xmlns="" xmlns:a14="http://schemas.microsoft.com/office/drawing/2010/main">
                 <a:solidFill>
                   <a:schemeClr val="bg1"/>
                 </a:solidFill>
               </a14:hiddenFill>
             </a:ext>
             <a:ext uri="{91240B29-F687-4f45-9708-019B960494DF}">
-              <a14:hiddenLine xmlns:a14="http://schemas.microsoft.com/office/drawing/2010/main" xmlns="" w="12700">
+              <a14:hiddenLine xmlns="" xmlns:a14="http://schemas.microsoft.com/office/drawing/2010/main" w="12700">
                 <a:pattFill prst="narHorz">
                   <a:fgClr>
                     <a:schemeClr val="tx1"/>
@@ -24441,7 +24411,7 @@
               </a14:hiddenLine>
             </a:ext>
             <a:ext uri="{AF507438-7753-43e0-B8FC-AC1667EBCBE1}">
-              <a14:hiddenEffects xmlns:a14="http://schemas.microsoft.com/office/drawing/2010/main" xmlns="">
+              <a14:hiddenEffects xmlns="" xmlns:a14="http://schemas.microsoft.com/office/drawing/2010/main">
                 <a:effectLst>
                   <a:outerShdw blurRad="63500" dist="38099" dir="2700000" algn="ctr" rotWithShape="0">
                     <a:schemeClr val="bg2">
@@ -24686,17 +24656,17 @@
           <a:effectLst/>
           <a:extLst>
             <a:ext uri="{FAA26D3D-D897-4be2-8F04-BA451C77F1D7}">
-              <ma14:placeholderFlag xmlns:ma14="http://schemas.microsoft.com/office/mac/drawingml/2011/main" xmlns="" val="1"/>
+              <ma14:placeholderFlag xmlns="" xmlns:ma14="http://schemas.microsoft.com/office/mac/drawingml/2011/main" val="1"/>
             </a:ext>
             <a:ext uri="{909E8E84-426E-40dd-AFC4-6F175D3DCCD1}">
-              <a14:hiddenFill xmlns:a14="http://schemas.microsoft.com/office/drawing/2010/main" xmlns="">
+              <a14:hiddenFill xmlns="" xmlns:a14="http://schemas.microsoft.com/office/drawing/2010/main">
                 <a:solidFill>
                   <a:schemeClr val="bg1"/>
                 </a:solidFill>
               </a14:hiddenFill>
             </a:ext>
             <a:ext uri="{91240B29-F687-4f45-9708-019B960494DF}">
-              <a14:hiddenLine xmlns:a14="http://schemas.microsoft.com/office/drawing/2010/main" xmlns="" w="12700">
+              <a14:hiddenLine xmlns="" xmlns:a14="http://schemas.microsoft.com/office/drawing/2010/main" w="12700">
                 <a:pattFill prst="narHorz">
                   <a:fgClr>
                     <a:schemeClr val="tx1"/>
@@ -24711,7 +24681,7 @@
               </a14:hiddenLine>
             </a:ext>
             <a:ext uri="{AF507438-7753-43e0-B8FC-AC1667EBCBE1}">
-              <a14:hiddenEffects xmlns:a14="http://schemas.microsoft.com/office/drawing/2010/main" xmlns="">
+              <a14:hiddenEffects xmlns="" xmlns:a14="http://schemas.microsoft.com/office/drawing/2010/main">
                 <a:effectLst>
                   <a:outerShdw blurRad="63500" dist="38099" dir="2700000" algn="ctr" rotWithShape="0">
                     <a:schemeClr val="bg2">
@@ -24956,17 +24926,17 @@
           <a:effectLst/>
           <a:extLst>
             <a:ext uri="{FAA26D3D-D897-4be2-8F04-BA451C77F1D7}">
-              <ma14:placeholderFlag xmlns:ma14="http://schemas.microsoft.com/office/mac/drawingml/2011/main" xmlns="" val="1"/>
+              <ma14:placeholderFlag xmlns="" xmlns:ma14="http://schemas.microsoft.com/office/mac/drawingml/2011/main" val="1"/>
             </a:ext>
             <a:ext uri="{909E8E84-426E-40dd-AFC4-6F175D3DCCD1}">
-              <a14:hiddenFill xmlns:a14="http://schemas.microsoft.com/office/drawing/2010/main" xmlns="">
+              <a14:hiddenFill xmlns="" xmlns:a14="http://schemas.microsoft.com/office/drawing/2010/main">
                 <a:solidFill>
                   <a:schemeClr val="bg1"/>
                 </a:solidFill>
               </a14:hiddenFill>
             </a:ext>
             <a:ext uri="{91240B29-F687-4f45-9708-019B960494DF}">
-              <a14:hiddenLine xmlns:a14="http://schemas.microsoft.com/office/drawing/2010/main" xmlns="" w="12700">
+              <a14:hiddenLine xmlns="" xmlns:a14="http://schemas.microsoft.com/office/drawing/2010/main" w="12700">
                 <a:pattFill prst="narHorz">
                   <a:fgClr>
                     <a:schemeClr val="tx1"/>
@@ -24981,7 +24951,7 @@
               </a14:hiddenLine>
             </a:ext>
             <a:ext uri="{AF507438-7753-43e0-B8FC-AC1667EBCBE1}">
-              <a14:hiddenEffects xmlns:a14="http://schemas.microsoft.com/office/drawing/2010/main" xmlns="">
+              <a14:hiddenEffects xmlns="" xmlns:a14="http://schemas.microsoft.com/office/drawing/2010/main">
                 <a:effectLst>
                   <a:outerShdw blurRad="63500" dist="38099" dir="2700000" algn="ctr" rotWithShape="0">
                     <a:schemeClr val="bg2">
@@ -25220,1027 +25190,7 @@
 </p:sld>
 </file>
 
-<file path=ppt/slides/slide2.xml><?xml version="1.0" encoding="utf-8"?>
-<p:sld xmlns:a="http://schemas.openxmlformats.org/drawingml/2006/main" xmlns:r="http://schemas.openxmlformats.org/officeDocument/2006/relationships" xmlns:p="http://schemas.openxmlformats.org/presentationml/2006/main">
-  <p:cSld>
-    <p:spTree>
-      <p:nvGrpSpPr>
-        <p:cNvPr id="1" name=""/>
-        <p:cNvGrpSpPr/>
-        <p:nvPr/>
-      </p:nvGrpSpPr>
-      <p:grpSpPr>
-        <a:xfrm>
-          <a:off x="0" y="0"/>
-          <a:ext cx="0" cy="0"/>
-          <a:chOff x="0" y="0"/>
-          <a:chExt cx="0" cy="0"/>
-        </a:xfrm>
-      </p:grpSpPr>
-      <p:sp>
-        <p:nvSpPr>
-          <p:cNvPr id="2" name="Title 1">
-            <a:extLst>
-              <a:ext uri="{FF2B5EF4-FFF2-40B4-BE49-F238E27FC236}">
-                <a16:creationId xmlns:a16="http://schemas.microsoft.com/office/drawing/2014/main" id="{8F70288D-85B6-6CC3-1FB2-3B04FD5CDA2E}"/>
-              </a:ext>
-            </a:extLst>
-          </p:cNvPr>
-          <p:cNvSpPr>
-            <a:spLocks noGrp="1"/>
-          </p:cNvSpPr>
-          <p:nvPr>
-            <p:ph type="title"/>
-          </p:nvPr>
-        </p:nvSpPr>
-        <p:spPr/>
-        <p:txBody>
-          <a:bodyPr/>
-          <a:lstStyle/>
-          <a:p>
-            <a:r>
-              <a:rPr lang="en-GB" dirty="0"/>
-              <a:t>Concurrency I</a:t>
-            </a:r>
-            <a:endParaRPr lang="en-SE" dirty="0"/>
-          </a:p>
-        </p:txBody>
-      </p:sp>
-      <p:sp>
-        <p:nvSpPr>
-          <p:cNvPr id="3" name="Content Placeholder 2">
-            <a:extLst>
-              <a:ext uri="{FF2B5EF4-FFF2-40B4-BE49-F238E27FC236}">
-                <a16:creationId xmlns:a16="http://schemas.microsoft.com/office/drawing/2014/main" id="{F457968C-088E-2EEC-6B87-D73D14EA4986}"/>
-              </a:ext>
-            </a:extLst>
-          </p:cNvPr>
-          <p:cNvSpPr>
-            <a:spLocks noGrp="1"/>
-          </p:cNvSpPr>
-          <p:nvPr>
-            <p:ph idx="1"/>
-          </p:nvPr>
-        </p:nvSpPr>
-        <p:spPr>
-          <a:xfrm>
-            <a:off x="812800" y="2695986"/>
-            <a:ext cx="10566400" cy="3323814"/>
-          </a:xfrm>
-        </p:spPr>
-        <p:txBody>
-          <a:bodyPr>
-            <a:normAutofit/>
-          </a:bodyPr>
-          <a:lstStyle/>
-          <a:p>
-            <a:r>
-              <a:rPr lang="en-GB" dirty="0"/>
-              <a:t>Consider two concurrent threads T0, T1, which access a shared variable x that has been initialized to 0. There is no mutex protection. </a:t>
-            </a:r>
-          </a:p>
-          <a:p>
-            <a:r>
-              <a:rPr lang="en-GB" dirty="0"/>
-              <a:t>Q: What are the minimum, maximum, and all possible values of x after the two threads have completed execution?</a:t>
-            </a:r>
-          </a:p>
-        </p:txBody>
-      </p:sp>
-      <p:sp>
-        <p:nvSpPr>
-          <p:cNvPr id="4" name="Plassholder for innhold 2">
-            <a:extLst>
-              <a:ext uri="{FF2B5EF4-FFF2-40B4-BE49-F238E27FC236}">
-                <a16:creationId xmlns:a16="http://schemas.microsoft.com/office/drawing/2014/main" id="{758290D7-B791-5228-8CF4-A4FA620CB43A}"/>
-              </a:ext>
-            </a:extLst>
-          </p:cNvPr>
-          <p:cNvSpPr txBox="1">
-            <a:spLocks/>
-          </p:cNvSpPr>
-          <p:nvPr/>
-        </p:nvSpPr>
-        <p:spPr bwMode="auto">
-          <a:xfrm>
-            <a:off x="2514600" y="1419860"/>
-            <a:ext cx="3699076" cy="1276127"/>
-          </a:xfrm>
-          <a:prstGeom prst="rect">
-            <a:avLst/>
-          </a:prstGeom>
-          <a:noFill/>
-          <a:ln>
-            <a:solidFill>
-              <a:schemeClr val="accent1">
-                <a:lumMod val="50000"/>
-              </a:schemeClr>
-            </a:solidFill>
-          </a:ln>
-          <a:effectLst/>
-          <a:extLst>
-            <a:ext uri="{FAA26D3D-D897-4be2-8F04-BA451C77F1D7}">
-              <ma14:placeholderFlag xmlns:ma14="http://schemas.microsoft.com/office/mac/drawingml/2011/main" xmlns="" val="1"/>
-            </a:ext>
-            <a:ext uri="{909E8E84-426E-40dd-AFC4-6F175D3DCCD1}">
-              <a14:hiddenFill xmlns:a14="http://schemas.microsoft.com/office/drawing/2010/main" xmlns="">
-                <a:solidFill>
-                  <a:schemeClr val="bg1"/>
-                </a:solidFill>
-              </a14:hiddenFill>
-            </a:ext>
-            <a:ext uri="{91240B29-F687-4f45-9708-019B960494DF}">
-              <a14:hiddenLine xmlns:a14="http://schemas.microsoft.com/office/drawing/2010/main" xmlns="" w="12700">
-                <a:pattFill prst="narHorz">
-                  <a:fgClr>
-                    <a:schemeClr val="tx1"/>
-                  </a:fgClr>
-                  <a:bgClr>
-                    <a:schemeClr val="bg1"/>
-                  </a:bgClr>
-                </a:pattFill>
-                <a:miter lim="800000"/>
-                <a:headEnd/>
-                <a:tailEnd/>
-              </a14:hiddenLine>
-            </a:ext>
-            <a:ext uri="{AF507438-7753-43e0-B8FC-AC1667EBCBE1}">
-              <a14:hiddenEffects xmlns:a14="http://schemas.microsoft.com/office/drawing/2010/main" xmlns="">
-                <a:effectLst>
-                  <a:outerShdw blurRad="63500" dist="38099" dir="2700000" algn="ctr" rotWithShape="0">
-                    <a:schemeClr val="bg2">
-                      <a:alpha val="74998"/>
-                    </a:schemeClr>
-                  </a:outerShdw>
-                </a:effectLst>
-              </a14:hiddenEffects>
-            </a:ext>
-          </a:extLst>
-        </p:spPr>
-        <p:txBody>
-          <a:bodyPr vert="horz" wrap="square" lIns="90478" tIns="44445" rIns="90478" bIns="44445" numCol="1" anchor="t" anchorCtr="0" compatLnSpc="1">
-            <a:prstTxWarp prst="textNoShape">
-              <a:avLst/>
-            </a:prstTxWarp>
-            <a:noAutofit/>
-          </a:bodyPr>
-          <a:lstStyle>
-            <a:lvl1pPr marL="285750" indent="-285750" algn="l" rtl="0" eaLnBrk="0" fontAlgn="base" hangingPunct="0">
-              <a:lnSpc>
-                <a:spcPct val="90000"/>
-              </a:lnSpc>
-              <a:spcBef>
-                <a:spcPct val="30000"/>
-              </a:spcBef>
-              <a:spcAft>
-                <a:spcPct val="0"/>
-              </a:spcAft>
-              <a:buSzPct val="100000"/>
-              <a:buChar char="•"/>
-              <a:defRPr sz="2400">
-                <a:solidFill>
-                  <a:schemeClr val="tx1"/>
-                </a:solidFill>
-                <a:latin typeface="Gill Sans" charset="0"/>
-                <a:ea typeface="ＭＳ Ｐゴシック" charset="0"/>
-                <a:cs typeface="Gill Sans" charset="0"/>
-              </a:defRPr>
-            </a:lvl1pPr>
-            <a:lvl2pPr marL="685800" indent="-228600" algn="l" rtl="0" eaLnBrk="0" fontAlgn="base" hangingPunct="0">
-              <a:lnSpc>
-                <a:spcPct val="90000"/>
-              </a:lnSpc>
-              <a:spcBef>
-                <a:spcPct val="30000"/>
-              </a:spcBef>
-              <a:spcAft>
-                <a:spcPct val="0"/>
-              </a:spcAft>
-              <a:buSzPct val="100000"/>
-              <a:buChar char="–"/>
-              <a:defRPr sz="2200">
-                <a:solidFill>
-                  <a:schemeClr val="tx1"/>
-                </a:solidFill>
-                <a:latin typeface="Gill Sans" charset="0"/>
-                <a:ea typeface="Gill Sans" charset="0"/>
-                <a:cs typeface="Gill Sans" charset="0"/>
-              </a:defRPr>
-            </a:lvl2pPr>
-            <a:lvl3pPr marL="1143000" indent="-228600" algn="l" rtl="0" eaLnBrk="0" fontAlgn="base" hangingPunct="0">
-              <a:lnSpc>
-                <a:spcPct val="90000"/>
-              </a:lnSpc>
-              <a:spcBef>
-                <a:spcPct val="30000"/>
-              </a:spcBef>
-              <a:spcAft>
-                <a:spcPct val="0"/>
-              </a:spcAft>
-              <a:buSzPct val="100000"/>
-              <a:buChar char="»"/>
-              <a:defRPr sz="2000">
-                <a:solidFill>
-                  <a:schemeClr val="tx1"/>
-                </a:solidFill>
-                <a:latin typeface="Gill Sans" charset="0"/>
-                <a:ea typeface="Gill Sans" charset="0"/>
-                <a:cs typeface="Gill Sans" charset="0"/>
-              </a:defRPr>
-            </a:lvl3pPr>
-            <a:lvl4pPr marL="1543050" indent="-171450" algn="l" rtl="0" eaLnBrk="0" fontAlgn="base" hangingPunct="0">
-              <a:lnSpc>
-                <a:spcPct val="90000"/>
-              </a:lnSpc>
-              <a:spcBef>
-                <a:spcPct val="30000"/>
-              </a:spcBef>
-              <a:spcAft>
-                <a:spcPct val="0"/>
-              </a:spcAft>
-              <a:buSzPct val="100000"/>
-              <a:buChar char="•"/>
-              <a:defRPr sz="2000">
-                <a:solidFill>
-                  <a:schemeClr val="tx1"/>
-                </a:solidFill>
-                <a:latin typeface="Gill Sans" charset="0"/>
-                <a:ea typeface="Gill Sans" charset="0"/>
-                <a:cs typeface="Gill Sans" charset="0"/>
-              </a:defRPr>
-            </a:lvl4pPr>
-            <a:lvl5pPr marL="2000250" indent="-171450" algn="l" rtl="0" eaLnBrk="0" fontAlgn="base" hangingPunct="0">
-              <a:lnSpc>
-                <a:spcPct val="90000"/>
-              </a:lnSpc>
-              <a:spcBef>
-                <a:spcPct val="30000"/>
-              </a:spcBef>
-              <a:spcAft>
-                <a:spcPct val="0"/>
-              </a:spcAft>
-              <a:buSzPct val="100000"/>
-              <a:buChar char="–"/>
-              <a:defRPr sz="2000">
-                <a:solidFill>
-                  <a:schemeClr val="tx1"/>
-                </a:solidFill>
-                <a:latin typeface="Gill Sans" charset="0"/>
-                <a:ea typeface="Gill Sans" charset="0"/>
-                <a:cs typeface="Gill Sans" charset="0"/>
-              </a:defRPr>
-            </a:lvl5pPr>
-            <a:lvl6pPr marL="2457450" indent="-171450" algn="l" rtl="0" eaLnBrk="0" fontAlgn="base" hangingPunct="0">
-              <a:lnSpc>
-                <a:spcPct val="90000"/>
-              </a:lnSpc>
-              <a:spcBef>
-                <a:spcPct val="30000"/>
-              </a:spcBef>
-              <a:spcAft>
-                <a:spcPct val="0"/>
-              </a:spcAft>
-              <a:buSzPct val="100000"/>
-              <a:buChar char="–"/>
-              <a:defRPr sz="2000" b="1">
-                <a:solidFill>
-                  <a:schemeClr val="tx1"/>
-                </a:solidFill>
-                <a:latin typeface="+mn-lt"/>
-              </a:defRPr>
-            </a:lvl6pPr>
-            <a:lvl7pPr marL="2914650" indent="-171450" algn="l" rtl="0" eaLnBrk="0" fontAlgn="base" hangingPunct="0">
-              <a:lnSpc>
-                <a:spcPct val="90000"/>
-              </a:lnSpc>
-              <a:spcBef>
-                <a:spcPct val="30000"/>
-              </a:spcBef>
-              <a:spcAft>
-                <a:spcPct val="0"/>
-              </a:spcAft>
-              <a:buSzPct val="100000"/>
-              <a:buChar char="–"/>
-              <a:defRPr sz="2000" b="1">
-                <a:solidFill>
-                  <a:schemeClr val="tx1"/>
-                </a:solidFill>
-                <a:latin typeface="+mn-lt"/>
-              </a:defRPr>
-            </a:lvl7pPr>
-            <a:lvl8pPr marL="3371850" indent="-171450" algn="l" rtl="0" eaLnBrk="0" fontAlgn="base" hangingPunct="0">
-              <a:lnSpc>
-                <a:spcPct val="90000"/>
-              </a:lnSpc>
-              <a:spcBef>
-                <a:spcPct val="30000"/>
-              </a:spcBef>
-              <a:spcAft>
-                <a:spcPct val="0"/>
-              </a:spcAft>
-              <a:buSzPct val="100000"/>
-              <a:buChar char="–"/>
-              <a:defRPr sz="2000" b="1">
-                <a:solidFill>
-                  <a:schemeClr val="tx1"/>
-                </a:solidFill>
-                <a:latin typeface="+mn-lt"/>
-              </a:defRPr>
-            </a:lvl8pPr>
-            <a:lvl9pPr marL="3829050" indent="-171450" algn="l" rtl="0" eaLnBrk="0" fontAlgn="base" hangingPunct="0">
-              <a:lnSpc>
-                <a:spcPct val="90000"/>
-              </a:lnSpc>
-              <a:spcBef>
-                <a:spcPct val="30000"/>
-              </a:spcBef>
-              <a:spcAft>
-                <a:spcPct val="0"/>
-              </a:spcAft>
-              <a:buSzPct val="100000"/>
-              <a:buChar char="–"/>
-              <a:defRPr sz="2000" b="1">
-                <a:solidFill>
-                  <a:schemeClr val="tx1"/>
-                </a:solidFill>
-                <a:latin typeface="+mn-lt"/>
-              </a:defRPr>
-            </a:lvl9pPr>
-          </a:lstStyle>
-          <a:p>
-            <a:pPr marL="0" indent="0">
-              <a:buFontTx/>
-              <a:buNone/>
-            </a:pPr>
-            <a:r>
-              <a:rPr lang="en-GB" altLang="zh-CN" sz="1700" b="0" kern="0" dirty="0">
-                <a:latin typeface="Courier New" panose="02070309020205020404" pitchFamily="49" charset="0"/>
-                <a:cs typeface="Courier New" panose="02070309020205020404" pitchFamily="49" charset="0"/>
-              </a:rPr>
-              <a:t>//Thread T0</a:t>
-            </a:r>
-          </a:p>
-          <a:p>
-            <a:pPr marL="0" indent="0">
-              <a:buFontTx/>
-              <a:buNone/>
-            </a:pPr>
-            <a:r>
-              <a:rPr lang="en-GB" altLang="zh-CN" sz="1700" b="0" kern="0" dirty="0">
-                <a:latin typeface="Courier New" panose="02070309020205020404" pitchFamily="49" charset="0"/>
-                <a:cs typeface="Courier New" panose="02070309020205020404" pitchFamily="49" charset="0"/>
-              </a:rPr>
-              <a:t>for (int i=0; i&lt;5; i++) {  </a:t>
-            </a:r>
-          </a:p>
-          <a:p>
-            <a:pPr marL="0" indent="0">
-              <a:buFontTx/>
-              <a:buNone/>
-            </a:pPr>
-            <a:r>
-              <a:rPr lang="en-GB" altLang="zh-CN" sz="1700" b="0" kern="0" dirty="0">
-                <a:latin typeface="Courier New" panose="02070309020205020404" pitchFamily="49" charset="0"/>
-                <a:cs typeface="Courier New" panose="02070309020205020404" pitchFamily="49" charset="0"/>
-              </a:rPr>
-              <a:t>   x = x + 1;</a:t>
-            </a:r>
-          </a:p>
-          <a:p>
-            <a:pPr marL="0" indent="0">
-              <a:buFontTx/>
-              <a:buNone/>
-            </a:pPr>
-            <a:r>
-              <a:rPr lang="en-GB" altLang="zh-CN" sz="1700" b="0" kern="0" dirty="0">
-                <a:latin typeface="Courier New" panose="02070309020205020404" pitchFamily="49" charset="0"/>
-                <a:cs typeface="Courier New" panose="02070309020205020404" pitchFamily="49" charset="0"/>
-              </a:rPr>
-              <a:t>}</a:t>
-            </a:r>
-          </a:p>
-        </p:txBody>
-      </p:sp>
-      <p:sp>
-        <p:nvSpPr>
-          <p:cNvPr id="5" name="Plassholder for innhold 2">
-            <a:extLst>
-              <a:ext uri="{FF2B5EF4-FFF2-40B4-BE49-F238E27FC236}">
-                <a16:creationId xmlns:a16="http://schemas.microsoft.com/office/drawing/2014/main" id="{9D5B75F7-DF91-87EF-42D7-37808B097603}"/>
-              </a:ext>
-            </a:extLst>
-          </p:cNvPr>
-          <p:cNvSpPr txBox="1">
-            <a:spLocks/>
-          </p:cNvSpPr>
-          <p:nvPr/>
-        </p:nvSpPr>
-        <p:spPr bwMode="auto">
-          <a:xfrm>
-            <a:off x="6324600" y="1419859"/>
-            <a:ext cx="3699076" cy="1276127"/>
-          </a:xfrm>
-          <a:prstGeom prst="rect">
-            <a:avLst/>
-          </a:prstGeom>
-          <a:noFill/>
-          <a:ln>
-            <a:solidFill>
-              <a:schemeClr val="accent1">
-                <a:lumMod val="50000"/>
-              </a:schemeClr>
-            </a:solidFill>
-          </a:ln>
-          <a:effectLst/>
-          <a:extLst>
-            <a:ext uri="{FAA26D3D-D897-4be2-8F04-BA451C77F1D7}">
-              <ma14:placeholderFlag xmlns:ma14="http://schemas.microsoft.com/office/mac/drawingml/2011/main" xmlns="" val="1"/>
-            </a:ext>
-            <a:ext uri="{909E8E84-426E-40dd-AFC4-6F175D3DCCD1}">
-              <a14:hiddenFill xmlns:a14="http://schemas.microsoft.com/office/drawing/2010/main" xmlns="">
-                <a:solidFill>
-                  <a:schemeClr val="bg1"/>
-                </a:solidFill>
-              </a14:hiddenFill>
-            </a:ext>
-            <a:ext uri="{91240B29-F687-4f45-9708-019B960494DF}">
-              <a14:hiddenLine xmlns:a14="http://schemas.microsoft.com/office/drawing/2010/main" xmlns="" w="12700">
-                <a:pattFill prst="narHorz">
-                  <a:fgClr>
-                    <a:schemeClr val="tx1"/>
-                  </a:fgClr>
-                  <a:bgClr>
-                    <a:schemeClr val="bg1"/>
-                  </a:bgClr>
-                </a:pattFill>
-                <a:miter lim="800000"/>
-                <a:headEnd/>
-                <a:tailEnd/>
-              </a14:hiddenLine>
-            </a:ext>
-            <a:ext uri="{AF507438-7753-43e0-B8FC-AC1667EBCBE1}">
-              <a14:hiddenEffects xmlns:a14="http://schemas.microsoft.com/office/drawing/2010/main" xmlns="">
-                <a:effectLst>
-                  <a:outerShdw blurRad="63500" dist="38099" dir="2700000" algn="ctr" rotWithShape="0">
-                    <a:schemeClr val="bg2">
-                      <a:alpha val="74998"/>
-                    </a:schemeClr>
-                  </a:outerShdw>
-                </a:effectLst>
-              </a14:hiddenEffects>
-            </a:ext>
-          </a:extLst>
-        </p:spPr>
-        <p:txBody>
-          <a:bodyPr vert="horz" wrap="square" lIns="90478" tIns="44445" rIns="90478" bIns="44445" numCol="1" anchor="t" anchorCtr="0" compatLnSpc="1">
-            <a:prstTxWarp prst="textNoShape">
-              <a:avLst/>
-            </a:prstTxWarp>
-            <a:noAutofit/>
-          </a:bodyPr>
-          <a:lstStyle>
-            <a:lvl1pPr marL="285750" indent="-285750" algn="l" rtl="0" eaLnBrk="0" fontAlgn="base" hangingPunct="0">
-              <a:lnSpc>
-                <a:spcPct val="90000"/>
-              </a:lnSpc>
-              <a:spcBef>
-                <a:spcPct val="30000"/>
-              </a:spcBef>
-              <a:spcAft>
-                <a:spcPct val="0"/>
-              </a:spcAft>
-              <a:buSzPct val="100000"/>
-              <a:buChar char="•"/>
-              <a:defRPr sz="2400">
-                <a:solidFill>
-                  <a:schemeClr val="tx1"/>
-                </a:solidFill>
-                <a:latin typeface="Gill Sans" charset="0"/>
-                <a:ea typeface="ＭＳ Ｐゴシック" charset="0"/>
-                <a:cs typeface="Gill Sans" charset="0"/>
-              </a:defRPr>
-            </a:lvl1pPr>
-            <a:lvl2pPr marL="685800" indent="-228600" algn="l" rtl="0" eaLnBrk="0" fontAlgn="base" hangingPunct="0">
-              <a:lnSpc>
-                <a:spcPct val="90000"/>
-              </a:lnSpc>
-              <a:spcBef>
-                <a:spcPct val="30000"/>
-              </a:spcBef>
-              <a:spcAft>
-                <a:spcPct val="0"/>
-              </a:spcAft>
-              <a:buSzPct val="100000"/>
-              <a:buChar char="–"/>
-              <a:defRPr sz="2200">
-                <a:solidFill>
-                  <a:schemeClr val="tx1"/>
-                </a:solidFill>
-                <a:latin typeface="Gill Sans" charset="0"/>
-                <a:ea typeface="Gill Sans" charset="0"/>
-                <a:cs typeface="Gill Sans" charset="0"/>
-              </a:defRPr>
-            </a:lvl2pPr>
-            <a:lvl3pPr marL="1143000" indent="-228600" algn="l" rtl="0" eaLnBrk="0" fontAlgn="base" hangingPunct="0">
-              <a:lnSpc>
-                <a:spcPct val="90000"/>
-              </a:lnSpc>
-              <a:spcBef>
-                <a:spcPct val="30000"/>
-              </a:spcBef>
-              <a:spcAft>
-                <a:spcPct val="0"/>
-              </a:spcAft>
-              <a:buSzPct val="100000"/>
-              <a:buChar char="»"/>
-              <a:defRPr sz="2000">
-                <a:solidFill>
-                  <a:schemeClr val="tx1"/>
-                </a:solidFill>
-                <a:latin typeface="Gill Sans" charset="0"/>
-                <a:ea typeface="Gill Sans" charset="0"/>
-                <a:cs typeface="Gill Sans" charset="0"/>
-              </a:defRPr>
-            </a:lvl3pPr>
-            <a:lvl4pPr marL="1543050" indent="-171450" algn="l" rtl="0" eaLnBrk="0" fontAlgn="base" hangingPunct="0">
-              <a:lnSpc>
-                <a:spcPct val="90000"/>
-              </a:lnSpc>
-              <a:spcBef>
-                <a:spcPct val="30000"/>
-              </a:spcBef>
-              <a:spcAft>
-                <a:spcPct val="0"/>
-              </a:spcAft>
-              <a:buSzPct val="100000"/>
-              <a:buChar char="•"/>
-              <a:defRPr sz="2000">
-                <a:solidFill>
-                  <a:schemeClr val="tx1"/>
-                </a:solidFill>
-                <a:latin typeface="Gill Sans" charset="0"/>
-                <a:ea typeface="Gill Sans" charset="0"/>
-                <a:cs typeface="Gill Sans" charset="0"/>
-              </a:defRPr>
-            </a:lvl4pPr>
-            <a:lvl5pPr marL="2000250" indent="-171450" algn="l" rtl="0" eaLnBrk="0" fontAlgn="base" hangingPunct="0">
-              <a:lnSpc>
-                <a:spcPct val="90000"/>
-              </a:lnSpc>
-              <a:spcBef>
-                <a:spcPct val="30000"/>
-              </a:spcBef>
-              <a:spcAft>
-                <a:spcPct val="0"/>
-              </a:spcAft>
-              <a:buSzPct val="100000"/>
-              <a:buChar char="–"/>
-              <a:defRPr sz="2000">
-                <a:solidFill>
-                  <a:schemeClr val="tx1"/>
-                </a:solidFill>
-                <a:latin typeface="Gill Sans" charset="0"/>
-                <a:ea typeface="Gill Sans" charset="0"/>
-                <a:cs typeface="Gill Sans" charset="0"/>
-              </a:defRPr>
-            </a:lvl5pPr>
-            <a:lvl6pPr marL="2457450" indent="-171450" algn="l" rtl="0" eaLnBrk="0" fontAlgn="base" hangingPunct="0">
-              <a:lnSpc>
-                <a:spcPct val="90000"/>
-              </a:lnSpc>
-              <a:spcBef>
-                <a:spcPct val="30000"/>
-              </a:spcBef>
-              <a:spcAft>
-                <a:spcPct val="0"/>
-              </a:spcAft>
-              <a:buSzPct val="100000"/>
-              <a:buChar char="–"/>
-              <a:defRPr sz="2000" b="1">
-                <a:solidFill>
-                  <a:schemeClr val="tx1"/>
-                </a:solidFill>
-                <a:latin typeface="+mn-lt"/>
-              </a:defRPr>
-            </a:lvl6pPr>
-            <a:lvl7pPr marL="2914650" indent="-171450" algn="l" rtl="0" eaLnBrk="0" fontAlgn="base" hangingPunct="0">
-              <a:lnSpc>
-                <a:spcPct val="90000"/>
-              </a:lnSpc>
-              <a:spcBef>
-                <a:spcPct val="30000"/>
-              </a:spcBef>
-              <a:spcAft>
-                <a:spcPct val="0"/>
-              </a:spcAft>
-              <a:buSzPct val="100000"/>
-              <a:buChar char="–"/>
-              <a:defRPr sz="2000" b="1">
-                <a:solidFill>
-                  <a:schemeClr val="tx1"/>
-                </a:solidFill>
-                <a:latin typeface="+mn-lt"/>
-              </a:defRPr>
-            </a:lvl7pPr>
-            <a:lvl8pPr marL="3371850" indent="-171450" algn="l" rtl="0" eaLnBrk="0" fontAlgn="base" hangingPunct="0">
-              <a:lnSpc>
-                <a:spcPct val="90000"/>
-              </a:lnSpc>
-              <a:spcBef>
-                <a:spcPct val="30000"/>
-              </a:spcBef>
-              <a:spcAft>
-                <a:spcPct val="0"/>
-              </a:spcAft>
-              <a:buSzPct val="100000"/>
-              <a:buChar char="–"/>
-              <a:defRPr sz="2000" b="1">
-                <a:solidFill>
-                  <a:schemeClr val="tx1"/>
-                </a:solidFill>
-                <a:latin typeface="+mn-lt"/>
-              </a:defRPr>
-            </a:lvl8pPr>
-            <a:lvl9pPr marL="3829050" indent="-171450" algn="l" rtl="0" eaLnBrk="0" fontAlgn="base" hangingPunct="0">
-              <a:lnSpc>
-                <a:spcPct val="90000"/>
-              </a:lnSpc>
-              <a:spcBef>
-                <a:spcPct val="30000"/>
-              </a:spcBef>
-              <a:spcAft>
-                <a:spcPct val="0"/>
-              </a:spcAft>
-              <a:buSzPct val="100000"/>
-              <a:buChar char="–"/>
-              <a:defRPr sz="2000" b="1">
-                <a:solidFill>
-                  <a:schemeClr val="tx1"/>
-                </a:solidFill>
-                <a:latin typeface="+mn-lt"/>
-              </a:defRPr>
-            </a:lvl9pPr>
-          </a:lstStyle>
-          <a:p>
-            <a:pPr marL="0" indent="0">
-              <a:buFontTx/>
-              <a:buNone/>
-            </a:pPr>
-            <a:r>
-              <a:rPr lang="en-GB" altLang="zh-CN" sz="1700" b="0" kern="0" dirty="0">
-                <a:latin typeface="Courier New" panose="02070309020205020404" pitchFamily="49" charset="0"/>
-                <a:cs typeface="Courier New" panose="02070309020205020404" pitchFamily="49" charset="0"/>
-              </a:rPr>
-              <a:t>//Thread T1</a:t>
-            </a:r>
-          </a:p>
-          <a:p>
-            <a:pPr marL="0" indent="0">
-              <a:buFontTx/>
-              <a:buNone/>
-            </a:pPr>
-            <a:r>
-              <a:rPr lang="en-GB" altLang="zh-CN" sz="1700" b="0" kern="0" dirty="0">
-                <a:latin typeface="Courier New" panose="02070309020205020404" pitchFamily="49" charset="0"/>
-                <a:cs typeface="Courier New" panose="02070309020205020404" pitchFamily="49" charset="0"/>
-              </a:rPr>
-              <a:t>for (int j=0; j&lt;5; </a:t>
-            </a:r>
-            <a:r>
-              <a:rPr lang="en-GB" altLang="zh-CN" sz="1700" b="0" kern="0" dirty="0" err="1">
-                <a:latin typeface="Courier New" panose="02070309020205020404" pitchFamily="49" charset="0"/>
-                <a:cs typeface="Courier New" panose="02070309020205020404" pitchFamily="49" charset="0"/>
-              </a:rPr>
-              <a:t>j++</a:t>
-            </a:r>
-            <a:r>
-              <a:rPr lang="en-GB" altLang="zh-CN" sz="1700" b="0" kern="0" dirty="0">
-                <a:latin typeface="Courier New" panose="02070309020205020404" pitchFamily="49" charset="0"/>
-                <a:cs typeface="Courier New" panose="02070309020205020404" pitchFamily="49" charset="0"/>
-              </a:rPr>
-              <a:t>) {  </a:t>
-            </a:r>
-          </a:p>
-          <a:p>
-            <a:pPr marL="0" indent="0">
-              <a:buFontTx/>
-              <a:buNone/>
-            </a:pPr>
-            <a:r>
-              <a:rPr lang="en-GB" altLang="zh-CN" sz="1700" b="0" kern="0" dirty="0">
-                <a:latin typeface="Courier New" panose="02070309020205020404" pitchFamily="49" charset="0"/>
-                <a:cs typeface="Courier New" panose="02070309020205020404" pitchFamily="49" charset="0"/>
-              </a:rPr>
-              <a:t>   x = x + 2;</a:t>
-            </a:r>
-          </a:p>
-          <a:p>
-            <a:pPr marL="0" indent="0">
-              <a:buFontTx/>
-              <a:buNone/>
-            </a:pPr>
-            <a:r>
-              <a:rPr lang="en-GB" altLang="zh-CN" sz="1700" b="0" kern="0" dirty="0">
-                <a:latin typeface="Courier New" panose="02070309020205020404" pitchFamily="49" charset="0"/>
-                <a:cs typeface="Courier New" panose="02070309020205020404" pitchFamily="49" charset="0"/>
-              </a:rPr>
-              <a:t>}</a:t>
-            </a:r>
-          </a:p>
-        </p:txBody>
-      </p:sp>
-      <p:sp>
-        <p:nvSpPr>
-          <p:cNvPr id="6" name="Plassholder for innhold 2">
-            <a:extLst>
-              <a:ext uri="{FF2B5EF4-FFF2-40B4-BE49-F238E27FC236}">
-                <a16:creationId xmlns:a16="http://schemas.microsoft.com/office/drawing/2014/main" id="{2D37079E-C01B-98FE-3AB3-789AD906045B}"/>
-              </a:ext>
-            </a:extLst>
-          </p:cNvPr>
-          <p:cNvSpPr txBox="1">
-            <a:spLocks/>
-          </p:cNvSpPr>
-          <p:nvPr/>
-        </p:nvSpPr>
-        <p:spPr bwMode="auto">
-          <a:xfrm>
-            <a:off x="5213551" y="836112"/>
-            <a:ext cx="2000250" cy="446762"/>
-          </a:xfrm>
-          <a:prstGeom prst="rect">
-            <a:avLst/>
-          </a:prstGeom>
-          <a:noFill/>
-          <a:ln>
-            <a:solidFill>
-              <a:schemeClr val="tx1"/>
-            </a:solidFill>
-          </a:ln>
-          <a:effectLst/>
-          <a:extLst>
-            <a:ext uri="{FAA26D3D-D897-4be2-8F04-BA451C77F1D7}">
-              <ma14:placeholderFlag xmlns:ma14="http://schemas.microsoft.com/office/mac/drawingml/2011/main" xmlns="" val="1"/>
-            </a:ext>
-            <a:ext uri="{909E8E84-426E-40dd-AFC4-6F175D3DCCD1}">
-              <a14:hiddenFill xmlns:a14="http://schemas.microsoft.com/office/drawing/2010/main" xmlns="">
-                <a:solidFill>
-                  <a:schemeClr val="bg1"/>
-                </a:solidFill>
-              </a14:hiddenFill>
-            </a:ext>
-            <a:ext uri="{91240B29-F687-4f45-9708-019B960494DF}">
-              <a14:hiddenLine xmlns:a14="http://schemas.microsoft.com/office/drawing/2010/main" xmlns="" w="12700">
-                <a:pattFill prst="narHorz">
-                  <a:fgClr>
-                    <a:schemeClr val="tx1"/>
-                  </a:fgClr>
-                  <a:bgClr>
-                    <a:schemeClr val="bg1"/>
-                  </a:bgClr>
-                </a:pattFill>
-                <a:miter lim="800000"/>
-                <a:headEnd/>
-                <a:tailEnd/>
-              </a14:hiddenLine>
-            </a:ext>
-            <a:ext uri="{AF507438-7753-43e0-B8FC-AC1667EBCBE1}">
-              <a14:hiddenEffects xmlns:a14="http://schemas.microsoft.com/office/drawing/2010/main" xmlns="">
-                <a:effectLst>
-                  <a:outerShdw blurRad="63500" dist="38099" dir="2700000" algn="ctr" rotWithShape="0">
-                    <a:schemeClr val="bg2">
-                      <a:alpha val="74998"/>
-                    </a:schemeClr>
-                  </a:outerShdw>
-                </a:effectLst>
-              </a14:hiddenEffects>
-            </a:ext>
-          </a:extLst>
-        </p:spPr>
-        <p:txBody>
-          <a:bodyPr vert="horz" wrap="square" lIns="90478" tIns="44445" rIns="90478" bIns="44445" numCol="1" anchor="t" anchorCtr="0" compatLnSpc="1">
-            <a:prstTxWarp prst="textNoShape">
-              <a:avLst/>
-            </a:prstTxWarp>
-            <a:normAutofit/>
-          </a:bodyPr>
-          <a:lstStyle>
-            <a:lvl1pPr marL="285750" indent="-285750" algn="l" rtl="0" eaLnBrk="0" fontAlgn="base" hangingPunct="0">
-              <a:lnSpc>
-                <a:spcPct val="90000"/>
-              </a:lnSpc>
-              <a:spcBef>
-                <a:spcPct val="30000"/>
-              </a:spcBef>
-              <a:spcAft>
-                <a:spcPct val="0"/>
-              </a:spcAft>
-              <a:buSzPct val="100000"/>
-              <a:buChar char="•"/>
-              <a:defRPr sz="2400">
-                <a:solidFill>
-                  <a:schemeClr val="tx1"/>
-                </a:solidFill>
-                <a:latin typeface="Gill Sans" charset="0"/>
-                <a:ea typeface="ＭＳ Ｐゴシック" charset="0"/>
-                <a:cs typeface="Gill Sans" charset="0"/>
-              </a:defRPr>
-            </a:lvl1pPr>
-            <a:lvl2pPr marL="685800" indent="-228600" algn="l" rtl="0" eaLnBrk="0" fontAlgn="base" hangingPunct="0">
-              <a:lnSpc>
-                <a:spcPct val="90000"/>
-              </a:lnSpc>
-              <a:spcBef>
-                <a:spcPct val="30000"/>
-              </a:spcBef>
-              <a:spcAft>
-                <a:spcPct val="0"/>
-              </a:spcAft>
-              <a:buSzPct val="100000"/>
-              <a:buChar char="–"/>
-              <a:defRPr sz="2200">
-                <a:solidFill>
-                  <a:schemeClr val="tx1"/>
-                </a:solidFill>
-                <a:latin typeface="Gill Sans" charset="0"/>
-                <a:ea typeface="Gill Sans" charset="0"/>
-                <a:cs typeface="Gill Sans" charset="0"/>
-              </a:defRPr>
-            </a:lvl2pPr>
-            <a:lvl3pPr marL="1143000" indent="-228600" algn="l" rtl="0" eaLnBrk="0" fontAlgn="base" hangingPunct="0">
-              <a:lnSpc>
-                <a:spcPct val="90000"/>
-              </a:lnSpc>
-              <a:spcBef>
-                <a:spcPct val="30000"/>
-              </a:spcBef>
-              <a:spcAft>
-                <a:spcPct val="0"/>
-              </a:spcAft>
-              <a:buSzPct val="100000"/>
-              <a:buChar char="»"/>
-              <a:defRPr sz="2000">
-                <a:solidFill>
-                  <a:schemeClr val="tx1"/>
-                </a:solidFill>
-                <a:latin typeface="Gill Sans" charset="0"/>
-                <a:ea typeface="Gill Sans" charset="0"/>
-                <a:cs typeface="Gill Sans" charset="0"/>
-              </a:defRPr>
-            </a:lvl3pPr>
-            <a:lvl4pPr marL="1543050" indent="-171450" algn="l" rtl="0" eaLnBrk="0" fontAlgn="base" hangingPunct="0">
-              <a:lnSpc>
-                <a:spcPct val="90000"/>
-              </a:lnSpc>
-              <a:spcBef>
-                <a:spcPct val="30000"/>
-              </a:spcBef>
-              <a:spcAft>
-                <a:spcPct val="0"/>
-              </a:spcAft>
-              <a:buSzPct val="100000"/>
-              <a:buChar char="•"/>
-              <a:defRPr sz="2000">
-                <a:solidFill>
-                  <a:schemeClr val="tx1"/>
-                </a:solidFill>
-                <a:latin typeface="Gill Sans" charset="0"/>
-                <a:ea typeface="Gill Sans" charset="0"/>
-                <a:cs typeface="Gill Sans" charset="0"/>
-              </a:defRPr>
-            </a:lvl4pPr>
-            <a:lvl5pPr marL="2000250" indent="-171450" algn="l" rtl="0" eaLnBrk="0" fontAlgn="base" hangingPunct="0">
-              <a:lnSpc>
-                <a:spcPct val="90000"/>
-              </a:lnSpc>
-              <a:spcBef>
-                <a:spcPct val="30000"/>
-              </a:spcBef>
-              <a:spcAft>
-                <a:spcPct val="0"/>
-              </a:spcAft>
-              <a:buSzPct val="100000"/>
-              <a:buChar char="–"/>
-              <a:defRPr sz="2000">
-                <a:solidFill>
-                  <a:schemeClr val="tx1"/>
-                </a:solidFill>
-                <a:latin typeface="Gill Sans" charset="0"/>
-                <a:ea typeface="Gill Sans" charset="0"/>
-                <a:cs typeface="Gill Sans" charset="0"/>
-              </a:defRPr>
-            </a:lvl5pPr>
-            <a:lvl6pPr marL="2457450" indent="-171450" algn="l" rtl="0" eaLnBrk="0" fontAlgn="base" hangingPunct="0">
-              <a:lnSpc>
-                <a:spcPct val="90000"/>
-              </a:lnSpc>
-              <a:spcBef>
-                <a:spcPct val="30000"/>
-              </a:spcBef>
-              <a:spcAft>
-                <a:spcPct val="0"/>
-              </a:spcAft>
-              <a:buSzPct val="100000"/>
-              <a:buChar char="–"/>
-              <a:defRPr sz="2000" b="1">
-                <a:solidFill>
-                  <a:schemeClr val="tx1"/>
-                </a:solidFill>
-                <a:latin typeface="+mn-lt"/>
-              </a:defRPr>
-            </a:lvl6pPr>
-            <a:lvl7pPr marL="2914650" indent="-171450" algn="l" rtl="0" eaLnBrk="0" fontAlgn="base" hangingPunct="0">
-              <a:lnSpc>
-                <a:spcPct val="90000"/>
-              </a:lnSpc>
-              <a:spcBef>
-                <a:spcPct val="30000"/>
-              </a:spcBef>
-              <a:spcAft>
-                <a:spcPct val="0"/>
-              </a:spcAft>
-              <a:buSzPct val="100000"/>
-              <a:buChar char="–"/>
-              <a:defRPr sz="2000" b="1">
-                <a:solidFill>
-                  <a:schemeClr val="tx1"/>
-                </a:solidFill>
-                <a:latin typeface="+mn-lt"/>
-              </a:defRPr>
-            </a:lvl7pPr>
-            <a:lvl8pPr marL="3371850" indent="-171450" algn="l" rtl="0" eaLnBrk="0" fontAlgn="base" hangingPunct="0">
-              <a:lnSpc>
-                <a:spcPct val="90000"/>
-              </a:lnSpc>
-              <a:spcBef>
-                <a:spcPct val="30000"/>
-              </a:spcBef>
-              <a:spcAft>
-                <a:spcPct val="0"/>
-              </a:spcAft>
-              <a:buSzPct val="100000"/>
-              <a:buChar char="–"/>
-              <a:defRPr sz="2000" b="1">
-                <a:solidFill>
-                  <a:schemeClr val="tx1"/>
-                </a:solidFill>
-                <a:latin typeface="+mn-lt"/>
-              </a:defRPr>
-            </a:lvl8pPr>
-            <a:lvl9pPr marL="3829050" indent="-171450" algn="l" rtl="0" eaLnBrk="0" fontAlgn="base" hangingPunct="0">
-              <a:lnSpc>
-                <a:spcPct val="90000"/>
-              </a:lnSpc>
-              <a:spcBef>
-                <a:spcPct val="30000"/>
-              </a:spcBef>
-              <a:spcAft>
-                <a:spcPct val="0"/>
-              </a:spcAft>
-              <a:buSzPct val="100000"/>
-              <a:buChar char="–"/>
-              <a:defRPr sz="2000" b="1">
-                <a:solidFill>
-                  <a:schemeClr val="tx1"/>
-                </a:solidFill>
-                <a:latin typeface="+mn-lt"/>
-              </a:defRPr>
-            </a:lvl9pPr>
-          </a:lstStyle>
-          <a:p>
-            <a:pPr marL="0" indent="0">
-              <a:buFontTx/>
-              <a:buNone/>
-            </a:pPr>
-            <a:r>
-              <a:rPr lang="en-GB" altLang="zh-CN" sz="1700" b="0" kern="0" dirty="0">
-                <a:latin typeface="Courier New" panose="02070309020205020404" pitchFamily="49" charset="0"/>
-                <a:cs typeface="Courier New" panose="02070309020205020404" pitchFamily="49" charset="0"/>
-              </a:rPr>
-              <a:t>int x = 0;</a:t>
-            </a:r>
-            <a:endParaRPr lang="en-US" altLang="zh-CN" sz="1700" b="0" kern="0" dirty="0">
-              <a:latin typeface="Courier New" panose="02070309020205020404" pitchFamily="49" charset="0"/>
-              <a:cs typeface="Courier New" panose="02070309020205020404" pitchFamily="49" charset="0"/>
-            </a:endParaRPr>
-          </a:p>
-        </p:txBody>
-      </p:sp>
-    </p:spTree>
-    <p:extLst>
-      <p:ext uri="{BB962C8B-B14F-4D97-AF65-F5344CB8AC3E}">
-        <p14:creationId xmlns:p14="http://schemas.microsoft.com/office/powerpoint/2010/main" val="2751476572"/>
-      </p:ext>
-    </p:extLst>
-  </p:cSld>
-  <p:clrMapOvr>
-    <a:masterClrMapping/>
-  </p:clrMapOvr>
-  <p:transition/>
-</p:sld>
-</file>
-
-<file path=ppt/slides/slide20.xml><?xml version="1.0" encoding="utf-8"?>
+<file path=ppt/slides/slide19.xml><?xml version="1.0" encoding="utf-8"?>
 <p:sld xmlns:a="http://schemas.openxmlformats.org/drawingml/2006/main" xmlns:r="http://schemas.openxmlformats.org/officeDocument/2006/relationships" xmlns:p="http://schemas.openxmlformats.org/presentationml/2006/main">
   <p:cSld>
     <p:spTree>
@@ -27594,7 +26544,7 @@
         <p:spPr>
           <a:xfrm>
             <a:off x="6451931" y="3786274"/>
-            <a:ext cx="5635711" cy="1699183"/>
+            <a:ext cx="5635711" cy="2699457"/>
           </a:xfrm>
           <a:prstGeom prst="rect">
             <a:avLst/>
@@ -27966,6 +26916,25 @@
                 <a:cs typeface="Arial MT"/>
               </a:rPr>
               <a:t>.</a:t>
+            </a:r>
+          </a:p>
+          <a:p>
+            <a:pPr marL="250825" indent="-238125">
+              <a:spcBef>
+                <a:spcPts val="560"/>
+              </a:spcBef>
+              <a:buFontTx/>
+              <a:buChar char="•"/>
+              <a:tabLst>
+                <a:tab pos="250825" algn="l"/>
+              </a:tabLst>
+            </a:pPr>
+            <a:r>
+              <a:rPr lang="en-GB" sz="2000" b="0" spc="-10" dirty="0">
+                <a:latin typeface="Gill Sans" panose="020B0502020104020203"/>
+                <a:cs typeface="Arial MT"/>
+              </a:rPr>
+              <a:t>Note that we reuse s1 and s2 in the two threads, but we can also declare additional semaphores s3 and s4 for use in the last two wait-signal pairs</a:t>
             </a:r>
             <a:endParaRPr sz="2000" b="0" dirty="0">
               <a:latin typeface="Gill Sans" panose="020B0502020104020203"/>
@@ -28348,12 +27317,22 @@
             </a:pPr>
             <a:r>
               <a:rPr sz="1800" b="0" spc="-10" dirty="0">
+                <a:solidFill>
+                  <a:schemeClr val="accent1">
+                    <a:lumMod val="50000"/>
+                  </a:schemeClr>
+                </a:solidFill>
                 <a:latin typeface="Courier New"/>
                 <a:cs typeface="Courier New"/>
               </a:rPr>
               <a:t>s1.wait();</a:t>
             </a:r>
             <a:endParaRPr sz="1800" b="0" dirty="0">
+              <a:solidFill>
+                <a:schemeClr val="accent1">
+                  <a:lumMod val="50000"/>
+                </a:schemeClr>
+              </a:solidFill>
               <a:latin typeface="Courier New"/>
               <a:cs typeface="Courier New"/>
             </a:endParaRPr>
@@ -29862,7 +28841,7 @@
                 <a:cs typeface="Arial"/>
               </a:rPr>
               <a:pPr algn="ctr"/>
-              <a:t>20</a:t>
+              <a:t>19</a:t>
             </a:fld>
             <a:endParaRPr lang="nb-NO" sz="1400" b="0" i="0" dirty="0">
               <a:solidFill>
@@ -29960,7 +28939,1027 @@
 </p:sld>
 </file>
 
-<file path=ppt/slides/slide21.xml><?xml version="1.0" encoding="utf-8"?>
+<file path=ppt/slides/slide2.xml><?xml version="1.0" encoding="utf-8"?>
+<p:sld xmlns:a="http://schemas.openxmlformats.org/drawingml/2006/main" xmlns:r="http://schemas.openxmlformats.org/officeDocument/2006/relationships" xmlns:p="http://schemas.openxmlformats.org/presentationml/2006/main">
+  <p:cSld>
+    <p:spTree>
+      <p:nvGrpSpPr>
+        <p:cNvPr id="1" name=""/>
+        <p:cNvGrpSpPr/>
+        <p:nvPr/>
+      </p:nvGrpSpPr>
+      <p:grpSpPr>
+        <a:xfrm>
+          <a:off x="0" y="0"/>
+          <a:ext cx="0" cy="0"/>
+          <a:chOff x="0" y="0"/>
+          <a:chExt cx="0" cy="0"/>
+        </a:xfrm>
+      </p:grpSpPr>
+      <p:sp>
+        <p:nvSpPr>
+          <p:cNvPr id="2" name="Title 1">
+            <a:extLst>
+              <a:ext uri="{FF2B5EF4-FFF2-40B4-BE49-F238E27FC236}">
+                <a16:creationId xmlns:a16="http://schemas.microsoft.com/office/drawing/2014/main" id="{8F70288D-85B6-6CC3-1FB2-3B04FD5CDA2E}"/>
+              </a:ext>
+            </a:extLst>
+          </p:cNvPr>
+          <p:cNvSpPr>
+            <a:spLocks noGrp="1"/>
+          </p:cNvSpPr>
+          <p:nvPr>
+            <p:ph type="title"/>
+          </p:nvPr>
+        </p:nvSpPr>
+        <p:spPr/>
+        <p:txBody>
+          <a:bodyPr/>
+          <a:lstStyle/>
+          <a:p>
+            <a:r>
+              <a:rPr lang="en-GB" dirty="0"/>
+              <a:t>Concurrency I</a:t>
+            </a:r>
+            <a:endParaRPr lang="en-SE" dirty="0"/>
+          </a:p>
+        </p:txBody>
+      </p:sp>
+      <p:sp>
+        <p:nvSpPr>
+          <p:cNvPr id="3" name="Content Placeholder 2">
+            <a:extLst>
+              <a:ext uri="{FF2B5EF4-FFF2-40B4-BE49-F238E27FC236}">
+                <a16:creationId xmlns:a16="http://schemas.microsoft.com/office/drawing/2014/main" id="{F457968C-088E-2EEC-6B87-D73D14EA4986}"/>
+              </a:ext>
+            </a:extLst>
+          </p:cNvPr>
+          <p:cNvSpPr>
+            <a:spLocks noGrp="1"/>
+          </p:cNvSpPr>
+          <p:nvPr>
+            <p:ph idx="1"/>
+          </p:nvPr>
+        </p:nvSpPr>
+        <p:spPr>
+          <a:xfrm>
+            <a:off x="812800" y="2695986"/>
+            <a:ext cx="10566400" cy="3323814"/>
+          </a:xfrm>
+        </p:spPr>
+        <p:txBody>
+          <a:bodyPr>
+            <a:normAutofit/>
+          </a:bodyPr>
+          <a:lstStyle/>
+          <a:p>
+            <a:r>
+              <a:rPr lang="en-GB" dirty="0"/>
+              <a:t>Consider two concurrent threads T0, T1, which access a shared variable x that has been initialized to 0. There is no mutex protection. </a:t>
+            </a:r>
+          </a:p>
+          <a:p>
+            <a:r>
+              <a:rPr lang="en-GB" dirty="0"/>
+              <a:t>Q: What are the minimum, maximum, and all possible values of x after the two threads have completed execution?</a:t>
+            </a:r>
+          </a:p>
+        </p:txBody>
+      </p:sp>
+      <p:sp>
+        <p:nvSpPr>
+          <p:cNvPr id="4" name="Plassholder for innhold 2">
+            <a:extLst>
+              <a:ext uri="{FF2B5EF4-FFF2-40B4-BE49-F238E27FC236}">
+                <a16:creationId xmlns:a16="http://schemas.microsoft.com/office/drawing/2014/main" id="{758290D7-B791-5228-8CF4-A4FA620CB43A}"/>
+              </a:ext>
+            </a:extLst>
+          </p:cNvPr>
+          <p:cNvSpPr txBox="1">
+            <a:spLocks/>
+          </p:cNvSpPr>
+          <p:nvPr/>
+        </p:nvSpPr>
+        <p:spPr bwMode="auto">
+          <a:xfrm>
+            <a:off x="2514600" y="1419860"/>
+            <a:ext cx="3699076" cy="1276127"/>
+          </a:xfrm>
+          <a:prstGeom prst="rect">
+            <a:avLst/>
+          </a:prstGeom>
+          <a:noFill/>
+          <a:ln>
+            <a:solidFill>
+              <a:schemeClr val="accent1">
+                <a:lumMod val="50000"/>
+              </a:schemeClr>
+            </a:solidFill>
+          </a:ln>
+          <a:effectLst/>
+          <a:extLst>
+            <a:ext uri="{FAA26D3D-D897-4be2-8F04-BA451C77F1D7}">
+              <ma14:placeholderFlag xmlns="" xmlns:ma14="http://schemas.microsoft.com/office/mac/drawingml/2011/main" val="1"/>
+            </a:ext>
+            <a:ext uri="{909E8E84-426E-40dd-AFC4-6F175D3DCCD1}">
+              <a14:hiddenFill xmlns="" xmlns:a14="http://schemas.microsoft.com/office/drawing/2010/main">
+                <a:solidFill>
+                  <a:schemeClr val="bg1"/>
+                </a:solidFill>
+              </a14:hiddenFill>
+            </a:ext>
+            <a:ext uri="{91240B29-F687-4f45-9708-019B960494DF}">
+              <a14:hiddenLine xmlns="" xmlns:a14="http://schemas.microsoft.com/office/drawing/2010/main" w="12700">
+                <a:pattFill prst="narHorz">
+                  <a:fgClr>
+                    <a:schemeClr val="tx1"/>
+                  </a:fgClr>
+                  <a:bgClr>
+                    <a:schemeClr val="bg1"/>
+                  </a:bgClr>
+                </a:pattFill>
+                <a:miter lim="800000"/>
+                <a:headEnd/>
+                <a:tailEnd/>
+              </a14:hiddenLine>
+            </a:ext>
+            <a:ext uri="{AF507438-7753-43e0-B8FC-AC1667EBCBE1}">
+              <a14:hiddenEffects xmlns="" xmlns:a14="http://schemas.microsoft.com/office/drawing/2010/main">
+                <a:effectLst>
+                  <a:outerShdw blurRad="63500" dist="38099" dir="2700000" algn="ctr" rotWithShape="0">
+                    <a:schemeClr val="bg2">
+                      <a:alpha val="74998"/>
+                    </a:schemeClr>
+                  </a:outerShdw>
+                </a:effectLst>
+              </a14:hiddenEffects>
+            </a:ext>
+          </a:extLst>
+        </p:spPr>
+        <p:txBody>
+          <a:bodyPr vert="horz" wrap="square" lIns="90478" tIns="44445" rIns="90478" bIns="44445" numCol="1" anchor="t" anchorCtr="0" compatLnSpc="1">
+            <a:prstTxWarp prst="textNoShape">
+              <a:avLst/>
+            </a:prstTxWarp>
+            <a:noAutofit/>
+          </a:bodyPr>
+          <a:lstStyle>
+            <a:lvl1pPr marL="285750" indent="-285750" algn="l" rtl="0" eaLnBrk="0" fontAlgn="base" hangingPunct="0">
+              <a:lnSpc>
+                <a:spcPct val="90000"/>
+              </a:lnSpc>
+              <a:spcBef>
+                <a:spcPct val="30000"/>
+              </a:spcBef>
+              <a:spcAft>
+                <a:spcPct val="0"/>
+              </a:spcAft>
+              <a:buSzPct val="100000"/>
+              <a:buChar char="•"/>
+              <a:defRPr sz="2400">
+                <a:solidFill>
+                  <a:schemeClr val="tx1"/>
+                </a:solidFill>
+                <a:latin typeface="Gill Sans" charset="0"/>
+                <a:ea typeface="ＭＳ Ｐゴシック" charset="0"/>
+                <a:cs typeface="Gill Sans" charset="0"/>
+              </a:defRPr>
+            </a:lvl1pPr>
+            <a:lvl2pPr marL="685800" indent="-228600" algn="l" rtl="0" eaLnBrk="0" fontAlgn="base" hangingPunct="0">
+              <a:lnSpc>
+                <a:spcPct val="90000"/>
+              </a:lnSpc>
+              <a:spcBef>
+                <a:spcPct val="30000"/>
+              </a:spcBef>
+              <a:spcAft>
+                <a:spcPct val="0"/>
+              </a:spcAft>
+              <a:buSzPct val="100000"/>
+              <a:buChar char="–"/>
+              <a:defRPr sz="2200">
+                <a:solidFill>
+                  <a:schemeClr val="tx1"/>
+                </a:solidFill>
+                <a:latin typeface="Gill Sans" charset="0"/>
+                <a:ea typeface="Gill Sans" charset="0"/>
+                <a:cs typeface="Gill Sans" charset="0"/>
+              </a:defRPr>
+            </a:lvl2pPr>
+            <a:lvl3pPr marL="1143000" indent="-228600" algn="l" rtl="0" eaLnBrk="0" fontAlgn="base" hangingPunct="0">
+              <a:lnSpc>
+                <a:spcPct val="90000"/>
+              </a:lnSpc>
+              <a:spcBef>
+                <a:spcPct val="30000"/>
+              </a:spcBef>
+              <a:spcAft>
+                <a:spcPct val="0"/>
+              </a:spcAft>
+              <a:buSzPct val="100000"/>
+              <a:buChar char="»"/>
+              <a:defRPr sz="2000">
+                <a:solidFill>
+                  <a:schemeClr val="tx1"/>
+                </a:solidFill>
+                <a:latin typeface="Gill Sans" charset="0"/>
+                <a:ea typeface="Gill Sans" charset="0"/>
+                <a:cs typeface="Gill Sans" charset="0"/>
+              </a:defRPr>
+            </a:lvl3pPr>
+            <a:lvl4pPr marL="1543050" indent="-171450" algn="l" rtl="0" eaLnBrk="0" fontAlgn="base" hangingPunct="0">
+              <a:lnSpc>
+                <a:spcPct val="90000"/>
+              </a:lnSpc>
+              <a:spcBef>
+                <a:spcPct val="30000"/>
+              </a:spcBef>
+              <a:spcAft>
+                <a:spcPct val="0"/>
+              </a:spcAft>
+              <a:buSzPct val="100000"/>
+              <a:buChar char="•"/>
+              <a:defRPr sz="2000">
+                <a:solidFill>
+                  <a:schemeClr val="tx1"/>
+                </a:solidFill>
+                <a:latin typeface="Gill Sans" charset="0"/>
+                <a:ea typeface="Gill Sans" charset="0"/>
+                <a:cs typeface="Gill Sans" charset="0"/>
+              </a:defRPr>
+            </a:lvl4pPr>
+            <a:lvl5pPr marL="2000250" indent="-171450" algn="l" rtl="0" eaLnBrk="0" fontAlgn="base" hangingPunct="0">
+              <a:lnSpc>
+                <a:spcPct val="90000"/>
+              </a:lnSpc>
+              <a:spcBef>
+                <a:spcPct val="30000"/>
+              </a:spcBef>
+              <a:spcAft>
+                <a:spcPct val="0"/>
+              </a:spcAft>
+              <a:buSzPct val="100000"/>
+              <a:buChar char="–"/>
+              <a:defRPr sz="2000">
+                <a:solidFill>
+                  <a:schemeClr val="tx1"/>
+                </a:solidFill>
+                <a:latin typeface="Gill Sans" charset="0"/>
+                <a:ea typeface="Gill Sans" charset="0"/>
+                <a:cs typeface="Gill Sans" charset="0"/>
+              </a:defRPr>
+            </a:lvl5pPr>
+            <a:lvl6pPr marL="2457450" indent="-171450" algn="l" rtl="0" eaLnBrk="0" fontAlgn="base" hangingPunct="0">
+              <a:lnSpc>
+                <a:spcPct val="90000"/>
+              </a:lnSpc>
+              <a:spcBef>
+                <a:spcPct val="30000"/>
+              </a:spcBef>
+              <a:spcAft>
+                <a:spcPct val="0"/>
+              </a:spcAft>
+              <a:buSzPct val="100000"/>
+              <a:buChar char="–"/>
+              <a:defRPr sz="2000" b="1">
+                <a:solidFill>
+                  <a:schemeClr val="tx1"/>
+                </a:solidFill>
+                <a:latin typeface="+mn-lt"/>
+              </a:defRPr>
+            </a:lvl6pPr>
+            <a:lvl7pPr marL="2914650" indent="-171450" algn="l" rtl="0" eaLnBrk="0" fontAlgn="base" hangingPunct="0">
+              <a:lnSpc>
+                <a:spcPct val="90000"/>
+              </a:lnSpc>
+              <a:spcBef>
+                <a:spcPct val="30000"/>
+              </a:spcBef>
+              <a:spcAft>
+                <a:spcPct val="0"/>
+              </a:spcAft>
+              <a:buSzPct val="100000"/>
+              <a:buChar char="–"/>
+              <a:defRPr sz="2000" b="1">
+                <a:solidFill>
+                  <a:schemeClr val="tx1"/>
+                </a:solidFill>
+                <a:latin typeface="+mn-lt"/>
+              </a:defRPr>
+            </a:lvl7pPr>
+            <a:lvl8pPr marL="3371850" indent="-171450" algn="l" rtl="0" eaLnBrk="0" fontAlgn="base" hangingPunct="0">
+              <a:lnSpc>
+                <a:spcPct val="90000"/>
+              </a:lnSpc>
+              <a:spcBef>
+                <a:spcPct val="30000"/>
+              </a:spcBef>
+              <a:spcAft>
+                <a:spcPct val="0"/>
+              </a:spcAft>
+              <a:buSzPct val="100000"/>
+              <a:buChar char="–"/>
+              <a:defRPr sz="2000" b="1">
+                <a:solidFill>
+                  <a:schemeClr val="tx1"/>
+                </a:solidFill>
+                <a:latin typeface="+mn-lt"/>
+              </a:defRPr>
+            </a:lvl8pPr>
+            <a:lvl9pPr marL="3829050" indent="-171450" algn="l" rtl="0" eaLnBrk="0" fontAlgn="base" hangingPunct="0">
+              <a:lnSpc>
+                <a:spcPct val="90000"/>
+              </a:lnSpc>
+              <a:spcBef>
+                <a:spcPct val="30000"/>
+              </a:spcBef>
+              <a:spcAft>
+                <a:spcPct val="0"/>
+              </a:spcAft>
+              <a:buSzPct val="100000"/>
+              <a:buChar char="–"/>
+              <a:defRPr sz="2000" b="1">
+                <a:solidFill>
+                  <a:schemeClr val="tx1"/>
+                </a:solidFill>
+                <a:latin typeface="+mn-lt"/>
+              </a:defRPr>
+            </a:lvl9pPr>
+          </a:lstStyle>
+          <a:p>
+            <a:pPr marL="0" indent="0">
+              <a:buFontTx/>
+              <a:buNone/>
+            </a:pPr>
+            <a:r>
+              <a:rPr lang="en-GB" altLang="zh-CN" sz="1700" b="0" kern="0" dirty="0">
+                <a:latin typeface="Courier New" panose="02070309020205020404" pitchFamily="49" charset="0"/>
+                <a:cs typeface="Courier New" panose="02070309020205020404" pitchFamily="49" charset="0"/>
+              </a:rPr>
+              <a:t>//Thread T0</a:t>
+            </a:r>
+          </a:p>
+          <a:p>
+            <a:pPr marL="0" indent="0">
+              <a:buFontTx/>
+              <a:buNone/>
+            </a:pPr>
+            <a:r>
+              <a:rPr lang="en-GB" altLang="zh-CN" sz="1700" b="0" kern="0" dirty="0">
+                <a:latin typeface="Courier New" panose="02070309020205020404" pitchFamily="49" charset="0"/>
+                <a:cs typeface="Courier New" panose="02070309020205020404" pitchFamily="49" charset="0"/>
+              </a:rPr>
+              <a:t>for (int i=0; i&lt;5; i++) {  </a:t>
+            </a:r>
+          </a:p>
+          <a:p>
+            <a:pPr marL="0" indent="0">
+              <a:buFontTx/>
+              <a:buNone/>
+            </a:pPr>
+            <a:r>
+              <a:rPr lang="en-GB" altLang="zh-CN" sz="1700" b="0" kern="0" dirty="0">
+                <a:latin typeface="Courier New" panose="02070309020205020404" pitchFamily="49" charset="0"/>
+                <a:cs typeface="Courier New" panose="02070309020205020404" pitchFamily="49" charset="0"/>
+              </a:rPr>
+              <a:t>   x = x + 1;</a:t>
+            </a:r>
+          </a:p>
+          <a:p>
+            <a:pPr marL="0" indent="0">
+              <a:buFontTx/>
+              <a:buNone/>
+            </a:pPr>
+            <a:r>
+              <a:rPr lang="en-GB" altLang="zh-CN" sz="1700" b="0" kern="0" dirty="0">
+                <a:latin typeface="Courier New" panose="02070309020205020404" pitchFamily="49" charset="0"/>
+                <a:cs typeface="Courier New" panose="02070309020205020404" pitchFamily="49" charset="0"/>
+              </a:rPr>
+              <a:t>}</a:t>
+            </a:r>
+          </a:p>
+        </p:txBody>
+      </p:sp>
+      <p:sp>
+        <p:nvSpPr>
+          <p:cNvPr id="5" name="Plassholder for innhold 2">
+            <a:extLst>
+              <a:ext uri="{FF2B5EF4-FFF2-40B4-BE49-F238E27FC236}">
+                <a16:creationId xmlns:a16="http://schemas.microsoft.com/office/drawing/2014/main" id="{9D5B75F7-DF91-87EF-42D7-37808B097603}"/>
+              </a:ext>
+            </a:extLst>
+          </p:cNvPr>
+          <p:cNvSpPr txBox="1">
+            <a:spLocks/>
+          </p:cNvSpPr>
+          <p:nvPr/>
+        </p:nvSpPr>
+        <p:spPr bwMode="auto">
+          <a:xfrm>
+            <a:off x="6324600" y="1419859"/>
+            <a:ext cx="3699076" cy="1276127"/>
+          </a:xfrm>
+          <a:prstGeom prst="rect">
+            <a:avLst/>
+          </a:prstGeom>
+          <a:noFill/>
+          <a:ln>
+            <a:solidFill>
+              <a:schemeClr val="accent1">
+                <a:lumMod val="50000"/>
+              </a:schemeClr>
+            </a:solidFill>
+          </a:ln>
+          <a:effectLst/>
+          <a:extLst>
+            <a:ext uri="{FAA26D3D-D897-4be2-8F04-BA451C77F1D7}">
+              <ma14:placeholderFlag xmlns="" xmlns:ma14="http://schemas.microsoft.com/office/mac/drawingml/2011/main" val="1"/>
+            </a:ext>
+            <a:ext uri="{909E8E84-426E-40dd-AFC4-6F175D3DCCD1}">
+              <a14:hiddenFill xmlns="" xmlns:a14="http://schemas.microsoft.com/office/drawing/2010/main">
+                <a:solidFill>
+                  <a:schemeClr val="bg1"/>
+                </a:solidFill>
+              </a14:hiddenFill>
+            </a:ext>
+            <a:ext uri="{91240B29-F687-4f45-9708-019B960494DF}">
+              <a14:hiddenLine xmlns="" xmlns:a14="http://schemas.microsoft.com/office/drawing/2010/main" w="12700">
+                <a:pattFill prst="narHorz">
+                  <a:fgClr>
+                    <a:schemeClr val="tx1"/>
+                  </a:fgClr>
+                  <a:bgClr>
+                    <a:schemeClr val="bg1"/>
+                  </a:bgClr>
+                </a:pattFill>
+                <a:miter lim="800000"/>
+                <a:headEnd/>
+                <a:tailEnd/>
+              </a14:hiddenLine>
+            </a:ext>
+            <a:ext uri="{AF507438-7753-43e0-B8FC-AC1667EBCBE1}">
+              <a14:hiddenEffects xmlns="" xmlns:a14="http://schemas.microsoft.com/office/drawing/2010/main">
+                <a:effectLst>
+                  <a:outerShdw blurRad="63500" dist="38099" dir="2700000" algn="ctr" rotWithShape="0">
+                    <a:schemeClr val="bg2">
+                      <a:alpha val="74998"/>
+                    </a:schemeClr>
+                  </a:outerShdw>
+                </a:effectLst>
+              </a14:hiddenEffects>
+            </a:ext>
+          </a:extLst>
+        </p:spPr>
+        <p:txBody>
+          <a:bodyPr vert="horz" wrap="square" lIns="90478" tIns="44445" rIns="90478" bIns="44445" numCol="1" anchor="t" anchorCtr="0" compatLnSpc="1">
+            <a:prstTxWarp prst="textNoShape">
+              <a:avLst/>
+            </a:prstTxWarp>
+            <a:noAutofit/>
+          </a:bodyPr>
+          <a:lstStyle>
+            <a:lvl1pPr marL="285750" indent="-285750" algn="l" rtl="0" eaLnBrk="0" fontAlgn="base" hangingPunct="0">
+              <a:lnSpc>
+                <a:spcPct val="90000"/>
+              </a:lnSpc>
+              <a:spcBef>
+                <a:spcPct val="30000"/>
+              </a:spcBef>
+              <a:spcAft>
+                <a:spcPct val="0"/>
+              </a:spcAft>
+              <a:buSzPct val="100000"/>
+              <a:buChar char="•"/>
+              <a:defRPr sz="2400">
+                <a:solidFill>
+                  <a:schemeClr val="tx1"/>
+                </a:solidFill>
+                <a:latin typeface="Gill Sans" charset="0"/>
+                <a:ea typeface="ＭＳ Ｐゴシック" charset="0"/>
+                <a:cs typeface="Gill Sans" charset="0"/>
+              </a:defRPr>
+            </a:lvl1pPr>
+            <a:lvl2pPr marL="685800" indent="-228600" algn="l" rtl="0" eaLnBrk="0" fontAlgn="base" hangingPunct="0">
+              <a:lnSpc>
+                <a:spcPct val="90000"/>
+              </a:lnSpc>
+              <a:spcBef>
+                <a:spcPct val="30000"/>
+              </a:spcBef>
+              <a:spcAft>
+                <a:spcPct val="0"/>
+              </a:spcAft>
+              <a:buSzPct val="100000"/>
+              <a:buChar char="–"/>
+              <a:defRPr sz="2200">
+                <a:solidFill>
+                  <a:schemeClr val="tx1"/>
+                </a:solidFill>
+                <a:latin typeface="Gill Sans" charset="0"/>
+                <a:ea typeface="Gill Sans" charset="0"/>
+                <a:cs typeface="Gill Sans" charset="0"/>
+              </a:defRPr>
+            </a:lvl2pPr>
+            <a:lvl3pPr marL="1143000" indent="-228600" algn="l" rtl="0" eaLnBrk="0" fontAlgn="base" hangingPunct="0">
+              <a:lnSpc>
+                <a:spcPct val="90000"/>
+              </a:lnSpc>
+              <a:spcBef>
+                <a:spcPct val="30000"/>
+              </a:spcBef>
+              <a:spcAft>
+                <a:spcPct val="0"/>
+              </a:spcAft>
+              <a:buSzPct val="100000"/>
+              <a:buChar char="»"/>
+              <a:defRPr sz="2000">
+                <a:solidFill>
+                  <a:schemeClr val="tx1"/>
+                </a:solidFill>
+                <a:latin typeface="Gill Sans" charset="0"/>
+                <a:ea typeface="Gill Sans" charset="0"/>
+                <a:cs typeface="Gill Sans" charset="0"/>
+              </a:defRPr>
+            </a:lvl3pPr>
+            <a:lvl4pPr marL="1543050" indent="-171450" algn="l" rtl="0" eaLnBrk="0" fontAlgn="base" hangingPunct="0">
+              <a:lnSpc>
+                <a:spcPct val="90000"/>
+              </a:lnSpc>
+              <a:spcBef>
+                <a:spcPct val="30000"/>
+              </a:spcBef>
+              <a:spcAft>
+                <a:spcPct val="0"/>
+              </a:spcAft>
+              <a:buSzPct val="100000"/>
+              <a:buChar char="•"/>
+              <a:defRPr sz="2000">
+                <a:solidFill>
+                  <a:schemeClr val="tx1"/>
+                </a:solidFill>
+                <a:latin typeface="Gill Sans" charset="0"/>
+                <a:ea typeface="Gill Sans" charset="0"/>
+                <a:cs typeface="Gill Sans" charset="0"/>
+              </a:defRPr>
+            </a:lvl4pPr>
+            <a:lvl5pPr marL="2000250" indent="-171450" algn="l" rtl="0" eaLnBrk="0" fontAlgn="base" hangingPunct="0">
+              <a:lnSpc>
+                <a:spcPct val="90000"/>
+              </a:lnSpc>
+              <a:spcBef>
+                <a:spcPct val="30000"/>
+              </a:spcBef>
+              <a:spcAft>
+                <a:spcPct val="0"/>
+              </a:spcAft>
+              <a:buSzPct val="100000"/>
+              <a:buChar char="–"/>
+              <a:defRPr sz="2000">
+                <a:solidFill>
+                  <a:schemeClr val="tx1"/>
+                </a:solidFill>
+                <a:latin typeface="Gill Sans" charset="0"/>
+                <a:ea typeface="Gill Sans" charset="0"/>
+                <a:cs typeface="Gill Sans" charset="0"/>
+              </a:defRPr>
+            </a:lvl5pPr>
+            <a:lvl6pPr marL="2457450" indent="-171450" algn="l" rtl="0" eaLnBrk="0" fontAlgn="base" hangingPunct="0">
+              <a:lnSpc>
+                <a:spcPct val="90000"/>
+              </a:lnSpc>
+              <a:spcBef>
+                <a:spcPct val="30000"/>
+              </a:spcBef>
+              <a:spcAft>
+                <a:spcPct val="0"/>
+              </a:spcAft>
+              <a:buSzPct val="100000"/>
+              <a:buChar char="–"/>
+              <a:defRPr sz="2000" b="1">
+                <a:solidFill>
+                  <a:schemeClr val="tx1"/>
+                </a:solidFill>
+                <a:latin typeface="+mn-lt"/>
+              </a:defRPr>
+            </a:lvl6pPr>
+            <a:lvl7pPr marL="2914650" indent="-171450" algn="l" rtl="0" eaLnBrk="0" fontAlgn="base" hangingPunct="0">
+              <a:lnSpc>
+                <a:spcPct val="90000"/>
+              </a:lnSpc>
+              <a:spcBef>
+                <a:spcPct val="30000"/>
+              </a:spcBef>
+              <a:spcAft>
+                <a:spcPct val="0"/>
+              </a:spcAft>
+              <a:buSzPct val="100000"/>
+              <a:buChar char="–"/>
+              <a:defRPr sz="2000" b="1">
+                <a:solidFill>
+                  <a:schemeClr val="tx1"/>
+                </a:solidFill>
+                <a:latin typeface="+mn-lt"/>
+              </a:defRPr>
+            </a:lvl7pPr>
+            <a:lvl8pPr marL="3371850" indent="-171450" algn="l" rtl="0" eaLnBrk="0" fontAlgn="base" hangingPunct="0">
+              <a:lnSpc>
+                <a:spcPct val="90000"/>
+              </a:lnSpc>
+              <a:spcBef>
+                <a:spcPct val="30000"/>
+              </a:spcBef>
+              <a:spcAft>
+                <a:spcPct val="0"/>
+              </a:spcAft>
+              <a:buSzPct val="100000"/>
+              <a:buChar char="–"/>
+              <a:defRPr sz="2000" b="1">
+                <a:solidFill>
+                  <a:schemeClr val="tx1"/>
+                </a:solidFill>
+                <a:latin typeface="+mn-lt"/>
+              </a:defRPr>
+            </a:lvl8pPr>
+            <a:lvl9pPr marL="3829050" indent="-171450" algn="l" rtl="0" eaLnBrk="0" fontAlgn="base" hangingPunct="0">
+              <a:lnSpc>
+                <a:spcPct val="90000"/>
+              </a:lnSpc>
+              <a:spcBef>
+                <a:spcPct val="30000"/>
+              </a:spcBef>
+              <a:spcAft>
+                <a:spcPct val="0"/>
+              </a:spcAft>
+              <a:buSzPct val="100000"/>
+              <a:buChar char="–"/>
+              <a:defRPr sz="2000" b="1">
+                <a:solidFill>
+                  <a:schemeClr val="tx1"/>
+                </a:solidFill>
+                <a:latin typeface="+mn-lt"/>
+              </a:defRPr>
+            </a:lvl9pPr>
+          </a:lstStyle>
+          <a:p>
+            <a:pPr marL="0" indent="0">
+              <a:buFontTx/>
+              <a:buNone/>
+            </a:pPr>
+            <a:r>
+              <a:rPr lang="en-GB" altLang="zh-CN" sz="1700" b="0" kern="0" dirty="0">
+                <a:latin typeface="Courier New" panose="02070309020205020404" pitchFamily="49" charset="0"/>
+                <a:cs typeface="Courier New" panose="02070309020205020404" pitchFamily="49" charset="0"/>
+              </a:rPr>
+              <a:t>//Thread T1</a:t>
+            </a:r>
+          </a:p>
+          <a:p>
+            <a:pPr marL="0" indent="0">
+              <a:buFontTx/>
+              <a:buNone/>
+            </a:pPr>
+            <a:r>
+              <a:rPr lang="en-GB" altLang="zh-CN" sz="1700" b="0" kern="0" dirty="0">
+                <a:latin typeface="Courier New" panose="02070309020205020404" pitchFamily="49" charset="0"/>
+                <a:cs typeface="Courier New" panose="02070309020205020404" pitchFamily="49" charset="0"/>
+              </a:rPr>
+              <a:t>for (int j=0; j&lt;5; </a:t>
+            </a:r>
+            <a:r>
+              <a:rPr lang="en-GB" altLang="zh-CN" sz="1700" b="0" kern="0" dirty="0" err="1">
+                <a:latin typeface="Courier New" panose="02070309020205020404" pitchFamily="49" charset="0"/>
+                <a:cs typeface="Courier New" panose="02070309020205020404" pitchFamily="49" charset="0"/>
+              </a:rPr>
+              <a:t>j++</a:t>
+            </a:r>
+            <a:r>
+              <a:rPr lang="en-GB" altLang="zh-CN" sz="1700" b="0" kern="0" dirty="0">
+                <a:latin typeface="Courier New" panose="02070309020205020404" pitchFamily="49" charset="0"/>
+                <a:cs typeface="Courier New" panose="02070309020205020404" pitchFamily="49" charset="0"/>
+              </a:rPr>
+              <a:t>) {  </a:t>
+            </a:r>
+          </a:p>
+          <a:p>
+            <a:pPr marL="0" indent="0">
+              <a:buFontTx/>
+              <a:buNone/>
+            </a:pPr>
+            <a:r>
+              <a:rPr lang="en-GB" altLang="zh-CN" sz="1700" b="0" kern="0" dirty="0">
+                <a:latin typeface="Courier New" panose="02070309020205020404" pitchFamily="49" charset="0"/>
+                <a:cs typeface="Courier New" panose="02070309020205020404" pitchFamily="49" charset="0"/>
+              </a:rPr>
+              <a:t>   x = x + 2;</a:t>
+            </a:r>
+          </a:p>
+          <a:p>
+            <a:pPr marL="0" indent="0">
+              <a:buFontTx/>
+              <a:buNone/>
+            </a:pPr>
+            <a:r>
+              <a:rPr lang="en-GB" altLang="zh-CN" sz="1700" b="0" kern="0" dirty="0">
+                <a:latin typeface="Courier New" panose="02070309020205020404" pitchFamily="49" charset="0"/>
+                <a:cs typeface="Courier New" panose="02070309020205020404" pitchFamily="49" charset="0"/>
+              </a:rPr>
+              <a:t>}</a:t>
+            </a:r>
+          </a:p>
+        </p:txBody>
+      </p:sp>
+      <p:sp>
+        <p:nvSpPr>
+          <p:cNvPr id="6" name="Plassholder for innhold 2">
+            <a:extLst>
+              <a:ext uri="{FF2B5EF4-FFF2-40B4-BE49-F238E27FC236}">
+                <a16:creationId xmlns:a16="http://schemas.microsoft.com/office/drawing/2014/main" id="{2D37079E-C01B-98FE-3AB3-789AD906045B}"/>
+              </a:ext>
+            </a:extLst>
+          </p:cNvPr>
+          <p:cNvSpPr txBox="1">
+            <a:spLocks/>
+          </p:cNvSpPr>
+          <p:nvPr/>
+        </p:nvSpPr>
+        <p:spPr bwMode="auto">
+          <a:xfrm>
+            <a:off x="5213551" y="836112"/>
+            <a:ext cx="2000250" cy="446762"/>
+          </a:xfrm>
+          <a:prstGeom prst="rect">
+            <a:avLst/>
+          </a:prstGeom>
+          <a:noFill/>
+          <a:ln>
+            <a:solidFill>
+              <a:schemeClr val="tx1"/>
+            </a:solidFill>
+          </a:ln>
+          <a:effectLst/>
+          <a:extLst>
+            <a:ext uri="{FAA26D3D-D897-4be2-8F04-BA451C77F1D7}">
+              <ma14:placeholderFlag xmlns="" xmlns:ma14="http://schemas.microsoft.com/office/mac/drawingml/2011/main" val="1"/>
+            </a:ext>
+            <a:ext uri="{909E8E84-426E-40dd-AFC4-6F175D3DCCD1}">
+              <a14:hiddenFill xmlns="" xmlns:a14="http://schemas.microsoft.com/office/drawing/2010/main">
+                <a:solidFill>
+                  <a:schemeClr val="bg1"/>
+                </a:solidFill>
+              </a14:hiddenFill>
+            </a:ext>
+            <a:ext uri="{91240B29-F687-4f45-9708-019B960494DF}">
+              <a14:hiddenLine xmlns="" xmlns:a14="http://schemas.microsoft.com/office/drawing/2010/main" w="12700">
+                <a:pattFill prst="narHorz">
+                  <a:fgClr>
+                    <a:schemeClr val="tx1"/>
+                  </a:fgClr>
+                  <a:bgClr>
+                    <a:schemeClr val="bg1"/>
+                  </a:bgClr>
+                </a:pattFill>
+                <a:miter lim="800000"/>
+                <a:headEnd/>
+                <a:tailEnd/>
+              </a14:hiddenLine>
+            </a:ext>
+            <a:ext uri="{AF507438-7753-43e0-B8FC-AC1667EBCBE1}">
+              <a14:hiddenEffects xmlns="" xmlns:a14="http://schemas.microsoft.com/office/drawing/2010/main">
+                <a:effectLst>
+                  <a:outerShdw blurRad="63500" dist="38099" dir="2700000" algn="ctr" rotWithShape="0">
+                    <a:schemeClr val="bg2">
+                      <a:alpha val="74998"/>
+                    </a:schemeClr>
+                  </a:outerShdw>
+                </a:effectLst>
+              </a14:hiddenEffects>
+            </a:ext>
+          </a:extLst>
+        </p:spPr>
+        <p:txBody>
+          <a:bodyPr vert="horz" wrap="square" lIns="90478" tIns="44445" rIns="90478" bIns="44445" numCol="1" anchor="t" anchorCtr="0" compatLnSpc="1">
+            <a:prstTxWarp prst="textNoShape">
+              <a:avLst/>
+            </a:prstTxWarp>
+            <a:normAutofit/>
+          </a:bodyPr>
+          <a:lstStyle>
+            <a:lvl1pPr marL="285750" indent="-285750" algn="l" rtl="0" eaLnBrk="0" fontAlgn="base" hangingPunct="0">
+              <a:lnSpc>
+                <a:spcPct val="90000"/>
+              </a:lnSpc>
+              <a:spcBef>
+                <a:spcPct val="30000"/>
+              </a:spcBef>
+              <a:spcAft>
+                <a:spcPct val="0"/>
+              </a:spcAft>
+              <a:buSzPct val="100000"/>
+              <a:buChar char="•"/>
+              <a:defRPr sz="2400">
+                <a:solidFill>
+                  <a:schemeClr val="tx1"/>
+                </a:solidFill>
+                <a:latin typeface="Gill Sans" charset="0"/>
+                <a:ea typeface="ＭＳ Ｐゴシック" charset="0"/>
+                <a:cs typeface="Gill Sans" charset="0"/>
+              </a:defRPr>
+            </a:lvl1pPr>
+            <a:lvl2pPr marL="685800" indent="-228600" algn="l" rtl="0" eaLnBrk="0" fontAlgn="base" hangingPunct="0">
+              <a:lnSpc>
+                <a:spcPct val="90000"/>
+              </a:lnSpc>
+              <a:spcBef>
+                <a:spcPct val="30000"/>
+              </a:spcBef>
+              <a:spcAft>
+                <a:spcPct val="0"/>
+              </a:spcAft>
+              <a:buSzPct val="100000"/>
+              <a:buChar char="–"/>
+              <a:defRPr sz="2200">
+                <a:solidFill>
+                  <a:schemeClr val="tx1"/>
+                </a:solidFill>
+                <a:latin typeface="Gill Sans" charset="0"/>
+                <a:ea typeface="Gill Sans" charset="0"/>
+                <a:cs typeface="Gill Sans" charset="0"/>
+              </a:defRPr>
+            </a:lvl2pPr>
+            <a:lvl3pPr marL="1143000" indent="-228600" algn="l" rtl="0" eaLnBrk="0" fontAlgn="base" hangingPunct="0">
+              <a:lnSpc>
+                <a:spcPct val="90000"/>
+              </a:lnSpc>
+              <a:spcBef>
+                <a:spcPct val="30000"/>
+              </a:spcBef>
+              <a:spcAft>
+                <a:spcPct val="0"/>
+              </a:spcAft>
+              <a:buSzPct val="100000"/>
+              <a:buChar char="»"/>
+              <a:defRPr sz="2000">
+                <a:solidFill>
+                  <a:schemeClr val="tx1"/>
+                </a:solidFill>
+                <a:latin typeface="Gill Sans" charset="0"/>
+                <a:ea typeface="Gill Sans" charset="0"/>
+                <a:cs typeface="Gill Sans" charset="0"/>
+              </a:defRPr>
+            </a:lvl3pPr>
+            <a:lvl4pPr marL="1543050" indent="-171450" algn="l" rtl="0" eaLnBrk="0" fontAlgn="base" hangingPunct="0">
+              <a:lnSpc>
+                <a:spcPct val="90000"/>
+              </a:lnSpc>
+              <a:spcBef>
+                <a:spcPct val="30000"/>
+              </a:spcBef>
+              <a:spcAft>
+                <a:spcPct val="0"/>
+              </a:spcAft>
+              <a:buSzPct val="100000"/>
+              <a:buChar char="•"/>
+              <a:defRPr sz="2000">
+                <a:solidFill>
+                  <a:schemeClr val="tx1"/>
+                </a:solidFill>
+                <a:latin typeface="Gill Sans" charset="0"/>
+                <a:ea typeface="Gill Sans" charset="0"/>
+                <a:cs typeface="Gill Sans" charset="0"/>
+              </a:defRPr>
+            </a:lvl4pPr>
+            <a:lvl5pPr marL="2000250" indent="-171450" algn="l" rtl="0" eaLnBrk="0" fontAlgn="base" hangingPunct="0">
+              <a:lnSpc>
+                <a:spcPct val="90000"/>
+              </a:lnSpc>
+              <a:spcBef>
+                <a:spcPct val="30000"/>
+              </a:spcBef>
+              <a:spcAft>
+                <a:spcPct val="0"/>
+              </a:spcAft>
+              <a:buSzPct val="100000"/>
+              <a:buChar char="–"/>
+              <a:defRPr sz="2000">
+                <a:solidFill>
+                  <a:schemeClr val="tx1"/>
+                </a:solidFill>
+                <a:latin typeface="Gill Sans" charset="0"/>
+                <a:ea typeface="Gill Sans" charset="0"/>
+                <a:cs typeface="Gill Sans" charset="0"/>
+              </a:defRPr>
+            </a:lvl5pPr>
+            <a:lvl6pPr marL="2457450" indent="-171450" algn="l" rtl="0" eaLnBrk="0" fontAlgn="base" hangingPunct="0">
+              <a:lnSpc>
+                <a:spcPct val="90000"/>
+              </a:lnSpc>
+              <a:spcBef>
+                <a:spcPct val="30000"/>
+              </a:spcBef>
+              <a:spcAft>
+                <a:spcPct val="0"/>
+              </a:spcAft>
+              <a:buSzPct val="100000"/>
+              <a:buChar char="–"/>
+              <a:defRPr sz="2000" b="1">
+                <a:solidFill>
+                  <a:schemeClr val="tx1"/>
+                </a:solidFill>
+                <a:latin typeface="+mn-lt"/>
+              </a:defRPr>
+            </a:lvl6pPr>
+            <a:lvl7pPr marL="2914650" indent="-171450" algn="l" rtl="0" eaLnBrk="0" fontAlgn="base" hangingPunct="0">
+              <a:lnSpc>
+                <a:spcPct val="90000"/>
+              </a:lnSpc>
+              <a:spcBef>
+                <a:spcPct val="30000"/>
+              </a:spcBef>
+              <a:spcAft>
+                <a:spcPct val="0"/>
+              </a:spcAft>
+              <a:buSzPct val="100000"/>
+              <a:buChar char="–"/>
+              <a:defRPr sz="2000" b="1">
+                <a:solidFill>
+                  <a:schemeClr val="tx1"/>
+                </a:solidFill>
+                <a:latin typeface="+mn-lt"/>
+              </a:defRPr>
+            </a:lvl7pPr>
+            <a:lvl8pPr marL="3371850" indent="-171450" algn="l" rtl="0" eaLnBrk="0" fontAlgn="base" hangingPunct="0">
+              <a:lnSpc>
+                <a:spcPct val="90000"/>
+              </a:lnSpc>
+              <a:spcBef>
+                <a:spcPct val="30000"/>
+              </a:spcBef>
+              <a:spcAft>
+                <a:spcPct val="0"/>
+              </a:spcAft>
+              <a:buSzPct val="100000"/>
+              <a:buChar char="–"/>
+              <a:defRPr sz="2000" b="1">
+                <a:solidFill>
+                  <a:schemeClr val="tx1"/>
+                </a:solidFill>
+                <a:latin typeface="+mn-lt"/>
+              </a:defRPr>
+            </a:lvl8pPr>
+            <a:lvl9pPr marL="3829050" indent="-171450" algn="l" rtl="0" eaLnBrk="0" fontAlgn="base" hangingPunct="0">
+              <a:lnSpc>
+                <a:spcPct val="90000"/>
+              </a:lnSpc>
+              <a:spcBef>
+                <a:spcPct val="30000"/>
+              </a:spcBef>
+              <a:spcAft>
+                <a:spcPct val="0"/>
+              </a:spcAft>
+              <a:buSzPct val="100000"/>
+              <a:buChar char="–"/>
+              <a:defRPr sz="2000" b="1">
+                <a:solidFill>
+                  <a:schemeClr val="tx1"/>
+                </a:solidFill>
+                <a:latin typeface="+mn-lt"/>
+              </a:defRPr>
+            </a:lvl9pPr>
+          </a:lstStyle>
+          <a:p>
+            <a:pPr marL="0" indent="0">
+              <a:buFontTx/>
+              <a:buNone/>
+            </a:pPr>
+            <a:r>
+              <a:rPr lang="en-GB" altLang="zh-CN" sz="1700" b="0" kern="0" dirty="0">
+                <a:latin typeface="Courier New" panose="02070309020205020404" pitchFamily="49" charset="0"/>
+                <a:cs typeface="Courier New" panose="02070309020205020404" pitchFamily="49" charset="0"/>
+              </a:rPr>
+              <a:t>int x = 0;</a:t>
+            </a:r>
+            <a:endParaRPr lang="en-US" altLang="zh-CN" sz="1700" b="0" kern="0" dirty="0">
+              <a:latin typeface="Courier New" panose="02070309020205020404" pitchFamily="49" charset="0"/>
+              <a:cs typeface="Courier New" panose="02070309020205020404" pitchFamily="49" charset="0"/>
+            </a:endParaRPr>
+          </a:p>
+        </p:txBody>
+      </p:sp>
+    </p:spTree>
+    <p:extLst>
+      <p:ext uri="{BB962C8B-B14F-4D97-AF65-F5344CB8AC3E}">
+        <p14:creationId xmlns:p14="http://schemas.microsoft.com/office/powerpoint/2010/main" val="2751476572"/>
+      </p:ext>
+    </p:extLst>
+  </p:cSld>
+  <p:clrMapOvr>
+    <a:masterClrMapping/>
+  </p:clrMapOvr>
+  <p:transition/>
+</p:sld>
+</file>
+
+<file path=ppt/slides/slide20.xml><?xml version="1.0" encoding="utf-8"?>
 <p:sld xmlns:a="http://schemas.openxmlformats.org/drawingml/2006/main" xmlns:r="http://schemas.openxmlformats.org/officeDocument/2006/relationships" xmlns:p="http://schemas.openxmlformats.org/presentationml/2006/main">
   <p:cSld>
     <p:spTree>
@@ -30483,7 +30482,7 @@
 </p:sld>
 </file>
 
-<file path=ppt/slides/slide22.xml><?xml version="1.0" encoding="utf-8"?>
+<file path=ppt/slides/slide21.xml><?xml version="1.0" encoding="utf-8"?>
 <p:sld xmlns:a="http://schemas.openxmlformats.org/drawingml/2006/main" xmlns:r="http://schemas.openxmlformats.org/officeDocument/2006/relationships" xmlns:p="http://schemas.openxmlformats.org/presentationml/2006/main">
   <p:cSld>
     <p:spTree>
@@ -30576,7 +30575,7 @@
           <a:p>
             <a:r>
               <a:rPr lang="en-GB" dirty="0"/>
-              <a:t>Solution 2 (right): s2 has initial value 1, so f2 calls S2.wait() and runs first. The rest of the same as Solution 1. You can see that initializing s2=0 has the same effect as initializing s2=1 and let f2 call S2.wait() first. So Solution 1 is better with one less call to wait().</a:t>
+              <a:t>Solution 2 (right): S2 has initial value 1, so f2 calls S2.wait() and runs first. The rest of the same as Solution 1. You can see that initializing S2=0 has the same effect as initializing S2=1 and let f2 call S2.wait() first. So Solution 1 is better with one less call to wait().</a:t>
             </a:r>
           </a:p>
         </p:txBody>
@@ -31933,7 +31932,7 @@
 </p:sld>
 </file>
 
-<file path=ppt/slides/slide23.xml><?xml version="1.0" encoding="utf-8"?>
+<file path=ppt/slides/slide22.xml><?xml version="1.0" encoding="utf-8"?>
 <p:sld xmlns:a="http://schemas.openxmlformats.org/drawingml/2006/main" xmlns:r="http://schemas.openxmlformats.org/officeDocument/2006/relationships" xmlns:p="http://schemas.openxmlformats.org/presentationml/2006/main">
   <p:cSld>
     <p:spTree>
@@ -31959,7 +31958,7 @@
         <p:spPr>
           <a:xfrm>
             <a:off x="1219200" y="3400424"/>
-            <a:ext cx="9753600" cy="2111475"/>
+            <a:ext cx="9753600" cy="3381054"/>
           </a:xfrm>
           <a:prstGeom prst="rect">
             <a:avLst/>
@@ -32656,6 +32655,9 @@
             </a:pPr>
             <a:r>
               <a:rPr sz="2000" b="0" dirty="0">
+                <a:solidFill>
+                  <a:srgbClr val="FF0000"/>
+                </a:solidFill>
                 <a:latin typeface="Gill Sans" panose="020B0502020104020203"/>
                 <a:cs typeface="Arial MT"/>
               </a:rPr>
@@ -32663,6 +32665,9 @@
             </a:r>
             <a:r>
               <a:rPr sz="2000" b="0" spc="-25" dirty="0">
+                <a:solidFill>
+                  <a:srgbClr val="FF0000"/>
+                </a:solidFill>
                 <a:latin typeface="Gill Sans" panose="020B0502020104020203"/>
                 <a:cs typeface="Arial MT"/>
               </a:rPr>
@@ -32670,6 +32675,9 @@
             </a:r>
             <a:r>
               <a:rPr sz="2000" b="0" dirty="0">
+                <a:solidFill>
+                  <a:srgbClr val="FF0000"/>
+                </a:solidFill>
                 <a:latin typeface="Gill Sans" panose="020B0502020104020203"/>
                 <a:cs typeface="Arial MT"/>
               </a:rPr>
@@ -32677,6 +32685,9 @@
             </a:r>
             <a:r>
               <a:rPr sz="2000" b="0" spc="-30" dirty="0">
+                <a:solidFill>
+                  <a:srgbClr val="FF0000"/>
+                </a:solidFill>
                 <a:latin typeface="Gill Sans" panose="020B0502020104020203"/>
                 <a:cs typeface="Arial MT"/>
               </a:rPr>
@@ -32684,6 +32695,9 @@
             </a:r>
             <a:r>
               <a:rPr sz="2000" b="0" dirty="0">
+                <a:solidFill>
+                  <a:srgbClr val="FF0000"/>
+                </a:solidFill>
                 <a:latin typeface="Gill Sans" panose="020B0502020104020203"/>
                 <a:cs typeface="Arial MT"/>
               </a:rPr>
@@ -32691,6 +32705,9 @@
             </a:r>
             <a:r>
               <a:rPr sz="2000" b="0" spc="-25" dirty="0">
+                <a:solidFill>
+                  <a:srgbClr val="FF0000"/>
+                </a:solidFill>
                 <a:latin typeface="Gill Sans" panose="020B0502020104020203"/>
                 <a:cs typeface="Arial MT"/>
               </a:rPr>
@@ -32698,6 +32715,9 @@
             </a:r>
             <a:r>
               <a:rPr sz="2000" b="0" dirty="0">
+                <a:solidFill>
+                  <a:srgbClr val="FF0000"/>
+                </a:solidFill>
                 <a:latin typeface="Gill Sans" panose="020B0502020104020203"/>
                 <a:cs typeface="Arial MT"/>
               </a:rPr>
@@ -32705,6 +32725,9 @@
             </a:r>
             <a:r>
               <a:rPr sz="2000" b="0" spc="-25" dirty="0">
+                <a:solidFill>
+                  <a:srgbClr val="FF0000"/>
+                </a:solidFill>
                 <a:latin typeface="Gill Sans" panose="020B0502020104020203"/>
                 <a:cs typeface="Arial MT"/>
               </a:rPr>
@@ -32712,6 +32735,9 @@
             </a:r>
             <a:r>
               <a:rPr sz="2000" b="0" dirty="0">
+                <a:solidFill>
+                  <a:srgbClr val="FF0000"/>
+                </a:solidFill>
                 <a:latin typeface="Gill Sans" panose="020B0502020104020203"/>
                 <a:cs typeface="Arial MT"/>
               </a:rPr>
@@ -32719,6 +32745,9 @@
             </a:r>
             <a:r>
               <a:rPr sz="2000" b="0" spc="-25" dirty="0">
+                <a:solidFill>
+                  <a:srgbClr val="FF0000"/>
+                </a:solidFill>
                 <a:latin typeface="Gill Sans" panose="020B0502020104020203"/>
                 <a:cs typeface="Arial MT"/>
               </a:rPr>
@@ -32726,6 +32755,9 @@
             </a:r>
             <a:r>
               <a:rPr sz="2000" b="0" dirty="0">
+                <a:solidFill>
+                  <a:srgbClr val="FF0000"/>
+                </a:solidFill>
                 <a:latin typeface="Gill Sans" panose="020B0502020104020203"/>
                 <a:cs typeface="Arial MT"/>
               </a:rPr>
@@ -32733,6 +32765,9 @@
             </a:r>
             <a:r>
               <a:rPr sz="2000" b="0" spc="-25" dirty="0">
+                <a:solidFill>
+                  <a:srgbClr val="FF0000"/>
+                </a:solidFill>
                 <a:latin typeface="Gill Sans" panose="020B0502020104020203"/>
                 <a:cs typeface="Arial MT"/>
               </a:rPr>
@@ -32740,6 +32775,9 @@
             </a:r>
             <a:r>
               <a:rPr sz="2000" b="0" dirty="0">
+                <a:solidFill>
+                  <a:srgbClr val="FF0000"/>
+                </a:solidFill>
                 <a:latin typeface="Gill Sans" panose="020B0502020104020203"/>
                 <a:cs typeface="Arial MT"/>
               </a:rPr>
@@ -32747,6 +32785,9 @@
             </a:r>
             <a:r>
               <a:rPr sz="2000" b="0" spc="-25" dirty="0">
+                <a:solidFill>
+                  <a:srgbClr val="FF0000"/>
+                </a:solidFill>
                 <a:latin typeface="Gill Sans" panose="020B0502020104020203"/>
                 <a:cs typeface="Arial MT"/>
               </a:rPr>
@@ -32754,6 +32795,9 @@
             </a:r>
             <a:r>
               <a:rPr sz="2000" b="0" dirty="0">
+                <a:solidFill>
+                  <a:srgbClr val="FF0000"/>
+                </a:solidFill>
                 <a:latin typeface="Gill Sans" panose="020B0502020104020203"/>
                 <a:cs typeface="Arial MT"/>
               </a:rPr>
@@ -32761,6 +32805,9 @@
             </a:r>
             <a:r>
               <a:rPr sz="2000" b="0" spc="-25" dirty="0">
+                <a:solidFill>
+                  <a:srgbClr val="FF0000"/>
+                </a:solidFill>
                 <a:latin typeface="Gill Sans" panose="020B0502020104020203"/>
                 <a:cs typeface="Arial MT"/>
               </a:rPr>
@@ -32768,6 +32815,9 @@
             </a:r>
             <a:r>
               <a:rPr sz="2000" b="0" dirty="0">
+                <a:solidFill>
+                  <a:srgbClr val="FF0000"/>
+                </a:solidFill>
                 <a:latin typeface="Gill Sans" panose="020B0502020104020203"/>
                 <a:cs typeface="Arial MT"/>
               </a:rPr>
@@ -32775,6 +32825,9 @@
             </a:r>
             <a:r>
               <a:rPr sz="2000" b="0" spc="-25" dirty="0">
+                <a:solidFill>
+                  <a:srgbClr val="FF0000"/>
+                </a:solidFill>
                 <a:latin typeface="Gill Sans" panose="020B0502020104020203"/>
                 <a:cs typeface="Arial MT"/>
               </a:rPr>
@@ -32782,6 +32835,9 @@
             </a:r>
             <a:r>
               <a:rPr sz="2000" b="0" dirty="0">
+                <a:solidFill>
+                  <a:srgbClr val="FF0000"/>
+                </a:solidFill>
                 <a:latin typeface="Gill Sans" panose="020B0502020104020203"/>
                 <a:cs typeface="Arial MT"/>
               </a:rPr>
@@ -32789,6 +32845,9 @@
             </a:r>
             <a:r>
               <a:rPr sz="2000" b="0" spc="-25" dirty="0">
+                <a:solidFill>
+                  <a:srgbClr val="FF0000"/>
+                </a:solidFill>
                 <a:latin typeface="Gill Sans" panose="020B0502020104020203"/>
                 <a:cs typeface="Arial MT"/>
               </a:rPr>
@@ -32796,10 +32855,66 @@
             </a:r>
             <a:r>
               <a:rPr sz="2000" b="0" spc="-10" dirty="0">
+                <a:solidFill>
+                  <a:srgbClr val="FF0000"/>
+                </a:solidFill>
                 <a:latin typeface="Gill Sans" panose="020B0502020104020203"/>
                 <a:cs typeface="Arial MT"/>
               </a:rPr>
               <a:t>again</a:t>
+            </a:r>
+            <a:endParaRPr lang="en-US" sz="2000" b="0" spc="-10" dirty="0">
+              <a:solidFill>
+                <a:srgbClr val="FF0000"/>
+              </a:solidFill>
+              <a:latin typeface="Gill Sans" panose="020B0502020104020203"/>
+              <a:cs typeface="Arial MT"/>
+            </a:endParaRPr>
+          </a:p>
+          <a:p>
+            <a:pPr marL="640715" lvl="1" indent="-170815">
+              <a:spcBef>
+                <a:spcPts val="310"/>
+              </a:spcBef>
+              <a:buChar char="•"/>
+              <a:tabLst>
+                <a:tab pos="183515" algn="l"/>
+              </a:tabLst>
+            </a:pPr>
+            <a:r>
+              <a:rPr lang="en-US" sz="2000" b="0" dirty="0">
+                <a:latin typeface="Gill Sans" panose="020B0502020104020203"/>
+                <a:cs typeface="Arial MT"/>
+              </a:rPr>
+              <a:t>Even though t1 is woken up from its </a:t>
+            </a:r>
+            <a:r>
+              <a:rPr lang="en-US" sz="2000" b="0" dirty="0" err="1">
+                <a:latin typeface="Gill Sans" panose="020B0502020104020203"/>
+                <a:cs typeface="Arial MT"/>
+              </a:rPr>
+              <a:t>s_a.wait</a:t>
+            </a:r>
+            <a:r>
+              <a:rPr lang="en-US" sz="2000" b="0" dirty="0">
+                <a:latin typeface="Gill Sans" panose="020B0502020104020203"/>
+                <a:cs typeface="Arial MT"/>
+              </a:rPr>
+              <a:t>() before t2 is woken up from its </a:t>
+            </a:r>
+            <a:r>
+              <a:rPr lang="en-US" sz="2000" b="0" dirty="0" err="1">
+                <a:latin typeface="Gill Sans" panose="020B0502020104020203"/>
+                <a:cs typeface="Arial MT"/>
+              </a:rPr>
+              <a:t>s_b.wait</a:t>
+            </a:r>
+            <a:r>
+              <a:rPr lang="en-US" sz="2000" b="0" dirty="0">
+                <a:latin typeface="Gill Sans" panose="020B0502020104020203"/>
+                <a:cs typeface="Arial MT"/>
+              </a:rPr>
+              <a:t>(), both threads go into the ready queue, and the OS scheduler may schedule either thread to run before the other, depending on the scheduling algorithm and other code in each thread and other threads</a:t>
             </a:r>
             <a:endParaRPr sz="2000" b="0" dirty="0">
               <a:latin typeface="Gill Sans" panose="020B0502020104020203"/>
@@ -34278,7 +34393,7 @@
                 <a:cs typeface="Arial"/>
               </a:rPr>
               <a:pPr algn="ctr"/>
-              <a:t>23</a:t>
+              <a:t>22</a:t>
             </a:fld>
             <a:endParaRPr lang="nb-NO" sz="1400" b="0" i="0" dirty="0">
               <a:solidFill>
@@ -34290,6 +34405,57 @@
           </a:p>
         </p:txBody>
       </p:sp>
+      <mc:AlternateContent xmlns:mc="http://schemas.openxmlformats.org/markup-compatibility/2006" xmlns:p14="http://schemas.microsoft.com/office/powerpoint/2010/main">
+        <mc:Choice Requires="p14">
+          <p:contentPart p14:bwMode="auto" r:id="rId3">
+            <p14:nvContentPartPr>
+              <p14:cNvPr id="8" name="Ink 7">
+                <a:extLst>
+                  <a:ext uri="{FF2B5EF4-FFF2-40B4-BE49-F238E27FC236}">
+                    <a16:creationId xmlns:a16="http://schemas.microsoft.com/office/drawing/2014/main" id="{B9EE3A1F-9168-4123-B899-15BA90E7F072}"/>
+                  </a:ext>
+                </a:extLst>
+              </p14:cNvPr>
+              <p14:cNvContentPartPr/>
+              <p14:nvPr/>
+            </p14:nvContentPartPr>
+            <p14:xfrm>
+              <a:off x="2148277" y="4909362"/>
+              <a:ext cx="360" cy="360"/>
+            </p14:xfrm>
+          </p:contentPart>
+        </mc:Choice>
+        <mc:Fallback xmlns="">
+          <p:pic>
+            <p:nvPicPr>
+              <p:cNvPr id="8" name="Ink 7">
+                <a:extLst>
+                  <a:ext uri="{FF2B5EF4-FFF2-40B4-BE49-F238E27FC236}">
+                    <a16:creationId xmlns:a16="http://schemas.microsoft.com/office/drawing/2014/main" id="{B9EE3A1F-9168-4123-B899-15BA90E7F072}"/>
+                  </a:ext>
+                </a:extLst>
+              </p:cNvPr>
+              <p:cNvPicPr/>
+              <p:nvPr/>
+            </p:nvPicPr>
+            <p:blipFill>
+              <a:blip r:embed="rId4"/>
+              <a:stretch>
+                <a:fillRect/>
+              </a:stretch>
+            </p:blipFill>
+            <p:spPr>
+              <a:xfrm>
+                <a:off x="2139637" y="4900362"/>
+                <a:ext cx="18000" cy="18000"/>
+              </a:xfrm>
+              <a:prstGeom prst="rect">
+                <a:avLst/>
+              </a:prstGeom>
+            </p:spPr>
+          </p:pic>
+        </mc:Fallback>
+      </mc:AlternateContent>
     </p:spTree>
   </p:cSld>
   <p:clrMapOvr>
@@ -34299,7 +34465,7 @@
 </p:sld>
 </file>
 
-<file path=ppt/slides/slide24.xml><?xml version="1.0" encoding="utf-8"?>
+<file path=ppt/slides/slide23.xml><?xml version="1.0" encoding="utf-8"?>
 <p:sld xmlns:a="http://schemas.openxmlformats.org/drawingml/2006/main" xmlns:r="http://schemas.openxmlformats.org/officeDocument/2006/relationships" xmlns:p="http://schemas.openxmlformats.org/presentationml/2006/main">
   <p:cSld>
     <p:spTree>
@@ -34325,7 +34491,7 @@
         <p:spPr>
           <a:xfrm>
             <a:off x="64340" y="3942820"/>
-            <a:ext cx="5808285" cy="2769348"/>
+            <a:ext cx="5808285" cy="1604927"/>
           </a:xfrm>
           <a:prstGeom prst="rect">
             <a:avLst/>
@@ -34343,13 +34509,13 @@
               </a:spcBef>
             </a:pPr>
             <a:r>
-              <a:rPr lang="en-GB" sz="2400" b="0" dirty="0">
+              <a:rPr lang="en-GB" sz="2000" b="0" dirty="0">
                 <a:latin typeface="Gill Sans" panose="020B0502020104020203"/>
                 <a:cs typeface="Arial MT"/>
               </a:rPr>
               <a:t>Deadlock scenario 1:</a:t>
             </a:r>
-            <a:endParaRPr sz="2400" b="0" dirty="0">
+            <a:endParaRPr lang="en-US" sz="2000" b="0" dirty="0">
               <a:latin typeface="Gill Sans" panose="020B0502020104020203"/>
               <a:cs typeface="Arial MT"/>
             </a:endParaRPr>
@@ -34365,167 +34531,167 @@
               </a:tabLst>
             </a:pPr>
             <a:r>
-              <a:rPr sz="2800" b="0" baseline="1291" dirty="0">
+              <a:rPr lang="en-US" sz="2400" b="0" baseline="1291" dirty="0">
                 <a:latin typeface="Gill Sans" panose="020B0502020104020203"/>
                 <a:cs typeface="Arial MT"/>
               </a:rPr>
               <a:t>t2</a:t>
             </a:r>
             <a:r>
-              <a:rPr sz="2800" b="0" spc="60" baseline="1291" dirty="0">
+              <a:rPr lang="en-US" sz="2400" b="0" spc="60" baseline="1291" dirty="0">
                 <a:latin typeface="Gill Sans" panose="020B0502020104020203"/>
                 <a:cs typeface="Arial MT"/>
               </a:rPr>
               <a:t> </a:t>
             </a:r>
             <a:r>
-              <a:rPr sz="2800" b="0" baseline="1291" dirty="0">
+              <a:rPr lang="en-US" sz="2400" b="0" baseline="1291" dirty="0">
                 <a:latin typeface="Gill Sans" panose="020B0502020104020203"/>
                 <a:cs typeface="Arial MT"/>
               </a:rPr>
               <a:t>runs</a:t>
             </a:r>
             <a:r>
-              <a:rPr sz="2800" b="0" spc="60" baseline="1291" dirty="0">
+              <a:rPr lang="en-US" sz="2400" b="0" spc="60" baseline="1291" dirty="0">
                 <a:latin typeface="Gill Sans" panose="020B0502020104020203"/>
                 <a:cs typeface="Arial MT"/>
               </a:rPr>
               <a:t> </a:t>
             </a:r>
             <a:r>
-              <a:rPr sz="2800" b="0" baseline="1291" dirty="0">
+              <a:rPr lang="en-US" sz="2400" b="0" baseline="1291" dirty="0">
                 <a:latin typeface="Gill Sans" panose="020B0502020104020203"/>
                 <a:cs typeface="Arial MT"/>
               </a:rPr>
               <a:t>first</a:t>
             </a:r>
             <a:r>
-              <a:rPr sz="2800" b="0" spc="60" baseline="1291" dirty="0">
+              <a:rPr lang="en-US" sz="2400" b="0" spc="60" baseline="1291" dirty="0">
                 <a:latin typeface="Gill Sans" panose="020B0502020104020203"/>
                 <a:cs typeface="Arial MT"/>
               </a:rPr>
               <a:t> </a:t>
             </a:r>
             <a:r>
-              <a:rPr sz="2800" b="0" baseline="1291" dirty="0">
+              <a:rPr lang="en-US" sz="2400" b="0" baseline="1291" dirty="0">
                 <a:latin typeface="Gill Sans" panose="020B0502020104020203"/>
                 <a:cs typeface="Arial MT"/>
               </a:rPr>
               <a:t>until</a:t>
             </a:r>
             <a:r>
-              <a:rPr sz="2800" b="0" spc="60" baseline="1291" dirty="0">
+              <a:rPr lang="en-US" sz="2400" b="0" spc="60" baseline="1291" dirty="0">
                 <a:latin typeface="Gill Sans" panose="020B0502020104020203"/>
                 <a:cs typeface="Arial MT"/>
               </a:rPr>
               <a:t> </a:t>
             </a:r>
             <a:r>
-              <a:rPr sz="2800" b="0" baseline="1291" dirty="0">
+              <a:rPr lang="en-US" sz="2400" b="0" baseline="1291" dirty="0">
                 <a:latin typeface="Gill Sans" panose="020B0502020104020203"/>
                 <a:cs typeface="Arial MT"/>
               </a:rPr>
               <a:t>line</a:t>
             </a:r>
             <a:r>
-              <a:rPr sz="2800" b="0" spc="60" baseline="1291" dirty="0">
+              <a:rPr lang="en-US" sz="2400" b="0" spc="60" baseline="1291" dirty="0">
                 <a:latin typeface="Gill Sans" panose="020B0502020104020203"/>
                 <a:cs typeface="Arial MT"/>
               </a:rPr>
               <a:t> </a:t>
             </a:r>
             <a:r>
-              <a:rPr sz="2800" b="0" baseline="1291" dirty="0">
+              <a:rPr lang="en-US" sz="2400" b="0" baseline="1291" dirty="0">
                 <a:latin typeface="Gill Sans" panose="020B0502020104020203"/>
                 <a:cs typeface="Arial MT"/>
               </a:rPr>
               <a:t>2</a:t>
             </a:r>
             <a:r>
-              <a:rPr sz="2800" b="0" spc="60" baseline="1291" dirty="0">
+              <a:rPr lang="en-US" sz="2400" b="0" spc="60" baseline="1291" dirty="0">
                 <a:latin typeface="Gill Sans" panose="020B0502020104020203"/>
                 <a:cs typeface="Arial MT"/>
               </a:rPr>
               <a:t> </a:t>
             </a:r>
             <a:r>
-              <a:rPr sz="2800" b="0" baseline="1291" dirty="0">
+              <a:rPr lang="en-US" sz="2400" b="0" baseline="1291" dirty="0">
                 <a:latin typeface="Gill Sans" panose="020B0502020104020203"/>
                 <a:cs typeface="Arial MT"/>
               </a:rPr>
               <a:t>(so</a:t>
             </a:r>
             <a:r>
-              <a:rPr sz="2800" b="0" spc="60" baseline="1291" dirty="0">
+              <a:rPr lang="en-US" sz="2400" b="0" spc="60" baseline="1291" dirty="0">
                 <a:latin typeface="Gill Sans" panose="020B0502020104020203"/>
                 <a:cs typeface="Arial MT"/>
               </a:rPr>
               <a:t> </a:t>
             </a:r>
             <a:r>
-              <a:rPr sz="2800" b="0" baseline="1291" dirty="0">
+              <a:rPr lang="en-US" sz="2400" b="0" baseline="1291" dirty="0">
                 <a:latin typeface="Gill Sans" panose="020B0502020104020203"/>
                 <a:cs typeface="Arial MT"/>
               </a:rPr>
               <a:t>lock2=0,</a:t>
             </a:r>
             <a:r>
-              <a:rPr sz="2800" b="0" spc="60" baseline="1291" dirty="0">
+              <a:rPr lang="en-US" sz="2400" b="0" spc="60" baseline="1291" dirty="0">
                 <a:latin typeface="Gill Sans" panose="020B0502020104020203"/>
                 <a:cs typeface="Arial MT"/>
               </a:rPr>
               <a:t> </a:t>
             </a:r>
             <a:r>
-              <a:rPr sz="2800" b="0" baseline="1291" dirty="0">
+              <a:rPr lang="en-US" sz="2400" b="0" baseline="1291" dirty="0">
                 <a:latin typeface="Gill Sans" panose="020B0502020104020203"/>
                 <a:cs typeface="Arial MT"/>
               </a:rPr>
               <a:t>lock1=1)</a:t>
             </a:r>
             <a:r>
-              <a:rPr lang="en-GB" sz="2800" b="0" spc="60" baseline="1291" dirty="0">
+              <a:rPr lang="en-US" sz="2400" b="0" spc="60" baseline="1291" dirty="0">
                 <a:latin typeface="Gill Sans" panose="020B0502020104020203"/>
                 <a:cs typeface="Arial MT"/>
               </a:rPr>
               <a:t>; </a:t>
             </a:r>
             <a:r>
-              <a:rPr sz="2800" b="0" baseline="1291" dirty="0">
+              <a:rPr lang="en-US" sz="2400" b="0" baseline="1291" dirty="0">
                 <a:latin typeface="Gill Sans" panose="020B0502020104020203"/>
                 <a:cs typeface="Arial MT"/>
               </a:rPr>
               <a:t>switch</a:t>
             </a:r>
             <a:r>
-              <a:rPr sz="2800" b="0" spc="60" baseline="1291" dirty="0">
+              <a:rPr lang="en-US" sz="2400" b="0" spc="60" baseline="1291" dirty="0">
                 <a:latin typeface="Gill Sans" panose="020B0502020104020203"/>
                 <a:cs typeface="Arial MT"/>
               </a:rPr>
               <a:t> </a:t>
             </a:r>
             <a:r>
-              <a:rPr sz="2800" b="0" baseline="1291" dirty="0">
+              <a:rPr lang="en-US" sz="2400" b="0" baseline="1291" dirty="0">
                 <a:latin typeface="Gill Sans" panose="020B0502020104020203"/>
                 <a:cs typeface="Arial MT"/>
               </a:rPr>
               <a:t>to</a:t>
             </a:r>
             <a:r>
-              <a:rPr sz="2800" b="0" spc="52" baseline="1291" dirty="0">
+              <a:rPr lang="en-US" sz="2400" b="0" spc="52" baseline="1291" dirty="0">
                 <a:latin typeface="Gill Sans" panose="020B0502020104020203"/>
                 <a:cs typeface="Arial MT"/>
               </a:rPr>
               <a:t> </a:t>
             </a:r>
             <a:r>
-              <a:rPr sz="2800" b="0" spc="-37" baseline="1291" dirty="0">
+              <a:rPr lang="en-US" sz="2400" b="0" spc="-37" baseline="1291" dirty="0">
                 <a:latin typeface="Gill Sans" panose="020B0502020104020203"/>
                 <a:cs typeface="Arial MT"/>
               </a:rPr>
               <a:t>t1</a:t>
             </a:r>
-            <a:endParaRPr sz="2800" b="0" baseline="1291" dirty="0">
+            <a:endParaRPr lang="en-US" sz="2400" b="0" baseline="1291" dirty="0">
               <a:latin typeface="Gill Sans" panose="020B0502020104020203"/>
               <a:cs typeface="Arial MT"/>
             </a:endParaRPr>
@@ -34541,181 +34707,181 @@
               </a:tabLst>
             </a:pPr>
             <a:r>
-              <a:rPr sz="2800" b="0" baseline="1291" dirty="0">
+              <a:rPr sz="2400" b="0" baseline="1291" dirty="0">
                 <a:latin typeface="Gill Sans" panose="020B0502020104020203"/>
                 <a:cs typeface="Arial MT"/>
               </a:rPr>
               <a:t>t1</a:t>
             </a:r>
             <a:r>
-              <a:rPr sz="2800" b="0" spc="44" baseline="1291" dirty="0">
+              <a:rPr sz="2400" b="0" spc="44" baseline="1291" dirty="0">
                 <a:latin typeface="Gill Sans" panose="020B0502020104020203"/>
                 <a:cs typeface="Arial MT"/>
               </a:rPr>
               <a:t> </a:t>
             </a:r>
             <a:r>
-              <a:rPr sz="2800" b="0" baseline="1291" dirty="0">
+              <a:rPr sz="2400" b="0" baseline="1291" dirty="0">
                 <a:latin typeface="Gill Sans" panose="020B0502020104020203"/>
                 <a:cs typeface="Arial MT"/>
               </a:rPr>
               <a:t>starts</a:t>
             </a:r>
             <a:r>
-              <a:rPr sz="2800" b="0" spc="60" baseline="1291" dirty="0">
+              <a:rPr sz="2400" b="0" spc="60" baseline="1291" dirty="0">
                 <a:latin typeface="Gill Sans" panose="020B0502020104020203"/>
                 <a:cs typeface="Arial MT"/>
               </a:rPr>
               <a:t> </a:t>
             </a:r>
             <a:r>
-              <a:rPr sz="2800" b="0" baseline="1291" dirty="0">
+              <a:rPr sz="2400" b="0" baseline="1291" dirty="0">
                 <a:latin typeface="Gill Sans" panose="020B0502020104020203"/>
                 <a:cs typeface="Arial MT"/>
               </a:rPr>
               <a:t>and</a:t>
             </a:r>
             <a:r>
-              <a:rPr sz="2800" b="0" spc="60" baseline="1291" dirty="0">
+              <a:rPr sz="2400" b="0" spc="60" baseline="1291" dirty="0">
                 <a:latin typeface="Gill Sans" panose="020B0502020104020203"/>
                 <a:cs typeface="Arial MT"/>
               </a:rPr>
               <a:t> </a:t>
             </a:r>
             <a:r>
-              <a:rPr sz="2800" b="0" baseline="1291" dirty="0">
+              <a:rPr sz="2400" b="0" baseline="1291" dirty="0">
                 <a:latin typeface="Gill Sans" panose="020B0502020104020203"/>
                 <a:cs typeface="Arial MT"/>
               </a:rPr>
               <a:t>runs</a:t>
             </a:r>
             <a:r>
-              <a:rPr sz="2800" b="0" spc="60" baseline="1291" dirty="0">
+              <a:rPr sz="2400" b="0" spc="60" baseline="1291" dirty="0">
                 <a:latin typeface="Gill Sans" panose="020B0502020104020203"/>
                 <a:cs typeface="Arial MT"/>
               </a:rPr>
               <a:t> </a:t>
             </a:r>
             <a:r>
-              <a:rPr sz="2800" b="0" baseline="1291" dirty="0">
+              <a:rPr sz="2400" b="0" baseline="1291" dirty="0">
                 <a:latin typeface="Gill Sans" panose="020B0502020104020203"/>
                 <a:cs typeface="Arial MT"/>
               </a:rPr>
               <a:t>until</a:t>
             </a:r>
             <a:r>
-              <a:rPr sz="2800" b="0" spc="60" baseline="1291" dirty="0">
+              <a:rPr sz="2400" b="0" spc="60" baseline="1291" dirty="0">
                 <a:latin typeface="Gill Sans" panose="020B0502020104020203"/>
                 <a:cs typeface="Arial MT"/>
               </a:rPr>
               <a:t> </a:t>
             </a:r>
             <a:r>
-              <a:rPr sz="2800" b="0" baseline="1291" dirty="0">
+              <a:rPr sz="2400" b="0" baseline="1291" dirty="0">
                 <a:latin typeface="Gill Sans" panose="020B0502020104020203"/>
                 <a:cs typeface="Arial MT"/>
               </a:rPr>
               <a:t>line</a:t>
             </a:r>
             <a:r>
-              <a:rPr sz="2800" b="0" spc="60" baseline="1291" dirty="0">
+              <a:rPr sz="2400" b="0" spc="60" baseline="1291" dirty="0">
                 <a:latin typeface="Gill Sans" panose="020B0502020104020203"/>
                 <a:cs typeface="Arial MT"/>
               </a:rPr>
               <a:t> </a:t>
             </a:r>
             <a:r>
-              <a:rPr sz="2800" b="0" baseline="1291" dirty="0">
+              <a:rPr sz="2400" b="0" baseline="1291" dirty="0">
                 <a:latin typeface="Gill Sans" panose="020B0502020104020203"/>
                 <a:cs typeface="Arial MT"/>
               </a:rPr>
               <a:t>3</a:t>
             </a:r>
             <a:r>
-              <a:rPr sz="2800" b="0" spc="60" baseline="1291" dirty="0">
+              <a:rPr sz="2400" b="0" spc="60" baseline="1291" dirty="0">
                 <a:latin typeface="Gill Sans" panose="020B0502020104020203"/>
                 <a:cs typeface="Arial MT"/>
               </a:rPr>
               <a:t> </a:t>
             </a:r>
             <a:r>
-              <a:rPr sz="2800" b="0" baseline="1291" dirty="0">
+              <a:rPr sz="2400" b="0" baseline="1291" dirty="0">
                 <a:latin typeface="Gill Sans" panose="020B0502020104020203"/>
                 <a:cs typeface="Arial MT"/>
               </a:rPr>
               <a:t>(so</a:t>
             </a:r>
             <a:r>
-              <a:rPr sz="2800" b="0" spc="60" baseline="1291" dirty="0">
+              <a:rPr sz="2400" b="0" spc="60" baseline="1291" dirty="0">
                 <a:latin typeface="Gill Sans" panose="020B0502020104020203"/>
                 <a:cs typeface="Arial MT"/>
               </a:rPr>
               <a:t> </a:t>
             </a:r>
             <a:r>
-              <a:rPr sz="2800" b="0" baseline="1291" dirty="0">
+              <a:rPr sz="2400" b="0" baseline="1291" dirty="0">
                 <a:latin typeface="Gill Sans" panose="020B0502020104020203"/>
                 <a:cs typeface="Arial MT"/>
               </a:rPr>
               <a:t>lock1=0,</a:t>
             </a:r>
             <a:r>
-              <a:rPr sz="2800" b="0" spc="60" baseline="1291" dirty="0">
+              <a:rPr sz="2400" b="0" spc="60" baseline="1291" dirty="0">
                 <a:latin typeface="Gill Sans" panose="020B0502020104020203"/>
                 <a:cs typeface="Arial MT"/>
               </a:rPr>
               <a:t> </a:t>
             </a:r>
             <a:r>
-              <a:rPr sz="2800" b="0" baseline="1291" dirty="0">
+              <a:rPr sz="2400" b="0" baseline="1291" dirty="0">
                 <a:latin typeface="Gill Sans" panose="020B0502020104020203"/>
                 <a:cs typeface="Arial MT"/>
               </a:rPr>
               <a:t>lock2=0)</a:t>
             </a:r>
             <a:r>
-              <a:rPr lang="en-GB" sz="2800" b="0" spc="67" baseline="1291" dirty="0">
+              <a:rPr lang="en-GB" sz="2400" b="0" spc="67" baseline="1291" dirty="0">
                 <a:latin typeface="Gill Sans" panose="020B0502020104020203"/>
                 <a:cs typeface="Arial MT"/>
               </a:rPr>
               <a:t>; </a:t>
             </a:r>
             <a:r>
-              <a:rPr sz="2800" b="0" baseline="1291" dirty="0">
+              <a:rPr sz="2400" b="0" baseline="1291" dirty="0">
                 <a:latin typeface="Gill Sans" panose="020B0502020104020203"/>
                 <a:cs typeface="Arial MT"/>
               </a:rPr>
               <a:t>back</a:t>
             </a:r>
             <a:r>
-              <a:rPr sz="2800" b="0" spc="60" baseline="1291" dirty="0">
+              <a:rPr sz="2400" b="0" spc="60" baseline="1291" dirty="0">
                 <a:latin typeface="Gill Sans" panose="020B0502020104020203"/>
                 <a:cs typeface="Arial MT"/>
               </a:rPr>
               <a:t> </a:t>
             </a:r>
             <a:r>
-              <a:rPr sz="2800" b="0" baseline="1291" dirty="0">
+              <a:rPr sz="2400" b="0" baseline="1291" dirty="0">
                 <a:latin typeface="Gill Sans" panose="020B0502020104020203"/>
                 <a:cs typeface="Arial MT"/>
               </a:rPr>
               <a:t>to</a:t>
             </a:r>
             <a:r>
-              <a:rPr sz="2800" b="0" spc="67" baseline="1291" dirty="0">
+              <a:rPr sz="2400" b="0" spc="67" baseline="1291" dirty="0">
                 <a:latin typeface="Gill Sans" panose="020B0502020104020203"/>
                 <a:cs typeface="Arial MT"/>
               </a:rPr>
               <a:t> </a:t>
             </a:r>
             <a:r>
-              <a:rPr sz="2800" b="0" spc="-37" baseline="1291" dirty="0">
+              <a:rPr sz="2400" b="0" spc="-37" baseline="1291" dirty="0">
                 <a:latin typeface="Gill Sans" panose="020B0502020104020203"/>
                 <a:cs typeface="Arial MT"/>
               </a:rPr>
               <a:t>t2</a:t>
             </a:r>
-            <a:endParaRPr sz="2800" b="0" baseline="1291" dirty="0">
+            <a:endParaRPr sz="2400" b="0" baseline="1291" dirty="0">
               <a:latin typeface="Gill Sans" panose="020B0502020104020203"/>
               <a:cs typeface="Arial MT"/>
             </a:endParaRPr>
@@ -34731,251 +34897,254 @@
               </a:tabLst>
             </a:pPr>
             <a:r>
-              <a:rPr sz="2800" b="0" baseline="1291" dirty="0">
+              <a:rPr sz="2400" b="0" baseline="1291" dirty="0">
                 <a:latin typeface="Gill Sans" panose="020B0502020104020203"/>
                 <a:cs typeface="Arial MT"/>
               </a:rPr>
               <a:t>t2</a:t>
             </a:r>
             <a:r>
-              <a:rPr sz="2800" b="0" spc="52" baseline="1291" dirty="0">
+              <a:rPr sz="2400" b="0" spc="52" baseline="1291" dirty="0">
                 <a:latin typeface="Gill Sans" panose="020B0502020104020203"/>
                 <a:cs typeface="Arial MT"/>
               </a:rPr>
               <a:t> </a:t>
             </a:r>
             <a:r>
-              <a:rPr sz="2800" b="0" baseline="1291" dirty="0">
+              <a:rPr sz="2400" b="0" baseline="1291" dirty="0">
                 <a:latin typeface="Gill Sans" panose="020B0502020104020203"/>
                 <a:cs typeface="Arial MT"/>
               </a:rPr>
               <a:t>waits</a:t>
             </a:r>
             <a:r>
-              <a:rPr sz="2800" b="0" spc="52" baseline="1291" dirty="0">
+              <a:rPr sz="2400" b="0" spc="52" baseline="1291" dirty="0">
                 <a:latin typeface="Gill Sans" panose="020B0502020104020203"/>
                 <a:cs typeface="Arial MT"/>
               </a:rPr>
               <a:t> </a:t>
             </a:r>
             <a:r>
-              <a:rPr sz="2800" b="0" baseline="1291" dirty="0">
+              <a:rPr sz="2400" b="0" baseline="1291" dirty="0">
                 <a:latin typeface="Gill Sans" panose="020B0502020104020203"/>
                 <a:cs typeface="Arial MT"/>
               </a:rPr>
               <a:t>for</a:t>
             </a:r>
             <a:r>
-              <a:rPr sz="2800" b="0" spc="52" baseline="1291" dirty="0">
+              <a:rPr sz="2400" b="0" spc="52" baseline="1291" dirty="0">
                 <a:latin typeface="Gill Sans" panose="020B0502020104020203"/>
                 <a:cs typeface="Arial MT"/>
               </a:rPr>
               <a:t> </a:t>
             </a:r>
             <a:r>
-              <a:rPr sz="2800" b="0" baseline="1291" dirty="0">
-                <a:latin typeface="Gill Sans" panose="020B0502020104020203"/>
-                <a:cs typeface="Arial MT"/>
-              </a:rPr>
-              <a:t>lock2</a:t>
-            </a:r>
-            <a:r>
-              <a:rPr sz="2800" b="0" spc="52" baseline="1291" dirty="0">
+              <a:rPr sz="2400" b="0" baseline="1291" dirty="0">
+                <a:latin typeface="Gill Sans" panose="020B0502020104020203"/>
+                <a:cs typeface="Arial MT"/>
+              </a:rPr>
+              <a:t>lock</a:t>
+            </a:r>
+            <a:r>
+              <a:rPr lang="en-US" sz="2400" b="0" baseline="1291" dirty="0">
+                <a:latin typeface="Gill Sans" panose="020B0502020104020203"/>
+                <a:cs typeface="Arial MT"/>
+              </a:rPr>
+              <a:t>1</a:t>
+            </a:r>
+            <a:r>
+              <a:rPr sz="2400" b="0" spc="52" baseline="1291" dirty="0">
                 <a:latin typeface="Gill Sans" panose="020B0502020104020203"/>
                 <a:cs typeface="Arial MT"/>
               </a:rPr>
               <a:t> </a:t>
             </a:r>
             <a:r>
-              <a:rPr sz="2800" b="0" baseline="1291" dirty="0">
+              <a:rPr sz="2400" b="0" baseline="1291" dirty="0">
                 <a:latin typeface="Gill Sans" panose="020B0502020104020203"/>
                 <a:cs typeface="Arial MT"/>
               </a:rPr>
               <a:t>in</a:t>
             </a:r>
             <a:r>
-              <a:rPr sz="2800" b="0" spc="52" baseline="1291" dirty="0">
+              <a:rPr sz="2400" b="0" spc="52" baseline="1291" dirty="0">
                 <a:latin typeface="Gill Sans" panose="020B0502020104020203"/>
                 <a:cs typeface="Arial MT"/>
               </a:rPr>
               <a:t> </a:t>
             </a:r>
             <a:r>
-              <a:rPr sz="2800" b="0" baseline="1291" dirty="0">
+              <a:rPr sz="2400" b="0" baseline="1291" dirty="0">
                 <a:latin typeface="Gill Sans" panose="020B0502020104020203"/>
                 <a:cs typeface="Arial MT"/>
               </a:rPr>
               <a:t>line</a:t>
             </a:r>
             <a:r>
-              <a:rPr sz="2800" b="0" spc="52" baseline="1291" dirty="0">
+              <a:rPr sz="2400" b="0" spc="52" baseline="1291" dirty="0">
                 <a:latin typeface="Gill Sans" panose="020B0502020104020203"/>
                 <a:cs typeface="Arial MT"/>
               </a:rPr>
               <a:t> </a:t>
             </a:r>
             <a:r>
-              <a:rPr sz="2800" b="0" baseline="1291" dirty="0">
+              <a:rPr sz="2400" b="0" baseline="1291" dirty="0">
                 <a:latin typeface="Gill Sans" panose="020B0502020104020203"/>
                 <a:cs typeface="Arial MT"/>
               </a:rPr>
               <a:t>4</a:t>
             </a:r>
             <a:r>
-              <a:rPr lang="en-GB" sz="2800" b="0" spc="52" baseline="1291" dirty="0">
+              <a:rPr lang="en-GB" sz="2400" b="0" spc="52" baseline="1291" dirty="0">
                 <a:latin typeface="Gill Sans" panose="020B0502020104020203"/>
                 <a:cs typeface="Arial MT"/>
               </a:rPr>
               <a:t>;</a:t>
             </a:r>
             <a:r>
-              <a:rPr sz="2800" b="0" spc="240" baseline="1291" dirty="0">
+              <a:rPr sz="2400" b="0" spc="240" baseline="1291" dirty="0">
                 <a:latin typeface="Gill Sans" panose="020B0502020104020203"/>
                 <a:cs typeface="Cambria"/>
               </a:rPr>
               <a:t> </a:t>
             </a:r>
             <a:r>
-              <a:rPr sz="2800" b="0" baseline="1291" dirty="0">
+              <a:rPr sz="2400" b="0" baseline="1291" dirty="0">
                 <a:latin typeface="Gill Sans" panose="020B0502020104020203"/>
                 <a:cs typeface="Arial MT"/>
               </a:rPr>
               <a:t>switch</a:t>
             </a:r>
             <a:r>
-              <a:rPr sz="2800" b="0" spc="52" baseline="1291" dirty="0">
+              <a:rPr sz="2400" b="0" spc="52" baseline="1291" dirty="0">
                 <a:latin typeface="Gill Sans" panose="020B0502020104020203"/>
                 <a:cs typeface="Arial MT"/>
               </a:rPr>
               <a:t> </a:t>
             </a:r>
             <a:r>
-              <a:rPr sz="2800" b="0" baseline="1291" dirty="0">
+              <a:rPr sz="2400" b="0" baseline="1291" dirty="0">
                 <a:latin typeface="Gill Sans" panose="020B0502020104020203"/>
                 <a:cs typeface="Arial MT"/>
               </a:rPr>
               <a:t>to</a:t>
             </a:r>
             <a:r>
-              <a:rPr sz="2800" b="0" spc="52" baseline="1291" dirty="0">
+              <a:rPr sz="2400" b="0" spc="52" baseline="1291" dirty="0">
                 <a:latin typeface="Gill Sans" panose="020B0502020104020203"/>
                 <a:cs typeface="Arial MT"/>
               </a:rPr>
               <a:t> </a:t>
             </a:r>
             <a:r>
-              <a:rPr sz="2800" b="0" baseline="1291" dirty="0">
+              <a:rPr sz="2400" b="0" baseline="1291" dirty="0">
                 <a:latin typeface="Gill Sans" panose="020B0502020104020203"/>
                 <a:cs typeface="Arial MT"/>
               </a:rPr>
               <a:t>t1,</a:t>
             </a:r>
             <a:r>
-              <a:rPr sz="2800" b="0" spc="52" baseline="1291" dirty="0">
+              <a:rPr sz="2400" b="0" spc="52" baseline="1291" dirty="0">
                 <a:latin typeface="Gill Sans" panose="020B0502020104020203"/>
                 <a:cs typeface="Arial MT"/>
               </a:rPr>
               <a:t> </a:t>
             </a:r>
             <a:r>
-              <a:rPr sz="2800" b="0" baseline="1291" dirty="0">
+              <a:rPr lang="en-US" sz="2400" b="0" spc="52" baseline="1291" dirty="0">
+                <a:latin typeface="Gill Sans" panose="020B0502020104020203"/>
+                <a:cs typeface="Arial MT"/>
+              </a:rPr>
+              <a:t>which </a:t>
+            </a:r>
+            <a:r>
+              <a:rPr sz="2400" b="0" baseline="1291" dirty="0">
                 <a:latin typeface="Gill Sans" panose="020B0502020104020203"/>
                 <a:cs typeface="Arial MT"/>
               </a:rPr>
               <a:t>waits</a:t>
             </a:r>
             <a:r>
-              <a:rPr sz="2800" b="0" spc="52" baseline="1291" dirty="0">
+              <a:rPr sz="2400" b="0" spc="52" baseline="1291" dirty="0">
                 <a:latin typeface="Gill Sans" panose="020B0502020104020203"/>
                 <a:cs typeface="Arial MT"/>
               </a:rPr>
               <a:t> </a:t>
             </a:r>
             <a:r>
-              <a:rPr sz="2800" b="0" baseline="1291" dirty="0">
+              <a:rPr sz="2400" b="0" baseline="1291" dirty="0">
                 <a:latin typeface="Gill Sans" panose="020B0502020104020203"/>
                 <a:cs typeface="Arial MT"/>
               </a:rPr>
               <a:t>for</a:t>
             </a:r>
             <a:r>
-              <a:rPr sz="2800" b="0" spc="52" baseline="1291" dirty="0">
+              <a:rPr sz="2400" b="0" spc="52" baseline="1291" dirty="0">
                 <a:latin typeface="Gill Sans" panose="020B0502020104020203"/>
                 <a:cs typeface="Arial MT"/>
               </a:rPr>
               <a:t> </a:t>
             </a:r>
             <a:r>
-              <a:rPr sz="2800" b="0" baseline="1291" dirty="0">
-                <a:latin typeface="Gill Sans" panose="020B0502020104020203"/>
-                <a:cs typeface="Arial MT"/>
-              </a:rPr>
-              <a:t>lock1</a:t>
-            </a:r>
-            <a:r>
-              <a:rPr sz="2800" b="0" spc="52" baseline="1291" dirty="0">
+              <a:rPr sz="2400" b="0" baseline="1291" dirty="0">
+                <a:latin typeface="Gill Sans" panose="020B0502020104020203"/>
+                <a:cs typeface="Arial MT"/>
+              </a:rPr>
+              <a:t>lock</a:t>
+            </a:r>
+            <a:r>
+              <a:rPr lang="en-US" sz="2400" b="0" baseline="1291" dirty="0">
+                <a:latin typeface="Gill Sans" panose="020B0502020104020203"/>
+                <a:cs typeface="Arial MT"/>
+              </a:rPr>
+              <a:t>2</a:t>
+            </a:r>
+            <a:r>
+              <a:rPr sz="2400" b="0" spc="52" baseline="1291" dirty="0">
                 <a:latin typeface="Gill Sans" panose="020B0502020104020203"/>
                 <a:cs typeface="Arial MT"/>
               </a:rPr>
               <a:t> </a:t>
             </a:r>
             <a:r>
-              <a:rPr sz="2800" b="0" baseline="1291" dirty="0">
+              <a:rPr sz="2400" b="0" baseline="1291" dirty="0">
                 <a:latin typeface="Gill Sans" panose="020B0502020104020203"/>
                 <a:cs typeface="Arial MT"/>
               </a:rPr>
               <a:t>in</a:t>
             </a:r>
             <a:r>
-              <a:rPr sz="2800" b="0" spc="52" baseline="1291" dirty="0">
+              <a:rPr sz="2400" b="0" spc="52" baseline="1291" dirty="0">
                 <a:latin typeface="Gill Sans" panose="020B0502020104020203"/>
                 <a:cs typeface="Arial MT"/>
               </a:rPr>
               <a:t> </a:t>
             </a:r>
             <a:r>
-              <a:rPr sz="2800" b="0" baseline="1291" dirty="0">
+              <a:rPr sz="2400" b="0" baseline="1291" dirty="0">
                 <a:latin typeface="Gill Sans" panose="020B0502020104020203"/>
                 <a:cs typeface="Arial MT"/>
               </a:rPr>
               <a:t>line</a:t>
             </a:r>
             <a:r>
-              <a:rPr sz="2800" b="0" spc="52" baseline="1291" dirty="0">
+              <a:rPr sz="2400" b="0" spc="52" baseline="1291" dirty="0">
                 <a:latin typeface="Gill Sans" panose="020B0502020104020203"/>
                 <a:cs typeface="Arial MT"/>
               </a:rPr>
               <a:t> </a:t>
             </a:r>
             <a:r>
-              <a:rPr sz="2800" b="0" spc="-75" baseline="1291" dirty="0">
+              <a:rPr sz="2400" b="0" spc="-75" baseline="1291" dirty="0">
                 <a:latin typeface="Gill Sans" panose="020B0502020104020203"/>
                 <a:cs typeface="Arial MT"/>
               </a:rPr>
               <a:t>5</a:t>
             </a:r>
-            <a:endParaRPr lang="en-GB" sz="2800" b="0" spc="-75" baseline="1291" dirty="0">
+            <a:endParaRPr lang="en-GB" sz="2400" b="0" spc="-75" baseline="1291" dirty="0">
               <a:latin typeface="Gill Sans" panose="020B0502020104020203"/>
               <a:cs typeface="Arial MT"/>
             </a:endParaRPr>
-          </a:p>
-          <a:p>
-            <a:pPr marL="231140" indent="-218440">
-              <a:spcBef>
-                <a:spcPts val="600"/>
-              </a:spcBef>
-              <a:buChar char="•"/>
-              <a:tabLst>
-                <a:tab pos="231140" algn="l"/>
-              </a:tabLst>
-            </a:pPr>
-            <a:r>
-              <a:rPr lang="en-GB" sz="2800" b="0" spc="-75" baseline="1291" dirty="0">
-                <a:latin typeface="Gill Sans" panose="020B0502020104020203"/>
-                <a:cs typeface="Arial MT"/>
-              </a:rPr>
-              <a:t>This results in a circular waiting condition, where each thread grabs one lock and requests the other. </a:t>
-            </a:r>
           </a:p>
         </p:txBody>
       </p:sp>
@@ -36905,7 +37074,7 @@
                 <a:cs typeface="Arial"/>
               </a:rPr>
               <a:pPr algn="ctr"/>
-              <a:t>24</a:t>
+              <a:t>23</a:t>
             </a:fld>
             <a:endParaRPr lang="nb-NO" sz="1400" b="0" i="0" dirty="0">
               <a:solidFill>
@@ -38953,7 +39122,7 @@
         <p:spPr>
           <a:xfrm>
             <a:off x="6231315" y="3970592"/>
-            <a:ext cx="5808285" cy="2743700"/>
+            <a:ext cx="5808285" cy="1358705"/>
           </a:xfrm>
           <a:prstGeom prst="rect">
             <a:avLst/>
@@ -38977,7 +39146,7 @@
               </a:rPr>
               <a:t>Deadlock scenario 2:</a:t>
             </a:r>
-            <a:endParaRPr sz="2000" b="0" dirty="0">
+            <a:endParaRPr lang="en-US" sz="2000" b="0" dirty="0">
               <a:latin typeface="Gill Sans" panose="020B0502020104020203"/>
               <a:cs typeface="Arial MT"/>
             </a:endParaRPr>
@@ -39036,48 +39205,122 @@
               <a:t>t1 waits for lock2 in line 5; switch to t2, waits for lock1 in line 4</a:t>
             </a:r>
           </a:p>
-          <a:p>
-            <a:pPr marL="231140" indent="-218440">
-              <a:spcBef>
-                <a:spcPts val="600"/>
-              </a:spcBef>
-              <a:buChar char="•"/>
-              <a:tabLst>
-                <a:tab pos="231140" algn="l"/>
-              </a:tabLst>
-            </a:pPr>
+        </p:txBody>
+      </p:sp>
+      <mc:AlternateContent xmlns:mc="http://schemas.openxmlformats.org/markup-compatibility/2006" xmlns:p14="http://schemas.microsoft.com/office/powerpoint/2010/main">
+        <mc:Choice Requires="p14">
+          <p:contentPart p14:bwMode="auto" r:id="rId3">
+            <p14:nvContentPartPr>
+              <p14:cNvPr id="49" name="Ink 48">
+                <a:extLst>
+                  <a:ext uri="{FF2B5EF4-FFF2-40B4-BE49-F238E27FC236}">
+                    <a16:creationId xmlns:a16="http://schemas.microsoft.com/office/drawing/2014/main" id="{EBB9010A-4E7A-4AFC-97DF-2ABE142411F1}"/>
+                  </a:ext>
+                </a:extLst>
+              </p14:cNvPr>
+              <p14:cNvContentPartPr/>
+              <p14:nvPr/>
+            </p14:nvContentPartPr>
+            <p14:xfrm>
+              <a:off x="1899517" y="5504082"/>
+              <a:ext cx="360" cy="360"/>
+            </p14:xfrm>
+          </p:contentPart>
+        </mc:Choice>
+        <mc:Fallback xmlns="">
+          <p:pic>
+            <p:nvPicPr>
+              <p:cNvPr id="49" name="Ink 48">
+                <a:extLst>
+                  <a:ext uri="{FF2B5EF4-FFF2-40B4-BE49-F238E27FC236}">
+                    <a16:creationId xmlns:a16="http://schemas.microsoft.com/office/drawing/2014/main" id="{EBB9010A-4E7A-4AFC-97DF-2ABE142411F1}"/>
+                  </a:ext>
+                </a:extLst>
+              </p:cNvPr>
+              <p:cNvPicPr/>
+              <p:nvPr/>
+            </p:nvPicPr>
+            <p:blipFill>
+              <a:blip r:embed="rId4"/>
+              <a:stretch>
+                <a:fillRect/>
+              </a:stretch>
+            </p:blipFill>
+            <p:spPr>
+              <a:xfrm>
+                <a:off x="1890877" y="5495082"/>
+                <a:ext cx="18000" cy="18000"/>
+              </a:xfrm>
+              <a:prstGeom prst="rect">
+                <a:avLst/>
+              </a:prstGeom>
+            </p:spPr>
+          </p:pic>
+        </mc:Fallback>
+      </mc:AlternateContent>
+      <p:sp>
+        <p:nvSpPr>
+          <p:cNvPr id="50" name="TextBox 49">
+            <a:extLst>
+              <a:ext uri="{FF2B5EF4-FFF2-40B4-BE49-F238E27FC236}">
+                <a16:creationId xmlns:a16="http://schemas.microsoft.com/office/drawing/2014/main" id="{F56EE500-BB30-470B-8726-C154DB27BA73}"/>
+              </a:ext>
+            </a:extLst>
+          </p:cNvPr>
+          <p:cNvSpPr txBox="1"/>
+          <p:nvPr/>
+        </p:nvSpPr>
+        <p:spPr>
+          <a:xfrm>
+            <a:off x="2283164" y="5342598"/>
+            <a:ext cx="7010400" cy="1323439"/>
+          </a:xfrm>
+          <a:prstGeom prst="rect">
+            <a:avLst/>
+          </a:prstGeom>
+        </p:spPr>
+        <p:style>
+          <a:lnRef idx="1">
+            <a:schemeClr val="dk1"/>
+          </a:lnRef>
+          <a:fillRef idx="2">
+            <a:schemeClr val="dk1"/>
+          </a:fillRef>
+          <a:effectRef idx="1">
+            <a:schemeClr val="dk1"/>
+          </a:effectRef>
+          <a:fontRef idx="minor">
+            <a:schemeClr val="dk1"/>
+          </a:fontRef>
+        </p:style>
+        <p:txBody>
+          <a:bodyPr wrap="square" rtlCol="0">
+            <a:spAutoFit/>
+          </a:bodyPr>
+          <a:lstStyle/>
+          <a:p>
+            <a:r>
+              <a:rPr lang="en-US" sz="2400" b="0" spc="-75" baseline="1291" dirty="0">
+                <a:latin typeface="Gill Sans" panose="020B0502020104020203"/>
+                <a:cs typeface="Arial MT"/>
+              </a:rPr>
+              <a:t>Thread t1 grabs lock1 and requests lock 2; t2 grabs lock2 requests lock 1</a:t>
+            </a:r>
+            <a:endParaRPr lang="en-GB" sz="2400" b="0" spc="-75" baseline="1291" dirty="0">
+              <a:latin typeface="Gill Sans" panose="020B0502020104020203"/>
+              <a:cs typeface="Arial MT"/>
+            </a:endParaRPr>
+          </a:p>
+          <a:p>
             <a:r>
               <a:rPr lang="en-GB" sz="2400" b="0" spc="-75" baseline="1291" dirty="0">
                 <a:latin typeface="Gill Sans" panose="020B0502020104020203"/>
                 <a:cs typeface="Arial MT"/>
               </a:rPr>
-              <a:t>(Other </a:t>
-            </a:r>
-            <a:r>
-              <a:rPr lang="en-GB" sz="2400" b="0" spc="-75" baseline="1291" dirty="0" err="1">
-                <a:latin typeface="Gill Sans" panose="020B0502020104020203"/>
-                <a:cs typeface="Arial MT"/>
-              </a:rPr>
-              <a:t>interleavings</a:t>
-            </a:r>
-            <a:r>
-              <a:rPr lang="en-GB" sz="2400" b="0" spc="-75" baseline="1291" dirty="0">
-                <a:latin typeface="Gill Sans" panose="020B0502020104020203"/>
-                <a:cs typeface="Arial MT"/>
-              </a:rPr>
-              <a:t> are possible, e.g., t1 grabs lock1, t2 grabs lock2 requests lock 1, t1 requests lock 2)</a:t>
-            </a:r>
-          </a:p>
-          <a:p>
-            <a:pPr marL="231140" indent="-218440">
-              <a:spcBef>
-                <a:spcPts val="600"/>
-              </a:spcBef>
-              <a:buChar char="•"/>
-              <a:tabLst>
-                <a:tab pos="231140" algn="l"/>
-              </a:tabLst>
-            </a:pPr>
+              <a:t>Deadlock: a circular waiting condition, where each thread grabs one lock and requests the other. </a:t>
+            </a:r>
+          </a:p>
+          <a:p>
             <a:r>
               <a:rPr lang="en-GB" sz="2400" b="0" spc="-75" baseline="1291" dirty="0">
                 <a:latin typeface="Gill Sans" panose="020B0502020104020203"/>
@@ -39097,7 +39340,7 @@
 </p:sld>
 </file>
 
-<file path=ppt/slides/slide25.xml><?xml version="1.0" encoding="utf-8"?>
+<file path=ppt/slides/slide24.xml><?xml version="1.0" encoding="utf-8"?>
 <p:sld xmlns:a="http://schemas.openxmlformats.org/drawingml/2006/main" xmlns:r="http://schemas.openxmlformats.org/officeDocument/2006/relationships" xmlns:p="http://schemas.openxmlformats.org/presentationml/2006/main">
   <p:cSld>
     <p:spTree>
@@ -39190,7 +39433,41 @@
                 <a:latin typeface="Gill Sans" panose="020B0502020104020203"/>
                 <a:ea typeface="ＭＳ Ｐゴシック" charset="0"/>
               </a:rPr>
-              <a:t>Since Line 2 of t1 “z=z+2”, and Line 8 of t2 “z=z+1” are not protected within a critical section, a thread switch may occur in the middle of each line, </a:t>
+              <a:t>Since Line 2 of t1 “</a:t>
+            </a:r>
+            <a:r>
+              <a:rPr lang="en-GB" sz="2600" kern="1200" dirty="0">
+                <a:solidFill>
+                  <a:srgbClr val="FF0000"/>
+                </a:solidFill>
+                <a:latin typeface="Gill Sans" panose="020B0502020104020203"/>
+                <a:ea typeface="ＭＳ Ｐゴシック" charset="0"/>
+              </a:rPr>
+              <a:t>z=z+2</a:t>
+            </a:r>
+            <a:r>
+              <a:rPr lang="en-GB" sz="2600" kern="1200" dirty="0">
+                <a:latin typeface="Gill Sans" panose="020B0502020104020203"/>
+                <a:ea typeface="ＭＳ Ｐゴシック" charset="0"/>
+              </a:rPr>
+              <a:t>”, and Line 8 of t2 “</a:t>
+            </a:r>
+            <a:r>
+              <a:rPr lang="en-GB" sz="2600" kern="1200" dirty="0">
+                <a:solidFill>
+                  <a:srgbClr val="FF0000"/>
+                </a:solidFill>
+                <a:latin typeface="Gill Sans" panose="020B0502020104020203"/>
+                <a:ea typeface="ＭＳ Ｐゴシック" charset="0"/>
+              </a:rPr>
+              <a:t>z=z+1</a:t>
+            </a:r>
+            <a:r>
+              <a:rPr lang="en-GB" sz="2600" kern="1200" dirty="0">
+                <a:latin typeface="Gill Sans" panose="020B0502020104020203"/>
+                <a:ea typeface="ＭＳ Ｐゴシック" charset="0"/>
+              </a:rPr>
+              <a:t>” are not protected within a critical section, a thread switch may occur in the middle of each line, </a:t>
             </a:r>
             <a:r>
               <a:rPr lang="en-US" sz="2600" kern="1200" dirty="0">
@@ -39262,7 +39539,7 @@
           <p:nvPr>
             <p:extLst>
               <p:ext uri="{D42A27DB-BD31-4B8C-83A1-F6EECF244321}">
-                <p14:modId xmlns:p14="http://schemas.microsoft.com/office/powerpoint/2010/main" val="3020378315"/>
+                <p14:modId xmlns:p14="http://schemas.microsoft.com/office/powerpoint/2010/main" val="1943378414"/>
               </p:ext>
             </p:extLst>
           </p:nvPr>
@@ -39591,6 +39868,9 @@
                       </a:pPr>
                       <a:r>
                         <a:rPr sz="1300" dirty="0">
+                          <a:solidFill>
+                            <a:srgbClr val="FF0000"/>
+                          </a:solidFill>
                           <a:latin typeface="Courier New"/>
                           <a:cs typeface="Courier New"/>
                         </a:rPr>
@@ -39598,12 +39878,18 @@
                       </a:r>
                       <a:r>
                         <a:rPr sz="1300" spc="-25" dirty="0">
+                          <a:solidFill>
+                            <a:srgbClr val="FF0000"/>
+                          </a:solidFill>
                           <a:latin typeface="Courier New"/>
                           <a:cs typeface="Courier New"/>
                         </a:rPr>
                         <a:t>2;</a:t>
                       </a:r>
                       <a:endParaRPr sz="1300" dirty="0">
+                        <a:solidFill>
+                          <a:srgbClr val="FF0000"/>
+                        </a:solidFill>
                         <a:latin typeface="Courier New"/>
                         <a:cs typeface="Courier New"/>
                       </a:endParaRPr>
@@ -40939,28 +41225,27 @@
                       <a:r>
                         <a:rPr sz="1300" dirty="0">
                           <a:solidFill>
-                            <a:schemeClr val="tx1"/>
+                            <a:srgbClr val="FF0000"/>
                           </a:solidFill>
                           <a:latin typeface="Courier New"/>
                           <a:cs typeface="Courier New"/>
                         </a:rPr>
-                        <a:t>z = z +</a:t>
-                      </a:r>
-                      <a:r>
-                        <a:rPr sz="1300" dirty="0">
-                          <a:latin typeface="Courier New"/>
-                          <a:cs typeface="Courier New"/>
-                        </a:rPr>
-                        <a:t> </a:t>
+                        <a:t>z = z + </a:t>
                       </a:r>
                       <a:r>
                         <a:rPr sz="1300" spc="-25" dirty="0">
+                          <a:solidFill>
+                            <a:srgbClr val="FF0000"/>
+                          </a:solidFill>
                           <a:latin typeface="Courier New"/>
                           <a:cs typeface="Courier New"/>
                         </a:rPr>
                         <a:t>1;</a:t>
                       </a:r>
                       <a:endParaRPr sz="1300" dirty="0">
+                        <a:solidFill>
+                          <a:srgbClr val="FF0000"/>
+                        </a:solidFill>
                         <a:latin typeface="Courier New"/>
                         <a:cs typeface="Courier New"/>
                       </a:endParaRPr>
@@ -41466,7 +41751,7 @@
                 <a:cs typeface="Arial"/>
               </a:rPr>
               <a:pPr algn="ctr"/>
-              <a:t>25</a:t>
+              <a:t>24</a:t>
             </a:fld>
             <a:endParaRPr lang="nb-NO" sz="1400" b="0" i="0" dirty="0">
               <a:solidFill>
@@ -41627,17 +41912,17 @@
           <a:effectLst/>
           <a:extLst>
             <a:ext uri="{FAA26D3D-D897-4be2-8F04-BA451C77F1D7}">
-              <ma14:placeholderFlag xmlns:ma14="http://schemas.microsoft.com/office/mac/drawingml/2011/main" xmlns="" val="1"/>
+              <ma14:placeholderFlag xmlns="" xmlns:ma14="http://schemas.microsoft.com/office/mac/drawingml/2011/main" val="1"/>
             </a:ext>
             <a:ext uri="{909E8E84-426E-40dd-AFC4-6F175D3DCCD1}">
-              <a14:hiddenFill xmlns:a14="http://schemas.microsoft.com/office/drawing/2010/main" xmlns="">
+              <a14:hiddenFill xmlns="" xmlns:a14="http://schemas.microsoft.com/office/drawing/2010/main">
                 <a:solidFill>
                   <a:schemeClr val="bg1"/>
                 </a:solidFill>
               </a14:hiddenFill>
             </a:ext>
             <a:ext uri="{91240B29-F687-4f45-9708-019B960494DF}">
-              <a14:hiddenLine xmlns:a14="http://schemas.microsoft.com/office/drawing/2010/main" xmlns="" w="12700">
+              <a14:hiddenLine xmlns="" xmlns:a14="http://schemas.microsoft.com/office/drawing/2010/main" w="12700">
                 <a:pattFill prst="narHorz">
                   <a:fgClr>
                     <a:schemeClr val="tx1"/>
@@ -41652,7 +41937,7 @@
               </a14:hiddenLine>
             </a:ext>
             <a:ext uri="{AF507438-7753-43e0-B8FC-AC1667EBCBE1}">
-              <a14:hiddenEffects xmlns:a14="http://schemas.microsoft.com/office/drawing/2010/main" xmlns="">
+              <a14:hiddenEffects xmlns="" xmlns:a14="http://schemas.microsoft.com/office/drawing/2010/main">
                 <a:effectLst>
                   <a:outerShdw blurRad="63500" dist="38099" dir="2700000" algn="ctr" rotWithShape="0">
                     <a:schemeClr val="bg2">
@@ -41941,17 +42226,17 @@
           <a:effectLst/>
           <a:extLst>
             <a:ext uri="{FAA26D3D-D897-4be2-8F04-BA451C77F1D7}">
-              <ma14:placeholderFlag xmlns:ma14="http://schemas.microsoft.com/office/mac/drawingml/2011/main" xmlns="" val="1"/>
+              <ma14:placeholderFlag xmlns="" xmlns:ma14="http://schemas.microsoft.com/office/mac/drawingml/2011/main" val="1"/>
             </a:ext>
             <a:ext uri="{909E8E84-426E-40dd-AFC4-6F175D3DCCD1}">
-              <a14:hiddenFill xmlns:a14="http://schemas.microsoft.com/office/drawing/2010/main" xmlns="">
+              <a14:hiddenFill xmlns="" xmlns:a14="http://schemas.microsoft.com/office/drawing/2010/main">
                 <a:solidFill>
                   <a:schemeClr val="bg1"/>
                 </a:solidFill>
               </a14:hiddenFill>
             </a:ext>
             <a:ext uri="{91240B29-F687-4f45-9708-019B960494DF}">
-              <a14:hiddenLine xmlns:a14="http://schemas.microsoft.com/office/drawing/2010/main" xmlns="" w="12700">
+              <a14:hiddenLine xmlns="" xmlns:a14="http://schemas.microsoft.com/office/drawing/2010/main" w="12700">
                 <a:pattFill prst="narHorz">
                   <a:fgClr>
                     <a:schemeClr val="tx1"/>
@@ -41966,7 +42251,7 @@
               </a14:hiddenLine>
             </a:ext>
             <a:ext uri="{AF507438-7753-43e0-B8FC-AC1667EBCBE1}">
-              <a14:hiddenEffects xmlns:a14="http://schemas.microsoft.com/office/drawing/2010/main" xmlns="">
+              <a14:hiddenEffects xmlns="" xmlns:a14="http://schemas.microsoft.com/office/drawing/2010/main">
                 <a:effectLst>
                   <a:outerShdw blurRad="63500" dist="38099" dir="2700000" algn="ctr" rotWithShape="0">
                     <a:schemeClr val="bg2">
@@ -42267,17 +42552,17 @@
           <a:effectLst/>
           <a:extLst>
             <a:ext uri="{FAA26D3D-D897-4be2-8F04-BA451C77F1D7}">
-              <ma14:placeholderFlag xmlns:ma14="http://schemas.microsoft.com/office/mac/drawingml/2011/main" xmlns="" val="1"/>
+              <ma14:placeholderFlag xmlns="" xmlns:ma14="http://schemas.microsoft.com/office/mac/drawingml/2011/main" val="1"/>
             </a:ext>
             <a:ext uri="{909E8E84-426E-40dd-AFC4-6F175D3DCCD1}">
-              <a14:hiddenFill xmlns:a14="http://schemas.microsoft.com/office/drawing/2010/main" xmlns="">
+              <a14:hiddenFill xmlns="" xmlns:a14="http://schemas.microsoft.com/office/drawing/2010/main">
                 <a:solidFill>
                   <a:schemeClr val="bg1"/>
                 </a:solidFill>
               </a14:hiddenFill>
             </a:ext>
             <a:ext uri="{91240B29-F687-4f45-9708-019B960494DF}">
-              <a14:hiddenLine xmlns:a14="http://schemas.microsoft.com/office/drawing/2010/main" xmlns="" w="12700">
+              <a14:hiddenLine xmlns="" xmlns:a14="http://schemas.microsoft.com/office/drawing/2010/main" w="12700">
                 <a:pattFill prst="narHorz">
                   <a:fgClr>
                     <a:schemeClr val="tx1"/>
@@ -42292,7 +42577,7 @@
               </a14:hiddenLine>
             </a:ext>
             <a:ext uri="{AF507438-7753-43e0-B8FC-AC1667EBCBE1}">
-              <a14:hiddenEffects xmlns:a14="http://schemas.microsoft.com/office/drawing/2010/main" xmlns="">
+              <a14:hiddenEffects xmlns="" xmlns:a14="http://schemas.microsoft.com/office/drawing/2010/main">
                 <a:effectLst>
                   <a:outerShdw blurRad="63500" dist="38099" dir="2700000" algn="ctr" rotWithShape="0">
                     <a:schemeClr val="bg2">
@@ -42648,17 +42933,17 @@
           <a:effectLst/>
           <a:extLst>
             <a:ext uri="{FAA26D3D-D897-4be2-8F04-BA451C77F1D7}">
-              <ma14:placeholderFlag xmlns:ma14="http://schemas.microsoft.com/office/mac/drawingml/2011/main" xmlns="" val="1"/>
+              <ma14:placeholderFlag xmlns="" xmlns:ma14="http://schemas.microsoft.com/office/mac/drawingml/2011/main" val="1"/>
             </a:ext>
             <a:ext uri="{909E8E84-426E-40dd-AFC4-6F175D3DCCD1}">
-              <a14:hiddenFill xmlns:a14="http://schemas.microsoft.com/office/drawing/2010/main" xmlns="">
+              <a14:hiddenFill xmlns="" xmlns:a14="http://schemas.microsoft.com/office/drawing/2010/main">
                 <a:solidFill>
                   <a:schemeClr val="bg1"/>
                 </a:solidFill>
               </a14:hiddenFill>
             </a:ext>
             <a:ext uri="{91240B29-F687-4f45-9708-019B960494DF}">
-              <a14:hiddenLine xmlns:a14="http://schemas.microsoft.com/office/drawing/2010/main" xmlns="" w="12700">
+              <a14:hiddenLine xmlns="" xmlns:a14="http://schemas.microsoft.com/office/drawing/2010/main" w="12700">
                 <a:pattFill prst="narHorz">
                   <a:fgClr>
                     <a:schemeClr val="tx1"/>
@@ -42673,7 +42958,7 @@
               </a14:hiddenLine>
             </a:ext>
             <a:ext uri="{AF507438-7753-43e0-B8FC-AC1667EBCBE1}">
-              <a14:hiddenEffects xmlns:a14="http://schemas.microsoft.com/office/drawing/2010/main" xmlns="">
+              <a14:hiddenEffects xmlns="" xmlns:a14="http://schemas.microsoft.com/office/drawing/2010/main">
                 <a:effectLst>
                   <a:outerShdw blurRad="63500" dist="38099" dir="2700000" algn="ctr" rotWithShape="0">
                     <a:schemeClr val="bg2">
@@ -43755,17 +44040,17 @@
           <a:effectLst/>
           <a:extLst>
             <a:ext uri="{FAA26D3D-D897-4be2-8F04-BA451C77F1D7}">
-              <ma14:placeholderFlag xmlns:ma14="http://schemas.microsoft.com/office/mac/drawingml/2011/main" xmlns="" val="1"/>
+              <ma14:placeholderFlag xmlns="" xmlns:ma14="http://schemas.microsoft.com/office/mac/drawingml/2011/main" val="1"/>
             </a:ext>
             <a:ext uri="{909E8E84-426E-40dd-AFC4-6F175D3DCCD1}">
-              <a14:hiddenFill xmlns:a14="http://schemas.microsoft.com/office/drawing/2010/main" xmlns="">
+              <a14:hiddenFill xmlns="" xmlns:a14="http://schemas.microsoft.com/office/drawing/2010/main">
                 <a:solidFill>
                   <a:schemeClr val="bg1"/>
                 </a:solidFill>
               </a14:hiddenFill>
             </a:ext>
             <a:ext uri="{91240B29-F687-4f45-9708-019B960494DF}">
-              <a14:hiddenLine xmlns:a14="http://schemas.microsoft.com/office/drawing/2010/main" xmlns="" w="12700">
+              <a14:hiddenLine xmlns="" xmlns:a14="http://schemas.microsoft.com/office/drawing/2010/main" w="12700">
                 <a:pattFill prst="narHorz">
                   <a:fgClr>
                     <a:schemeClr val="tx1"/>
@@ -43780,7 +44065,7 @@
               </a14:hiddenLine>
             </a:ext>
             <a:ext uri="{AF507438-7753-43e0-B8FC-AC1667EBCBE1}">
-              <a14:hiddenEffects xmlns:a14="http://schemas.microsoft.com/office/drawing/2010/main" xmlns="">
+              <a14:hiddenEffects xmlns="" xmlns:a14="http://schemas.microsoft.com/office/drawing/2010/main">
                 <a:effectLst>
                   <a:outerShdw blurRad="63500" dist="38099" dir="2700000" algn="ctr" rotWithShape="0">
                     <a:schemeClr val="bg2">
@@ -44107,17 +44392,17 @@
           <a:effectLst/>
           <a:extLst>
             <a:ext uri="{FAA26D3D-D897-4be2-8F04-BA451C77F1D7}">
-              <ma14:placeholderFlag xmlns:ma14="http://schemas.microsoft.com/office/mac/drawingml/2011/main" xmlns="" val="1"/>
+              <ma14:placeholderFlag xmlns="" xmlns:ma14="http://schemas.microsoft.com/office/mac/drawingml/2011/main" val="1"/>
             </a:ext>
             <a:ext uri="{909E8E84-426E-40dd-AFC4-6F175D3DCCD1}">
-              <a14:hiddenFill xmlns:a14="http://schemas.microsoft.com/office/drawing/2010/main" xmlns="">
+              <a14:hiddenFill xmlns="" xmlns:a14="http://schemas.microsoft.com/office/drawing/2010/main">
                 <a:solidFill>
                   <a:schemeClr val="bg1"/>
                 </a:solidFill>
               </a14:hiddenFill>
             </a:ext>
             <a:ext uri="{91240B29-F687-4f45-9708-019B960494DF}">
-              <a14:hiddenLine xmlns:a14="http://schemas.microsoft.com/office/drawing/2010/main" xmlns="" w="12700">
+              <a14:hiddenLine xmlns="" xmlns:a14="http://schemas.microsoft.com/office/drawing/2010/main" w="12700">
                 <a:pattFill prst="narHorz">
                   <a:fgClr>
                     <a:schemeClr val="tx1"/>
@@ -44132,7 +44417,7 @@
               </a14:hiddenLine>
             </a:ext>
             <a:ext uri="{AF507438-7753-43e0-B8FC-AC1667EBCBE1}">
-              <a14:hiddenEffects xmlns:a14="http://schemas.microsoft.com/office/drawing/2010/main" xmlns="">
+              <a14:hiddenEffects xmlns="" xmlns:a14="http://schemas.microsoft.com/office/drawing/2010/main">
                 <a:effectLst>
                   <a:outerShdw blurRad="63500" dist="38099" dir="2700000" algn="ctr" rotWithShape="0">
                     <a:schemeClr val="bg2">
@@ -44457,17 +44742,17 @@
           <a:effectLst/>
           <a:extLst>
             <a:ext uri="{FAA26D3D-D897-4be2-8F04-BA451C77F1D7}">
-              <ma14:placeholderFlag xmlns:ma14="http://schemas.microsoft.com/office/mac/drawingml/2011/main" xmlns="" val="1"/>
+              <ma14:placeholderFlag xmlns="" xmlns:ma14="http://schemas.microsoft.com/office/mac/drawingml/2011/main" val="1"/>
             </a:ext>
             <a:ext uri="{909E8E84-426E-40dd-AFC4-6F175D3DCCD1}">
-              <a14:hiddenFill xmlns:a14="http://schemas.microsoft.com/office/drawing/2010/main" xmlns="">
+              <a14:hiddenFill xmlns="" xmlns:a14="http://schemas.microsoft.com/office/drawing/2010/main">
                 <a:solidFill>
                   <a:schemeClr val="bg1"/>
                 </a:solidFill>
               </a14:hiddenFill>
             </a:ext>
             <a:ext uri="{91240B29-F687-4f45-9708-019B960494DF}">
-              <a14:hiddenLine xmlns:a14="http://schemas.microsoft.com/office/drawing/2010/main" xmlns="" w="12700">
+              <a14:hiddenLine xmlns="" xmlns:a14="http://schemas.microsoft.com/office/drawing/2010/main" w="12700">
                 <a:pattFill prst="narHorz">
                   <a:fgClr>
                     <a:schemeClr val="tx1"/>
@@ -44482,7 +44767,7 @@
               </a14:hiddenLine>
             </a:ext>
             <a:ext uri="{AF507438-7753-43e0-B8FC-AC1667EBCBE1}">
-              <a14:hiddenEffects xmlns:a14="http://schemas.microsoft.com/office/drawing/2010/main" xmlns="">
+              <a14:hiddenEffects xmlns="" xmlns:a14="http://schemas.microsoft.com/office/drawing/2010/main">
                 <a:effectLst>
                   <a:outerShdw blurRad="63500" dist="38099" dir="2700000" algn="ctr" rotWithShape="0">
                     <a:schemeClr val="bg2">
@@ -44845,17 +45130,17 @@
           <a:effectLst/>
           <a:extLst>
             <a:ext uri="{FAA26D3D-D897-4be2-8F04-BA451C77F1D7}">
-              <ma14:placeholderFlag xmlns:ma14="http://schemas.microsoft.com/office/mac/drawingml/2011/main" xmlns="" val="1"/>
+              <ma14:placeholderFlag xmlns="" xmlns:ma14="http://schemas.microsoft.com/office/mac/drawingml/2011/main" val="1"/>
             </a:ext>
             <a:ext uri="{909E8E84-426E-40dd-AFC4-6F175D3DCCD1}">
-              <a14:hiddenFill xmlns:a14="http://schemas.microsoft.com/office/drawing/2010/main" xmlns="">
+              <a14:hiddenFill xmlns="" xmlns:a14="http://schemas.microsoft.com/office/drawing/2010/main">
                 <a:solidFill>
                   <a:schemeClr val="bg1"/>
                 </a:solidFill>
               </a14:hiddenFill>
             </a:ext>
             <a:ext uri="{91240B29-F687-4f45-9708-019B960494DF}">
-              <a14:hiddenLine xmlns:a14="http://schemas.microsoft.com/office/drawing/2010/main" xmlns="" w="12700">
+              <a14:hiddenLine xmlns="" xmlns:a14="http://schemas.microsoft.com/office/drawing/2010/main" w="12700">
                 <a:pattFill prst="narHorz">
                   <a:fgClr>
                     <a:schemeClr val="tx1"/>
@@ -44870,7 +45155,7 @@
               </a14:hiddenLine>
             </a:ext>
             <a:ext uri="{AF507438-7753-43e0-B8FC-AC1667EBCBE1}">
-              <a14:hiddenEffects xmlns:a14="http://schemas.microsoft.com/office/drawing/2010/main" xmlns="">
+              <a14:hiddenEffects xmlns="" xmlns:a14="http://schemas.microsoft.com/office/drawing/2010/main">
                 <a:effectLst>
                   <a:outerShdw blurRad="63500" dist="38099" dir="2700000" algn="ctr" rotWithShape="0">
                     <a:schemeClr val="bg2">
@@ -45185,17 +45470,17 @@
           <a:effectLst/>
           <a:extLst>
             <a:ext uri="{FAA26D3D-D897-4be2-8F04-BA451C77F1D7}">
-              <ma14:placeholderFlag xmlns:ma14="http://schemas.microsoft.com/office/mac/drawingml/2011/main" xmlns="" val="1"/>
+              <ma14:placeholderFlag xmlns="" xmlns:ma14="http://schemas.microsoft.com/office/mac/drawingml/2011/main" val="1"/>
             </a:ext>
             <a:ext uri="{909E8E84-426E-40dd-AFC4-6F175D3DCCD1}">
-              <a14:hiddenFill xmlns:a14="http://schemas.microsoft.com/office/drawing/2010/main" xmlns="">
+              <a14:hiddenFill xmlns="" xmlns:a14="http://schemas.microsoft.com/office/drawing/2010/main">
                 <a:solidFill>
                   <a:schemeClr val="bg1"/>
                 </a:solidFill>
               </a14:hiddenFill>
             </a:ext>
             <a:ext uri="{91240B29-F687-4f45-9708-019B960494DF}">
-              <a14:hiddenLine xmlns:a14="http://schemas.microsoft.com/office/drawing/2010/main" xmlns="" w="12700">
+              <a14:hiddenLine xmlns="" xmlns:a14="http://schemas.microsoft.com/office/drawing/2010/main" w="12700">
                 <a:pattFill prst="narHorz">
                   <a:fgClr>
                     <a:schemeClr val="tx1"/>
@@ -45210,7 +45495,7 @@
               </a14:hiddenLine>
             </a:ext>
             <a:ext uri="{AF507438-7753-43e0-B8FC-AC1667EBCBE1}">
-              <a14:hiddenEffects xmlns:a14="http://schemas.microsoft.com/office/drawing/2010/main" xmlns="">
+              <a14:hiddenEffects xmlns="" xmlns:a14="http://schemas.microsoft.com/office/drawing/2010/main">
                 <a:effectLst>
                   <a:outerShdw blurRad="63500" dist="38099" dir="2700000" algn="ctr" rotWithShape="0">
                     <a:schemeClr val="bg2">
@@ -45534,17 +45819,17 @@
           <a:effectLst/>
           <a:extLst>
             <a:ext uri="{FAA26D3D-D897-4be2-8F04-BA451C77F1D7}">
-              <ma14:placeholderFlag xmlns:ma14="http://schemas.microsoft.com/office/mac/drawingml/2011/main" xmlns="" val="1"/>
+              <ma14:placeholderFlag xmlns="" xmlns:ma14="http://schemas.microsoft.com/office/mac/drawingml/2011/main" val="1"/>
             </a:ext>
             <a:ext uri="{909E8E84-426E-40dd-AFC4-6F175D3DCCD1}">
-              <a14:hiddenFill xmlns:a14="http://schemas.microsoft.com/office/drawing/2010/main" xmlns="">
+              <a14:hiddenFill xmlns="" xmlns:a14="http://schemas.microsoft.com/office/drawing/2010/main">
                 <a:solidFill>
                   <a:schemeClr val="bg1"/>
                 </a:solidFill>
               </a14:hiddenFill>
             </a:ext>
             <a:ext uri="{91240B29-F687-4f45-9708-019B960494DF}">
-              <a14:hiddenLine xmlns:a14="http://schemas.microsoft.com/office/drawing/2010/main" xmlns="" w="12700">
+              <a14:hiddenLine xmlns="" xmlns:a14="http://schemas.microsoft.com/office/drawing/2010/main" w="12700">
                 <a:pattFill prst="narHorz">
                   <a:fgClr>
                     <a:schemeClr val="tx1"/>
@@ -45559,7 +45844,7 @@
               </a14:hiddenLine>
             </a:ext>
             <a:ext uri="{AF507438-7753-43e0-B8FC-AC1667EBCBE1}">
-              <a14:hiddenEffects xmlns:a14="http://schemas.microsoft.com/office/drawing/2010/main" xmlns="">
+              <a14:hiddenEffects xmlns="" xmlns:a14="http://schemas.microsoft.com/office/drawing/2010/main">
                 <a:effectLst>
                   <a:outerShdw blurRad="63500" dist="38099" dir="2700000" algn="ctr" rotWithShape="0">
                     <a:schemeClr val="bg2">
@@ -46658,11 +46943,23 @@
                   <a:srgbClr val="FF0000"/>
                 </a:solidFill>
               </a:rPr>
-              <a:t>They do not update the same variable</a:t>
-            </a:r>
-            <a:r>
-              <a:rPr lang="en-GB" dirty="0"/>
-              <a:t>, so no mutual exclusion is needed.</a:t>
+              <a:t>They do not update the same variable, so no </a:t>
+            </a:r>
+            <a:r>
+              <a:rPr lang="en-GB" dirty="0" err="1">
+                <a:solidFill>
+                  <a:srgbClr val="FF0000"/>
+                </a:solidFill>
+              </a:rPr>
+              <a:t>TestAndSet</a:t>
+            </a:r>
+            <a:r>
+              <a:rPr lang="en-GB" dirty="0">
+                <a:solidFill>
+                  <a:srgbClr val="FF0000"/>
+                </a:solidFill>
+              </a:rPr>
+              <a:t> Instruction is needed.</a:t>
             </a:r>
           </a:p>
           <a:p>
@@ -46951,7 +47248,7 @@
         <a:effectLst/>
         <a:extLst>
           <a:ext uri="{AF507438-7753-43e0-B8FC-AC1667EBCBE1}">
-            <a14:hiddenEffects xmlns:a14="http://schemas.microsoft.com/office/drawing/2010/main" xmlns="">
+            <a14:hiddenEffects xmlns="" xmlns:a14="http://schemas.microsoft.com/office/drawing/2010/main">
               <a:effectLst>
                 <a:outerShdw dist="35921" dir="2700000" algn="ctr" rotWithShape="0">
                   <a:schemeClr val="bg2"/>
@@ -47024,7 +47321,7 @@
         <a:effectLst/>
         <a:extLst>
           <a:ext uri="{AF507438-7753-43e0-B8FC-AC1667EBCBE1}">
-            <a14:hiddenEffects xmlns:a14="http://schemas.microsoft.com/office/drawing/2010/main" xmlns="">
+            <a14:hiddenEffects xmlns="" xmlns:a14="http://schemas.microsoft.com/office/drawing/2010/main">
               <a:effectLst>
                 <a:outerShdw dist="35921" dir="2700000" algn="ctr" rotWithShape="0">
                   <a:schemeClr val="bg2"/>

--- a/PPTs/L3-Exercises ANS.pptx
+++ b/PPTs/L3-Exercises ANS.pptx
@@ -3233,13 +3233,6 @@
           <a:p>
             <a:endParaRPr lang="en-GB" dirty="0"/>
           </a:p>
-          <a:p>
-            <a:r>
-              <a:rPr lang="en-GB" dirty="0" err="1"/>
-              <a:t>acd</a:t>
-            </a:r>
-            <a:endParaRPr lang="en-GB" dirty="0"/>
-          </a:p>
         </p:txBody>
       </p:sp>
     </p:spTree>
@@ -3335,13 +3328,6 @@
             </a:r>
           </a:p>
           <a:p>
-            <a:endParaRPr lang="en-GB" dirty="0"/>
-          </a:p>
-          <a:p>
-            <a:r>
-              <a:rPr lang="en-GB" dirty="0" err="1"/>
-              <a:t>acd</a:t>
-            </a:r>
             <a:endParaRPr lang="en-GB" dirty="0"/>
           </a:p>
         </p:txBody>
@@ -7821,7 +7807,7 @@
           <a:p>
             <a:r>
               <a:rPr lang="en-GB" dirty="0"/>
-              <a:t>Does it achieve one of more of the correctness properties of a concurrent program:</a:t>
+              <a:t>Does it achieve one or more of the correctness properties of a concurrent program:</a:t>
             </a:r>
           </a:p>
           <a:p>
@@ -11045,7 +11031,7 @@
                 <a:latin typeface="Courier New" panose="02070309020205020404" pitchFamily="49" charset="0"/>
                 <a:cs typeface="Courier New" panose="02070309020205020404" pitchFamily="49" charset="0"/>
               </a:rPr>
-              <a:t>flag[0] = true;</a:t>
+              <a:t>flag[0] = true; </a:t>
             </a:r>
             <a:r>
               <a:rPr lang="en-GB" kern="0" dirty="0"/>
@@ -12201,7 +12187,7 @@
           <a:p>
             <a:r>
               <a:rPr lang="en-GB" dirty="0"/>
-              <a:t>Does it achieve one of more of the correctness properties of a concurrent program:</a:t>
+              <a:t>Does it achieve one or more of the correctness properties of a concurrent program:</a:t>
             </a:r>
           </a:p>
           <a:p>
@@ -12344,7 +12330,7 @@
           <a:p>
             <a:r>
               <a:rPr lang="en-GB" dirty="0"/>
-              <a:t>Mutual Exclusion III (Peterson’s Solution): Sample Execution &amp; Answer</a:t>
+              <a:t>Mutual Exclusion III: Sample Execution &amp; Answer</a:t>
             </a:r>
             <a:endParaRPr lang="en-SE" dirty="0"/>
           </a:p>
@@ -12429,7 +12415,7 @@
             </a:r>
             <a:r>
               <a:rPr lang="en-GB" dirty="0"/>
-              <a:t>, so no mutual exclusion is needed for flag variables. Both threads read and write the turn variable, but it is </a:t>
+              <a:t>, so no atomic read-modify-write (TestAndSet) is needed for the flag variables. Both threads read and write the turn variable, but it is </a:t>
             </a:r>
             <a:r>
               <a:rPr lang="en-GB" dirty="0">
@@ -15039,7 +15025,7 @@
           <a:p>
             <a:r>
               <a:rPr lang="en-GB" dirty="0"/>
-              <a:t>Does it achieve one of more of the correctness properties of a concurrent program:</a:t>
+              <a:t>Does it achieve one or more of the correctness properties of a concurrent program:</a:t>
             </a:r>
           </a:p>
           <a:p>
@@ -15131,7 +15117,7 @@
           <a:p>
             <a:r>
               <a:rPr lang="en-GB" sz="2800" dirty="0"/>
-              <a:t>Mutual Exclusion III (Peterson’s Solution Variation) Sample Execution &amp; Answer</a:t>
+              <a:t>Mutual Exclusion III (Peterson’s Solution Variation): Sample Execution &amp; Answer</a:t>
             </a:r>
             <a:endParaRPr lang="en-SE" sz="2800" dirty="0"/>
           </a:p>
@@ -15200,7 +15186,7 @@
           <a:p>
             <a:r>
               <a:rPr lang="en-GB" dirty="0"/>
-              <a:t>Mutual Exclusion: Achieved. Only one thread can enter its critical section at a time due to the conditions on flag and turn.</a:t>
+              <a:t>Mutual Exclusion: Not satisfied. T0 sets flag[0]=true, turn=0, sees flag[1]==false and enters the CS; T1 then sets flag[1]=true, turn=1, its wait condition (flag[0]==true &amp;&amp; turn==0) is false, so T1 also enters the CS while T0 is still inside.</a:t>
             </a:r>
           </a:p>
           <a:p>
@@ -15240,15 +15226,15 @@
           <a:p>
             <a:r>
               <a:rPr lang="en-GB" dirty="0"/>
-              <a:t>Major Flaw: Incorrect handling of the turn variable leads to potential </a:t>
+              <a:t>Major Flaw: Incorrect handling of the turn variable breaks mutual exclusion and allows starvation.</a:t>
             </a:r>
             <a:r>
               <a:rPr lang="en-GB" dirty="0" err="1"/>
-              <a:t>livelock</a:t>
+              <a:t/>
             </a:r>
             <a:r>
               <a:rPr lang="en-GB" dirty="0"/>
-              <a:t> or starvation.</a:t>
+              <a:t/>
             </a:r>
             <a:endParaRPr lang="en-SE" dirty="0"/>
           </a:p>
@@ -19711,7 +19697,7 @@
                 <a:latin typeface="Gill Sans" panose="020B0502020104020203"/>
                 <a:cs typeface="Arial MT"/>
               </a:rPr>
-              <a:t>consist</a:t>
+              <a:t>consists</a:t>
             </a:r>
             <a:r>
               <a:rPr sz="2000" b="0" spc="-35" dirty="0">
@@ -20739,105 +20725,105 @@
                 <a:latin typeface="Gill Sans" panose="020B0502020104020203"/>
                 <a:cs typeface="Arial MT"/>
               </a:rPr>
-              <a:t>before</a:t>
+              <a:t>before t1 executes instruction B of the addition)</a:t>
             </a:r>
             <a:r>
               <a:rPr sz="2000" b="0" spc="-20" dirty="0">
                 <a:latin typeface="Gill Sans" panose="020B0502020104020203"/>
                 <a:cs typeface="Arial MT"/>
               </a:rPr>
-              <a:t> </a:t>
+              <a:t/>
             </a:r>
             <a:r>
               <a:rPr sz="2000" b="0" dirty="0">
                 <a:latin typeface="Gill Sans" panose="020B0502020104020203"/>
                 <a:cs typeface="Arial MT"/>
               </a:rPr>
-              <a:t>execution</a:t>
+              <a:t/>
             </a:r>
             <a:r>
               <a:rPr sz="2000" b="0" spc="-15" dirty="0">
                 <a:latin typeface="Gill Sans" panose="020B0502020104020203"/>
                 <a:cs typeface="Arial MT"/>
               </a:rPr>
-              <a:t> </a:t>
+              <a:t/>
             </a:r>
             <a:r>
               <a:rPr sz="2000" b="0" dirty="0">
                 <a:latin typeface="Gill Sans" panose="020B0502020104020203"/>
                 <a:cs typeface="Arial MT"/>
               </a:rPr>
-              <a:t>instruction</a:t>
+              <a:t/>
             </a:r>
             <a:r>
               <a:rPr sz="2000" b="0" spc="-15" dirty="0">
                 <a:latin typeface="Gill Sans" panose="020B0502020104020203"/>
                 <a:cs typeface="Arial MT"/>
               </a:rPr>
-              <a:t> </a:t>
+              <a:t/>
             </a:r>
             <a:r>
               <a:rPr sz="2000" b="0" dirty="0">
                 <a:latin typeface="Gill Sans" panose="020B0502020104020203"/>
                 <a:cs typeface="Arial MT"/>
               </a:rPr>
-              <a:t>B</a:t>
+              <a:t/>
             </a:r>
             <a:r>
               <a:rPr sz="2000" b="0" spc="-15" dirty="0">
                 <a:latin typeface="Gill Sans" panose="020B0502020104020203"/>
                 <a:cs typeface="Arial MT"/>
               </a:rPr>
-              <a:t> </a:t>
+              <a:t/>
             </a:r>
             <a:r>
               <a:rPr sz="2000" b="0" dirty="0">
                 <a:latin typeface="Gill Sans" panose="020B0502020104020203"/>
                 <a:cs typeface="Arial MT"/>
               </a:rPr>
-              <a:t>of</a:t>
+              <a:t/>
             </a:r>
             <a:r>
               <a:rPr sz="2000" b="0" spc="-20" dirty="0">
                 <a:latin typeface="Gill Sans" panose="020B0502020104020203"/>
                 <a:cs typeface="Arial MT"/>
               </a:rPr>
-              <a:t> </a:t>
+              <a:t/>
             </a:r>
             <a:r>
               <a:rPr sz="2000" b="0" dirty="0">
                 <a:latin typeface="Gill Sans" panose="020B0502020104020203"/>
                 <a:cs typeface="Arial MT"/>
               </a:rPr>
-              <a:t>add.</a:t>
+              <a:t/>
             </a:r>
             <a:r>
               <a:rPr sz="2000" b="0" spc="-15" dirty="0">
                 <a:latin typeface="Gill Sans" panose="020B0502020104020203"/>
                 <a:cs typeface="Arial MT"/>
               </a:rPr>
-              <a:t> </a:t>
+              <a:t/>
             </a:r>
             <a:r>
               <a:rPr sz="2000" b="0" dirty="0">
                 <a:latin typeface="Gill Sans" panose="020B0502020104020203"/>
                 <a:cs typeface="Arial MT"/>
               </a:rPr>
-              <a:t>in</a:t>
+              <a:t/>
             </a:r>
             <a:r>
               <a:rPr sz="2000" b="0" spc="-15" dirty="0">
                 <a:latin typeface="Gill Sans" panose="020B0502020104020203"/>
                 <a:cs typeface="Arial MT"/>
               </a:rPr>
-              <a:t> </a:t>
+              <a:t/>
             </a:r>
             <a:r>
               <a:rPr sz="2000" b="0" spc="-25" dirty="0">
                 <a:latin typeface="Gill Sans" panose="020B0502020104020203"/>
                 <a:cs typeface="Arial MT"/>
               </a:rPr>
-              <a:t>t1)</a:t>
+              <a:t/>
             </a:r>
             <a:endParaRPr sz="2000" b="0" dirty="0">
               <a:latin typeface="Gill Sans" panose="020B0502020104020203"/>
@@ -30428,7 +30414,7 @@
                 <a:latin typeface="Courier New"/>
                 <a:cs typeface="Courier New"/>
               </a:rPr>
-              <a:t>(“7"); </a:t>
+              <a:t>("7"); </a:t>
             </a:r>
           </a:p>
           <a:p>
@@ -30575,7 +30561,7 @@
           <a:p>
             <a:r>
               <a:rPr lang="en-GB" dirty="0"/>
-              <a:t>Solution 2 (right): S2 has initial value 1, so f2 calls S2.wait() and runs first. The rest of the same as Solution 1. You can see that initializing S2=0 has the same effect as initializing S2=1 and let f2 call S2.wait() first. So Solution 1 is better with one less call to wait().</a:t>
+              <a:t>Solution 2 (right): S2 has initial value 1, so f2 calls S2.wait() and runs first. The rest is the same as in Solution 1. You can see that initializing S2=0 has the same effect as initializing S2=1 and let f2 call S2.wait() first. So Solution 1 is better with one less call to wait().</a:t>
             </a:r>
           </a:p>
         </p:txBody>
@@ -39304,7 +39290,7 @@
                 <a:latin typeface="Gill Sans" panose="020B0502020104020203"/>
                 <a:cs typeface="Arial MT"/>
               </a:rPr>
-              <a:t>Thread t1 grabs lock1 and requests lock 2; t2 grabs lock2 requests lock 1</a:t>
+              <a:t>Thread t1 grabs lock1 and requests lock2; t2 grabs lock2 and requests lock1</a:t>
             </a:r>
             <a:endParaRPr lang="en-GB" sz="2400" b="0" spc="-75" baseline="1291" dirty="0">
               <a:latin typeface="Gill Sans" panose="020B0502020104020203"/>
@@ -39415,7 +39401,7 @@
                 <a:latin typeface="Gill Sans" panose="020B0502020104020203"/>
                 <a:ea typeface="ＭＳ Ｐゴシック" charset="0"/>
               </a:rPr>
-              <a:t>t1 runs first to the end, then t2 (or vice versa): x=3, y=3, z=3</a:t>
+              <a:t>t1 runs first to the end, then t2 (or vice versa): x=3, y=3, z=3 (z can also be 1 or 2, see below)</a:t>
             </a:r>
           </a:p>
           <a:p>
@@ -39424,7 +39410,7 @@
                 <a:latin typeface="Gill Sans" panose="020B0502020104020203"/>
                 <a:ea typeface="ＭＳ Ｐゴシック" charset="0"/>
               </a:rPr>
-              <a:t>In t1, lock1.signal() sets lock1=1, lock2.signal() sets lock2=1, this exiting the critical sections protected by lock1 and lock2.</a:t>
+              <a:t>In t1, lock1.signal() sets lock1=1, lock2.signal() sets lock2=1, thus exiting the critical sections protected by lock1 and lock2.</a:t>
             </a:r>
           </a:p>
           <a:p>
@@ -41853,13 +41839,13 @@
         </p:spPr>
         <p:txBody>
           <a:bodyPr>
-            <a:normAutofit lnSpcReduction="10000"/>
+            <a:normAutofit fontScale="92500" lnSpcReduction="20000"/>
           </a:bodyPr>
           <a:lstStyle/>
           <a:p>
             <a:r>
               <a:rPr lang="en-GB" dirty="0"/>
-              <a:t>ANS: Possible values of x after the two threads have completed execution: 5,…15. Min: 5. Max: 15. </a:t>
+              <a:t>ANS: Possible values of x after the two threads have completed execution: 3, 4, 5,…15. Min: 3. Max: 15. </a:t>
             </a:r>
           </a:p>
           <a:p>
@@ -41874,7 +41860,7 @@
             </a:r>
             <a:r>
               <a:rPr lang="en-GB" dirty="0"/>
-              <a:t>between” the load and store of an x=x+1 statement, and vice versa. Each x=x+1 statement can either do nothing (if erased by Thread T1) or increase x by 1. Each x=x+2 statement can either do nothing (if erased by Thread T0) or increase x by 2. Since there are 5 of each type, and since x starts at 0, x has min 5 and max (5*1)+(5*2)=15. Possible values are 5, 6, 7,…15, e.g., If three increments from Thread T0 and two increments from Thread T1 are applied, then x=(3×1)+(2×2)=7.</a:t>
+              <a:t>between” the load and store of an x=x+1 statement, and vice versa. Max: if no update is erased, x=(5×1)+(5×2)=15. Min: one erasure can wipe out many earlier updates, so the minimum is below 5. Schedule giving x=3: T1 loads x=0 (1st iteration); T0 runs 4 iterations (x=4); T1 stores 0+2=2; T0 loads x=2 (5th iteration); T1 runs its other 4 iterations (x=10); T0 stores 2+1=3. Exhaustive enumeration of all interleavings shows x can never end below 3, and every value 3, 4, 5,…15 is possible.</a:t>
             </a:r>
           </a:p>
         </p:txBody>
@@ -43400,7 +43386,7 @@
           <a:p>
             <a:r>
               <a:rPr lang="en-GB" dirty="0"/>
-              <a:t> Concurrency II Answer</a:t>
+              <a:t>Concurrency II Answer</a:t>
             </a:r>
             <a:endParaRPr lang="en-SE" dirty="0"/>
           </a:p>
@@ -43435,7 +43421,7 @@
           <a:p>
             <a:r>
               <a:rPr lang="en-GB" dirty="0"/>
-              <a:t>Since each thread may read the value of int D, then write them in arbitrary order, overwriting each other’s updates. Other possible results include 100 + 10 = 10, 100 + 20 = 120, 100 + 20 – 50 = 70, and so on.</a:t>
+              <a:t>Since each thread may read the value of int D, then write them in arbitrary order, overwriting each other’s updates. Other possible results include 100 + 10 = 110, 100 + 20 = 120, 100 + 20 – 50 = 70, and so on.</a:t>
             </a:r>
             <a:endParaRPr lang="en-SE" dirty="0"/>
           </a:p>
@@ -43954,7 +43940,7 @@
           <a:p>
             <a:r>
               <a:rPr lang="en-GB" dirty="0"/>
-              <a:t>Does it achieve one of more of the correctness properties of a concurrent program:</a:t>
+              <a:t>Does it achieve one or more of the correctness properties of a concurrent program:</a:t>
             </a:r>
           </a:p>
           <a:p>
@@ -45091,7 +45077,7 @@
           <a:p>
             <a:r>
               <a:rPr lang="en-GB" dirty="0"/>
-              <a:t>T0 and T1 take turns to enter the critical section in strict alternation order .</a:t>
+              <a:t>T0 and T1 take turns to enter the critical section in strict alternation order.</a:t>
             </a:r>
             <a:endParaRPr lang="en-SE" dirty="0"/>
           </a:p>
@@ -46868,7 +46854,7 @@
           <a:p>
             <a:r>
               <a:rPr lang="en-GB" dirty="0"/>
-              <a:t>Mutual Exclusion I  Answer </a:t>
+              <a:t>Mutual Exclusion I Answer</a:t>
             </a:r>
             <a:endParaRPr lang="en-SE" dirty="0"/>
           </a:p>
